--- a/water_eda_group2.pptx
+++ b/water_eda_group2.pptx
@@ -5,19 +5,24 @@
     <p:sldMasterId id="2147483648" r:id="rId1"/>
   </p:sldMasterIdLst>
   <p:notesMasterIdLst>
-    <p:notesMasterId r:id="rId12"/>
+    <p:notesMasterId r:id="rId17"/>
   </p:notesMasterIdLst>
   <p:sldIdLst>
     <p:sldId id="256" r:id="rId2"/>
     <p:sldId id="257" r:id="rId3"/>
-    <p:sldId id="258" r:id="rId4"/>
-    <p:sldId id="259" r:id="rId5"/>
-    <p:sldId id="260" r:id="rId6"/>
-    <p:sldId id="261" r:id="rId7"/>
-    <p:sldId id="262" r:id="rId8"/>
-    <p:sldId id="263" r:id="rId9"/>
-    <p:sldId id="264" r:id="rId10"/>
-    <p:sldId id="265" r:id="rId11"/>
+    <p:sldId id="272" r:id="rId4"/>
+    <p:sldId id="269" r:id="rId5"/>
+    <p:sldId id="258" r:id="rId6"/>
+    <p:sldId id="259" r:id="rId7"/>
+    <p:sldId id="260" r:id="rId8"/>
+    <p:sldId id="261" r:id="rId9"/>
+    <p:sldId id="262" r:id="rId10"/>
+    <p:sldId id="271" r:id="rId11"/>
+    <p:sldId id="266" r:id="rId12"/>
+    <p:sldId id="263" r:id="rId13"/>
+    <p:sldId id="264" r:id="rId14"/>
+    <p:sldId id="265" r:id="rId15"/>
+    <p:sldId id="270" r:id="rId16"/>
   </p:sldIdLst>
   <p:sldSz cx="9144000" cy="5143500" type="screen16x9"/>
   <p:notesSz cx="5143500" cy="9144000"/>
@@ -119,6 +124,14 @@
     </p:ext>
   </p:extLst>
 </p:presentation>
+</file>
+
+<file path=ppt/revisionInfo.xml><?xml version="1.0" encoding="utf-8"?>
+<p1510:revInfo xmlns:a="http://schemas.openxmlformats.org/drawingml/2006/main" xmlns:r="http://schemas.openxmlformats.org/officeDocument/2006/relationships" xmlns:p1510="http://schemas.microsoft.com/office/powerpoint/2015/10/main">
+  <p1510:revLst>
+    <p1510:client id="{2035BDC4-2971-4E36-BF03-5567F460A137}" v="34" dt="2026-03-07T09:27:03.337"/>
+  </p1510:revLst>
+</p1510:revInfo>
 </file>
 
 <file path=ppt/charts/chart1.xml><?xml version="1.0" encoding="utf-8"?>
@@ -426,6 +439,311 @@
 </c:chartSpace>
 </file>
 
+<file path=ppt/charts/chart2.xml><?xml version="1.0" encoding="utf-8"?>
+<c:chartSpace xmlns:c="http://schemas.openxmlformats.org/drawingml/2006/chart" xmlns:a="http://schemas.openxmlformats.org/drawingml/2006/main" xmlns:r="http://schemas.openxmlformats.org/officeDocument/2006/relationships" xmlns:c16r2="http://schemas.microsoft.com/office/drawing/2015/06/chart">
+  <c:date1904 val="0"/>
+  <c:lang val="en-US"/>
+  <c:roundedCorners val="1"/>
+  <c:style val="2"/>
+  <c:chart>
+    <c:title>
+      <c:tx>
+        <c:rich>
+          <a:bodyPr/>
+          <a:lstStyle/>
+          <a:p>
+            <a:pPr>
+              <a:defRPr sz="1100" b="0" i="0" u="none" strike="noStrike">
+                <a:solidFill>
+                  <a:srgbClr val="0A2342"/>
+                </a:solidFill>
+                <a:latin typeface="Arial"/>
+              </a:defRPr>
+            </a:pPr>
+            <a:r>
+              <a:rPr lang="en-US" sz="1100" b="0" i="0" u="none" strike="noStrike">
+                <a:solidFill>
+                  <a:srgbClr val="0A2342"/>
+                </a:solidFill>
+                <a:latin typeface="Arial"/>
+              </a:rPr>
+              <a:t>Global Water Consumption Trend (Index)</a:t>
+            </a:r>
+          </a:p>
+        </c:rich>
+      </c:tx>
+      <c:overlay val="0"/>
+    </c:title>
+    <c:autoTitleDeleted val="0"/>
+    <c:plotArea>
+      <c:layout/>
+      <c:lineChart>
+        <c:grouping val="standard"/>
+        <c:varyColors val="0"/>
+        <c:ser>
+          <c:idx val="0"/>
+          <c:order val="0"/>
+          <c:tx>
+            <c:strRef>
+              <c:f>Sheet1!$B$1</c:f>
+              <c:strCache>
+                <c:ptCount val="1"/>
+                <c:pt idx="0">
+                  <c:v>Avg. Water Consumption</c:v>
+                </c:pt>
+              </c:strCache>
+            </c:strRef>
+          </c:tx>
+          <c:spPr>
+            <a:ln w="31750" cap="flat">
+              <a:solidFill>
+                <a:srgbClr val="0D9488"/>
+              </a:solidFill>
+              <a:prstDash val="solid"/>
+              <a:round/>
+            </a:ln>
+            <a:effectLst/>
+          </c:spPr>
+          <c:marker>
+            <c:symbol val="circle"/>
+            <c:size val="6"/>
+            <c:spPr>
+              <a:solidFill>
+                <a:srgbClr val="0D9488"/>
+              </a:solidFill>
+              <a:ln w="9525" cap="flat">
+                <a:solidFill>
+                  <a:srgbClr val="0D9488"/>
+                </a:solidFill>
+                <a:prstDash val="solid"/>
+                <a:round/>
+              </a:ln>
+              <a:effectLst/>
+            </c:spPr>
+          </c:marker>
+          <c:cat>
+            <c:strRef>
+              <c:f>Sheet1!$A$2:$A$12</c:f>
+              <c:strCache>
+                <c:ptCount val="11"/>
+                <c:pt idx="0">
+                  <c:v>2010</c:v>
+                </c:pt>
+                <c:pt idx="1">
+                  <c:v>2011</c:v>
+                </c:pt>
+                <c:pt idx="2">
+                  <c:v>2012</c:v>
+                </c:pt>
+                <c:pt idx="3">
+                  <c:v>2013</c:v>
+                </c:pt>
+                <c:pt idx="4">
+                  <c:v>2014</c:v>
+                </c:pt>
+                <c:pt idx="5">
+                  <c:v>2015</c:v>
+                </c:pt>
+                <c:pt idx="6">
+                  <c:v>2016</c:v>
+                </c:pt>
+                <c:pt idx="7">
+                  <c:v>2017</c:v>
+                </c:pt>
+                <c:pt idx="8">
+                  <c:v>2018</c:v>
+                </c:pt>
+                <c:pt idx="9">
+                  <c:v>2019</c:v>
+                </c:pt>
+                <c:pt idx="10">
+                  <c:v>2020</c:v>
+                </c:pt>
+              </c:strCache>
+            </c:strRef>
+          </c:cat>
+          <c:val>
+            <c:numRef>
+              <c:f>Sheet1!$B$2:$B$12</c:f>
+              <c:numCache>
+                <c:formatCode>General</c:formatCode>
+                <c:ptCount val="11"/>
+                <c:pt idx="0">
+                  <c:v>410</c:v>
+                </c:pt>
+                <c:pt idx="1">
+                  <c:v>415</c:v>
+                </c:pt>
+                <c:pt idx="2">
+                  <c:v>418</c:v>
+                </c:pt>
+                <c:pt idx="3">
+                  <c:v>421</c:v>
+                </c:pt>
+                <c:pt idx="4">
+                  <c:v>427</c:v>
+                </c:pt>
+                <c:pt idx="5">
+                  <c:v>430</c:v>
+                </c:pt>
+                <c:pt idx="6">
+                  <c:v>436</c:v>
+                </c:pt>
+                <c:pt idx="7">
+                  <c:v>438</c:v>
+                </c:pt>
+                <c:pt idx="8">
+                  <c:v>443</c:v>
+                </c:pt>
+                <c:pt idx="9">
+                  <c:v>448</c:v>
+                </c:pt>
+                <c:pt idx="10">
+                  <c:v>452</c:v>
+                </c:pt>
+              </c:numCache>
+            </c:numRef>
+          </c:val>
+          <c:smooth val="1"/>
+          <c:extLst>
+            <c:ext xmlns:c16="http://schemas.microsoft.com/office/drawing/2014/chart" uri="{C3380CC4-5D6E-409C-BE32-E72D297353CC}">
+              <c16:uniqueId val="{00000000-E3E0-4F9C-8880-05D1EAC20C4B}"/>
+            </c:ext>
+          </c:extLst>
+        </c:ser>
+        <c:dLbls>
+          <c:showLegendKey val="0"/>
+          <c:showVal val="0"/>
+          <c:showCatName val="0"/>
+          <c:showSerName val="0"/>
+          <c:showPercent val="0"/>
+          <c:showBubbleSize val="0"/>
+        </c:dLbls>
+        <c:marker val="1"/>
+        <c:smooth val="0"/>
+        <c:axId val="2094734554"/>
+        <c:axId val="2094734552"/>
+      </c:lineChart>
+      <c:catAx>
+        <c:axId val="2094734554"/>
+        <c:scaling>
+          <c:orientation val="minMax"/>
+        </c:scaling>
+        <c:delete val="0"/>
+        <c:axPos val="b"/>
+        <c:numFmt formatCode="General" sourceLinked="1"/>
+        <c:majorTickMark val="out"/>
+        <c:minorTickMark val="none"/>
+        <c:tickLblPos val="low"/>
+        <c:spPr>
+          <a:ln w="12700" cap="flat">
+            <a:solidFill>
+              <a:srgbClr val="888888"/>
+            </a:solidFill>
+            <a:prstDash val="solid"/>
+            <a:round/>
+          </a:ln>
+        </c:spPr>
+        <c:txPr>
+          <a:bodyPr/>
+          <a:lstStyle/>
+          <a:p>
+            <a:pPr>
+              <a:defRPr sz="1200" b="0" i="0" u="none" strike="noStrike">
+                <a:solidFill>
+                  <a:srgbClr val="64748B"/>
+                </a:solidFill>
+                <a:latin typeface="Arial"/>
+              </a:defRPr>
+            </a:pPr>
+            <a:endParaRPr lang="en-US"/>
+          </a:p>
+        </c:txPr>
+        <c:crossAx val="2094734552"/>
+        <c:crosses val="autoZero"/>
+        <c:auto val="1"/>
+        <c:lblAlgn val="ctr"/>
+        <c:lblOffset val="100"/>
+        <c:noMultiLvlLbl val="1"/>
+      </c:catAx>
+      <c:valAx>
+        <c:axId val="2094734552"/>
+        <c:scaling>
+          <c:orientation val="minMax"/>
+        </c:scaling>
+        <c:delete val="0"/>
+        <c:axPos val="l"/>
+        <c:majorGridlines>
+          <c:spPr>
+            <a:ln w="6350" cap="flat">
+              <a:solidFill>
+                <a:srgbClr val="E2E8F0"/>
+              </a:solidFill>
+              <a:prstDash val="solid"/>
+              <a:round/>
+            </a:ln>
+          </c:spPr>
+        </c:majorGridlines>
+        <c:numFmt formatCode="General" sourceLinked="0"/>
+        <c:majorTickMark val="out"/>
+        <c:minorTickMark val="none"/>
+        <c:tickLblPos val="nextTo"/>
+        <c:spPr>
+          <a:ln w="12700" cap="flat">
+            <a:solidFill>
+              <a:srgbClr val="888888"/>
+            </a:solidFill>
+            <a:prstDash val="solid"/>
+            <a:round/>
+          </a:ln>
+        </c:spPr>
+        <c:txPr>
+          <a:bodyPr/>
+          <a:lstStyle/>
+          <a:p>
+            <a:pPr>
+              <a:defRPr sz="1200" b="0" i="0" u="none" strike="noStrike">
+                <a:solidFill>
+                  <a:srgbClr val="64748B"/>
+                </a:solidFill>
+                <a:latin typeface="Arial"/>
+              </a:defRPr>
+            </a:pPr>
+            <a:endParaRPr lang="en-US"/>
+          </a:p>
+        </c:txPr>
+        <c:crossAx val="2094734554"/>
+        <c:crosses val="autoZero"/>
+        <c:crossBetween val="between"/>
+      </c:valAx>
+      <c:spPr>
+        <a:noFill/>
+        <a:ln w="25400">
+          <a:noFill/>
+        </a:ln>
+        <a:effectLst/>
+      </c:spPr>
+    </c:plotArea>
+    <c:plotVisOnly val="1"/>
+    <c:dispBlanksAs val="span"/>
+    <c:showDLblsOverMax val="1"/>
+  </c:chart>
+  <c:spPr>
+    <a:solidFill>
+      <a:srgbClr val="FFFFFF"/>
+    </a:solidFill>
+    <a:ln>
+      <a:noFill/>
+    </a:ln>
+    <a:effectLst/>
+  </c:spPr>
+  <c:externalData r:id="rId1">
+    <c:autoUpdate val="0"/>
+  </c:externalData>
+  <c:userShapes r:id="rId2"/>
+</c:chartSpace>
+</file>
+
 <file path=ppt/drawings/drawing1.xml><?xml version="1.0" encoding="utf-8"?>
 <c:userShapes xmlns:c="http://schemas.openxmlformats.org/drawingml/2006/chart">
   <cdr:relSizeAnchor xmlns:cdr="http://schemas.openxmlformats.org/drawingml/2006/chartDrawing">
@@ -460,6 +778,50 @@
         <a:xfrm xmlns:a="http://schemas.openxmlformats.org/drawingml/2006/main">
           <a:off x="0" y="0"/>
           <a:ext cx="7017111" cy="4178515"/>
+        </a:xfrm>
+        <a:prstGeom xmlns:a="http://schemas.openxmlformats.org/drawingml/2006/main" prst="rect">
+          <a:avLst/>
+        </a:prstGeom>
+      </cdr:spPr>
+    </cdr:pic>
+  </cdr:relSizeAnchor>
+</c:userShapes>
+</file>
+
+<file path=ppt/drawings/drawing2.xml><?xml version="1.0" encoding="utf-8"?>
+<c:userShapes xmlns:c="http://schemas.openxmlformats.org/drawingml/2006/chart">
+  <cdr:relSizeAnchor xmlns:cdr="http://schemas.openxmlformats.org/drawingml/2006/chartDrawing">
+    <cdr:from>
+      <cdr:x>0</cdr:x>
+      <cdr:y>0</cdr:y>
+    </cdr:from>
+    <cdr:to>
+      <cdr:x>1</cdr:x>
+      <cdr:y>1</cdr:y>
+    </cdr:to>
+    <cdr:pic>
+      <cdr:nvPicPr>
+        <cdr:cNvPr id="2" name="chart">
+          <a:extLst xmlns:a="http://schemas.openxmlformats.org/drawingml/2006/main">
+            <a:ext uri="{FF2B5EF4-FFF2-40B4-BE49-F238E27FC236}">
+              <a16:creationId xmlns:a16="http://schemas.microsoft.com/office/drawing/2014/main" id="{378B7638-B2EF-8CDD-2260-B23681697B15}"/>
+            </a:ext>
+          </a:extLst>
+        </cdr:cNvPr>
+        <cdr:cNvPicPr>
+          <a:picLocks xmlns:a="http://schemas.openxmlformats.org/drawingml/2006/main" noChangeAspect="1"/>
+        </cdr:cNvPicPr>
+      </cdr:nvPicPr>
+      <cdr:blipFill>
+        <a:blip xmlns:a="http://schemas.openxmlformats.org/drawingml/2006/main" xmlns:r="http://schemas.openxmlformats.org/officeDocument/2006/relationships" r:embed="rId1"/>
+        <a:stretch xmlns:a="http://schemas.openxmlformats.org/drawingml/2006/main">
+          <a:fillRect/>
+        </a:stretch>
+      </cdr:blipFill>
+      <cdr:spPr>
+        <a:xfrm xmlns:a="http://schemas.openxmlformats.org/drawingml/2006/main">
+          <a:off x="-365760" y="-914400"/>
+          <a:ext cx="5212080" cy="4114800"/>
         </a:xfrm>
         <a:prstGeom xmlns:a="http://schemas.openxmlformats.org/drawingml/2006/main" prst="rect">
           <a:avLst/>
@@ -691,6 +1053,236 @@
   <p:cSld>
     <p:spTree>
       <p:nvGrpSpPr>
+        <p:cNvPr id="1" name="">
+          <a:extLst>
+            <a:ext uri="{FF2B5EF4-FFF2-40B4-BE49-F238E27FC236}">
+              <a16:creationId xmlns:a16="http://schemas.microsoft.com/office/drawing/2014/main" id="{B94C3B95-4409-99C8-84C2-5A8270AC75C1}"/>
+            </a:ext>
+          </a:extLst>
+        </p:cNvPr>
+        <p:cNvGrpSpPr/>
+        <p:nvPr/>
+      </p:nvGrpSpPr>
+      <p:grpSpPr>
+        <a:xfrm>
+          <a:off x="0" y="0"/>
+          <a:ext cx="0" cy="0"/>
+          <a:chOff x="0" y="0"/>
+          <a:chExt cx="0" cy="0"/>
+        </a:xfrm>
+      </p:grpSpPr>
+      <p:sp>
+        <p:nvSpPr>
+          <p:cNvPr id="2" name="Slide Image Placeholder 1">
+            <a:extLst>
+              <a:ext uri="{FF2B5EF4-FFF2-40B4-BE49-F238E27FC236}">
+                <a16:creationId xmlns:a16="http://schemas.microsoft.com/office/drawing/2014/main" id="{06A03D6F-DC87-B398-E3D8-D1D78D894C41}"/>
+              </a:ext>
+            </a:extLst>
+          </p:cNvPr>
+          <p:cNvSpPr>
+            <a:spLocks noGrp="1" noRot="1" noChangeAspect="1"/>
+          </p:cNvSpPr>
+          <p:nvPr>
+            <p:ph type="sldImg"/>
+          </p:nvPr>
+        </p:nvSpPr>
+        <p:spPr/>
+        <p:txBody>
+          <a:bodyPr/>
+          <a:lstStyle/>
+          <a:p>
+            <a:endParaRPr lang="en-IN"/>
+          </a:p>
+        </p:txBody>
+      </p:sp>
+      <p:sp>
+        <p:nvSpPr>
+          <p:cNvPr id="3" name="Notes Placeholder 2">
+            <a:extLst>
+              <a:ext uri="{FF2B5EF4-FFF2-40B4-BE49-F238E27FC236}">
+                <a16:creationId xmlns:a16="http://schemas.microsoft.com/office/drawing/2014/main" id="{28EB9065-6FA0-3F60-1AE9-396E572B8BC3}"/>
+              </a:ext>
+            </a:extLst>
+          </p:cNvPr>
+          <p:cNvSpPr>
+            <a:spLocks noGrp="1"/>
+          </p:cNvSpPr>
+          <p:nvPr>
+            <p:ph type="body" idx="1"/>
+          </p:nvPr>
+        </p:nvSpPr>
+        <p:spPr/>
+        <p:txBody>
+          <a:bodyPr/>
+          <a:lstStyle/>
+          <a:p>
+            <a:endParaRPr lang="en-US" dirty="0"/>
+          </a:p>
+        </p:txBody>
+      </p:sp>
+      <p:sp>
+        <p:nvSpPr>
+          <p:cNvPr id="4" name="Slide Number Placeholder 3">
+            <a:extLst>
+              <a:ext uri="{FF2B5EF4-FFF2-40B4-BE49-F238E27FC236}">
+                <a16:creationId xmlns:a16="http://schemas.microsoft.com/office/drawing/2014/main" id="{D3D6B5EF-41A9-1984-A123-6CE8C092AD81}"/>
+              </a:ext>
+            </a:extLst>
+          </p:cNvPr>
+          <p:cNvSpPr>
+            <a:spLocks noGrp="1"/>
+          </p:cNvSpPr>
+          <p:nvPr>
+            <p:ph type="sldNum" sz="quarter" idx="10"/>
+          </p:nvPr>
+        </p:nvSpPr>
+        <p:spPr/>
+        <p:txBody>
+          <a:bodyPr/>
+          <a:lstStyle/>
+          <a:p>
+            <a:fld id="{F7021451-1387-4CA6-816F-3879F97B5CBC}" type="slidenum">
+              <a:rPr lang="en-US"/>
+              <a:t>10</a:t>
+            </a:fld>
+            <a:endParaRPr lang="en-US"/>
+          </a:p>
+        </p:txBody>
+      </p:sp>
+    </p:spTree>
+    <p:extLst>
+      <p:ext uri="{BB962C8B-B14F-4D97-AF65-F5344CB8AC3E}">
+        <p14:creationId xmlns:p14="http://schemas.microsoft.com/office/powerpoint/2010/main" val="3449364409"/>
+      </p:ext>
+    </p:extLst>
+  </p:cSld>
+  <p:clrMapOvr>
+    <a:masterClrMapping/>
+  </p:clrMapOvr>
+</p:notes>
+</file>
+
+<file path=ppt/notesSlides/notesSlide11.xml><?xml version="1.0" encoding="utf-8"?>
+<p:notes xmlns:a="http://schemas.openxmlformats.org/drawingml/2006/main" xmlns:r="http://schemas.openxmlformats.org/officeDocument/2006/relationships" xmlns:p="http://schemas.openxmlformats.org/presentationml/2006/main">
+  <p:cSld>
+    <p:spTree>
+      <p:nvGrpSpPr>
+        <p:cNvPr id="1" name="">
+          <a:extLst>
+            <a:ext uri="{FF2B5EF4-FFF2-40B4-BE49-F238E27FC236}">
+              <a16:creationId xmlns:a16="http://schemas.microsoft.com/office/drawing/2014/main" id="{1FB71AB8-6899-43DE-1865-E1AC4577D3CC}"/>
+            </a:ext>
+          </a:extLst>
+        </p:cNvPr>
+        <p:cNvGrpSpPr/>
+        <p:nvPr/>
+      </p:nvGrpSpPr>
+      <p:grpSpPr>
+        <a:xfrm>
+          <a:off x="0" y="0"/>
+          <a:ext cx="0" cy="0"/>
+          <a:chOff x="0" y="0"/>
+          <a:chExt cx="0" cy="0"/>
+        </a:xfrm>
+      </p:grpSpPr>
+      <p:sp>
+        <p:nvSpPr>
+          <p:cNvPr id="2" name="Slide Image Placeholder 1">
+            <a:extLst>
+              <a:ext uri="{FF2B5EF4-FFF2-40B4-BE49-F238E27FC236}">
+                <a16:creationId xmlns:a16="http://schemas.microsoft.com/office/drawing/2014/main" id="{DEFE5475-ACB7-B87B-31E2-6AF57CD118D5}"/>
+              </a:ext>
+            </a:extLst>
+          </p:cNvPr>
+          <p:cNvSpPr>
+            <a:spLocks noGrp="1" noRot="1" noChangeAspect="1"/>
+          </p:cNvSpPr>
+          <p:nvPr>
+            <p:ph type="sldImg"/>
+          </p:nvPr>
+        </p:nvSpPr>
+        <p:spPr/>
+        <p:txBody>
+          <a:bodyPr/>
+          <a:lstStyle/>
+          <a:p>
+            <a:endParaRPr lang="en-IN"/>
+          </a:p>
+        </p:txBody>
+      </p:sp>
+      <p:sp>
+        <p:nvSpPr>
+          <p:cNvPr id="3" name="Notes Placeholder 2">
+            <a:extLst>
+              <a:ext uri="{FF2B5EF4-FFF2-40B4-BE49-F238E27FC236}">
+                <a16:creationId xmlns:a16="http://schemas.microsoft.com/office/drawing/2014/main" id="{893B5F66-3AED-70F1-BE2B-49C3C5E000C4}"/>
+              </a:ext>
+            </a:extLst>
+          </p:cNvPr>
+          <p:cNvSpPr>
+            <a:spLocks noGrp="1"/>
+          </p:cNvSpPr>
+          <p:nvPr>
+            <p:ph type="body" idx="1"/>
+          </p:nvPr>
+        </p:nvSpPr>
+        <p:spPr/>
+        <p:txBody>
+          <a:bodyPr/>
+          <a:lstStyle/>
+          <a:p>
+            <a:endParaRPr lang="en-US" dirty="0"/>
+          </a:p>
+        </p:txBody>
+      </p:sp>
+      <p:sp>
+        <p:nvSpPr>
+          <p:cNvPr id="4" name="Slide Number Placeholder 3">
+            <a:extLst>
+              <a:ext uri="{FF2B5EF4-FFF2-40B4-BE49-F238E27FC236}">
+                <a16:creationId xmlns:a16="http://schemas.microsoft.com/office/drawing/2014/main" id="{C95DCB94-E8EB-6548-F8A9-7CADA8FF1D67}"/>
+              </a:ext>
+            </a:extLst>
+          </p:cNvPr>
+          <p:cNvSpPr>
+            <a:spLocks noGrp="1"/>
+          </p:cNvSpPr>
+          <p:nvPr>
+            <p:ph type="sldNum" sz="quarter" idx="10"/>
+          </p:nvPr>
+        </p:nvSpPr>
+        <p:spPr/>
+        <p:txBody>
+          <a:bodyPr/>
+          <a:lstStyle/>
+          <a:p>
+            <a:fld id="{F7021451-1387-4CA6-816F-3879F97B5CBC}" type="slidenum">
+              <a:rPr lang="en-US"/>
+              <a:t>11</a:t>
+            </a:fld>
+            <a:endParaRPr lang="en-US"/>
+          </a:p>
+        </p:txBody>
+      </p:sp>
+    </p:spTree>
+    <p:extLst>
+      <p:ext uri="{BB962C8B-B14F-4D97-AF65-F5344CB8AC3E}">
+        <p14:creationId xmlns:p14="http://schemas.microsoft.com/office/powerpoint/2010/main" val="3169940239"/>
+      </p:ext>
+    </p:extLst>
+  </p:cSld>
+  <p:clrMapOvr>
+    <a:masterClrMapping/>
+  </p:clrMapOvr>
+</p:notes>
+</file>
+
+<file path=ppt/notesSlides/notesSlide12.xml><?xml version="1.0" encoding="utf-8"?>
+<p:notes xmlns:a="http://schemas.openxmlformats.org/drawingml/2006/main" xmlns:r="http://schemas.openxmlformats.org/officeDocument/2006/relationships" xmlns:p="http://schemas.openxmlformats.org/presentationml/2006/main">
+  <p:cSld>
+    <p:spTree>
+      <p:nvGrpSpPr>
         <p:cNvPr id="1" name=""/>
         <p:cNvGrpSpPr/>
         <p:nvPr/>
@@ -758,7 +1350,7 @@
           <a:p>
             <a:fld id="{F7021451-1387-4CA6-816F-3879F97B5CBC}" type="slidenum">
               <a:rPr lang="en-US"/>
-              <a:t>10</a:t>
+              <a:t>12</a:t>
             </a:fld>
             <a:endParaRPr lang="en-US"/>
           </a:p>
@@ -768,6 +1360,303 @@
     <p:extLst>
       <p:ext uri="{BB962C8B-B14F-4D97-AF65-F5344CB8AC3E}">
         <p14:creationId xmlns:p14="http://schemas.microsoft.com/office/powerpoint/2010/main" val="1024086991"/>
+      </p:ext>
+    </p:extLst>
+  </p:cSld>
+  <p:clrMapOvr>
+    <a:masterClrMapping/>
+  </p:clrMapOvr>
+</p:notes>
+</file>
+
+<file path=ppt/notesSlides/notesSlide13.xml><?xml version="1.0" encoding="utf-8"?>
+<p:notes xmlns:a="http://schemas.openxmlformats.org/drawingml/2006/main" xmlns:r="http://schemas.openxmlformats.org/officeDocument/2006/relationships" xmlns:p="http://schemas.openxmlformats.org/presentationml/2006/main">
+  <p:cSld>
+    <p:spTree>
+      <p:nvGrpSpPr>
+        <p:cNvPr id="1" name=""/>
+        <p:cNvGrpSpPr/>
+        <p:nvPr/>
+      </p:nvGrpSpPr>
+      <p:grpSpPr>
+        <a:xfrm>
+          <a:off x="0" y="0"/>
+          <a:ext cx="0" cy="0"/>
+          <a:chOff x="0" y="0"/>
+          <a:chExt cx="0" cy="0"/>
+        </a:xfrm>
+      </p:grpSpPr>
+      <p:sp>
+        <p:nvSpPr>
+          <p:cNvPr id="2" name="Slide Image Placeholder 1"/>
+          <p:cNvSpPr>
+            <a:spLocks noGrp="1" noRot="1" noChangeAspect="1"/>
+          </p:cNvSpPr>
+          <p:nvPr>
+            <p:ph type="sldImg"/>
+          </p:nvPr>
+        </p:nvSpPr>
+        <p:spPr/>
+        <p:txBody>
+          <a:bodyPr/>
+          <a:lstStyle/>
+          <a:p>
+            <a:endParaRPr lang="en-IN"/>
+          </a:p>
+        </p:txBody>
+      </p:sp>
+      <p:sp>
+        <p:nvSpPr>
+          <p:cNvPr id="3" name="Notes Placeholder 2"/>
+          <p:cNvSpPr>
+            <a:spLocks noGrp="1"/>
+          </p:cNvSpPr>
+          <p:nvPr>
+            <p:ph type="body" idx="1"/>
+          </p:nvPr>
+        </p:nvSpPr>
+        <p:spPr/>
+        <p:txBody>
+          <a:bodyPr/>
+          <a:lstStyle/>
+          <a:p>
+            <a:endParaRPr lang="en-US" dirty="0"/>
+          </a:p>
+        </p:txBody>
+      </p:sp>
+      <p:sp>
+        <p:nvSpPr>
+          <p:cNvPr id="4" name="Slide Number Placeholder 3"/>
+          <p:cNvSpPr>
+            <a:spLocks noGrp="1"/>
+          </p:cNvSpPr>
+          <p:nvPr>
+            <p:ph type="sldNum" sz="quarter" idx="10"/>
+          </p:nvPr>
+        </p:nvSpPr>
+        <p:spPr/>
+        <p:txBody>
+          <a:bodyPr/>
+          <a:lstStyle/>
+          <a:p>
+            <a:fld id="{F7021451-1387-4CA6-816F-3879F97B5CBC}" type="slidenum">
+              <a:rPr lang="en-US"/>
+              <a:t>13</a:t>
+            </a:fld>
+            <a:endParaRPr lang="en-US"/>
+          </a:p>
+        </p:txBody>
+      </p:sp>
+    </p:spTree>
+    <p:extLst>
+      <p:ext uri="{BB962C8B-B14F-4D97-AF65-F5344CB8AC3E}">
+        <p14:creationId xmlns:p14="http://schemas.microsoft.com/office/powerpoint/2010/main" val="1024086991"/>
+      </p:ext>
+    </p:extLst>
+  </p:cSld>
+  <p:clrMapOvr>
+    <a:masterClrMapping/>
+  </p:clrMapOvr>
+</p:notes>
+</file>
+
+<file path=ppt/notesSlides/notesSlide14.xml><?xml version="1.0" encoding="utf-8"?>
+<p:notes xmlns:a="http://schemas.openxmlformats.org/drawingml/2006/main" xmlns:r="http://schemas.openxmlformats.org/officeDocument/2006/relationships" xmlns:p="http://schemas.openxmlformats.org/presentationml/2006/main">
+  <p:cSld>
+    <p:spTree>
+      <p:nvGrpSpPr>
+        <p:cNvPr id="1" name=""/>
+        <p:cNvGrpSpPr/>
+        <p:nvPr/>
+      </p:nvGrpSpPr>
+      <p:grpSpPr>
+        <a:xfrm>
+          <a:off x="0" y="0"/>
+          <a:ext cx="0" cy="0"/>
+          <a:chOff x="0" y="0"/>
+          <a:chExt cx="0" cy="0"/>
+        </a:xfrm>
+      </p:grpSpPr>
+      <p:sp>
+        <p:nvSpPr>
+          <p:cNvPr id="2" name="Slide Image Placeholder 1"/>
+          <p:cNvSpPr>
+            <a:spLocks noGrp="1" noRot="1" noChangeAspect="1"/>
+          </p:cNvSpPr>
+          <p:nvPr>
+            <p:ph type="sldImg"/>
+          </p:nvPr>
+        </p:nvSpPr>
+        <p:spPr/>
+        <p:txBody>
+          <a:bodyPr/>
+          <a:lstStyle/>
+          <a:p>
+            <a:endParaRPr lang="en-IN"/>
+          </a:p>
+        </p:txBody>
+      </p:sp>
+      <p:sp>
+        <p:nvSpPr>
+          <p:cNvPr id="3" name="Notes Placeholder 2"/>
+          <p:cNvSpPr>
+            <a:spLocks noGrp="1"/>
+          </p:cNvSpPr>
+          <p:nvPr>
+            <p:ph type="body" idx="1"/>
+          </p:nvPr>
+        </p:nvSpPr>
+        <p:spPr/>
+        <p:txBody>
+          <a:bodyPr/>
+          <a:lstStyle/>
+          <a:p>
+            <a:endParaRPr lang="en-US" dirty="0"/>
+          </a:p>
+        </p:txBody>
+      </p:sp>
+      <p:sp>
+        <p:nvSpPr>
+          <p:cNvPr id="4" name="Slide Number Placeholder 3"/>
+          <p:cNvSpPr>
+            <a:spLocks noGrp="1"/>
+          </p:cNvSpPr>
+          <p:nvPr>
+            <p:ph type="sldNum" sz="quarter" idx="10"/>
+          </p:nvPr>
+        </p:nvSpPr>
+        <p:spPr/>
+        <p:txBody>
+          <a:bodyPr/>
+          <a:lstStyle/>
+          <a:p>
+            <a:fld id="{F7021451-1387-4CA6-816F-3879F97B5CBC}" type="slidenum">
+              <a:rPr lang="en-US"/>
+              <a:t>14</a:t>
+            </a:fld>
+            <a:endParaRPr lang="en-US"/>
+          </a:p>
+        </p:txBody>
+      </p:sp>
+    </p:spTree>
+    <p:extLst>
+      <p:ext uri="{BB962C8B-B14F-4D97-AF65-F5344CB8AC3E}">
+        <p14:creationId xmlns:p14="http://schemas.microsoft.com/office/powerpoint/2010/main" val="1024086991"/>
+      </p:ext>
+    </p:extLst>
+  </p:cSld>
+  <p:clrMapOvr>
+    <a:masterClrMapping/>
+  </p:clrMapOvr>
+</p:notes>
+</file>
+
+<file path=ppt/notesSlides/notesSlide15.xml><?xml version="1.0" encoding="utf-8"?>
+<p:notes xmlns:a="http://schemas.openxmlformats.org/drawingml/2006/main" xmlns:r="http://schemas.openxmlformats.org/officeDocument/2006/relationships" xmlns:p="http://schemas.openxmlformats.org/presentationml/2006/main">
+  <p:cSld>
+    <p:spTree>
+      <p:nvGrpSpPr>
+        <p:cNvPr id="1" name="">
+          <a:extLst>
+            <a:ext uri="{FF2B5EF4-FFF2-40B4-BE49-F238E27FC236}">
+              <a16:creationId xmlns:a16="http://schemas.microsoft.com/office/drawing/2014/main" id="{5F2110F2-1C6E-28AA-8809-8A5AF348D1A0}"/>
+            </a:ext>
+          </a:extLst>
+        </p:cNvPr>
+        <p:cNvGrpSpPr/>
+        <p:nvPr/>
+      </p:nvGrpSpPr>
+      <p:grpSpPr>
+        <a:xfrm>
+          <a:off x="0" y="0"/>
+          <a:ext cx="0" cy="0"/>
+          <a:chOff x="0" y="0"/>
+          <a:chExt cx="0" cy="0"/>
+        </a:xfrm>
+      </p:grpSpPr>
+      <p:sp>
+        <p:nvSpPr>
+          <p:cNvPr id="2" name="Slide Image Placeholder 1">
+            <a:extLst>
+              <a:ext uri="{FF2B5EF4-FFF2-40B4-BE49-F238E27FC236}">
+                <a16:creationId xmlns:a16="http://schemas.microsoft.com/office/drawing/2014/main" id="{F5D0C2C9-E4A5-6B2C-53B0-8787FBA45A75}"/>
+              </a:ext>
+            </a:extLst>
+          </p:cNvPr>
+          <p:cNvSpPr>
+            <a:spLocks noGrp="1" noRot="1" noChangeAspect="1"/>
+          </p:cNvSpPr>
+          <p:nvPr>
+            <p:ph type="sldImg"/>
+          </p:nvPr>
+        </p:nvSpPr>
+        <p:spPr/>
+        <p:txBody>
+          <a:bodyPr/>
+          <a:lstStyle/>
+          <a:p>
+            <a:endParaRPr lang="en-IN"/>
+          </a:p>
+        </p:txBody>
+      </p:sp>
+      <p:sp>
+        <p:nvSpPr>
+          <p:cNvPr id="3" name="Notes Placeholder 2">
+            <a:extLst>
+              <a:ext uri="{FF2B5EF4-FFF2-40B4-BE49-F238E27FC236}">
+                <a16:creationId xmlns:a16="http://schemas.microsoft.com/office/drawing/2014/main" id="{FF4B2FE7-86D8-DE9B-511B-6ABC10C50FD6}"/>
+              </a:ext>
+            </a:extLst>
+          </p:cNvPr>
+          <p:cNvSpPr>
+            <a:spLocks noGrp="1"/>
+          </p:cNvSpPr>
+          <p:nvPr>
+            <p:ph type="body" idx="1"/>
+          </p:nvPr>
+        </p:nvSpPr>
+        <p:spPr/>
+        <p:txBody>
+          <a:bodyPr/>
+          <a:lstStyle/>
+          <a:p>
+            <a:endParaRPr lang="en-US" dirty="0"/>
+          </a:p>
+        </p:txBody>
+      </p:sp>
+      <p:sp>
+        <p:nvSpPr>
+          <p:cNvPr id="4" name="Slide Number Placeholder 3">
+            <a:extLst>
+              <a:ext uri="{FF2B5EF4-FFF2-40B4-BE49-F238E27FC236}">
+                <a16:creationId xmlns:a16="http://schemas.microsoft.com/office/drawing/2014/main" id="{D1DB33C9-F542-458F-5497-CA182A8EA4F1}"/>
+              </a:ext>
+            </a:extLst>
+          </p:cNvPr>
+          <p:cNvSpPr>
+            <a:spLocks noGrp="1"/>
+          </p:cNvSpPr>
+          <p:nvPr>
+            <p:ph type="sldNum" sz="quarter" idx="10"/>
+          </p:nvPr>
+        </p:nvSpPr>
+        <p:spPr/>
+        <p:txBody>
+          <a:bodyPr/>
+          <a:lstStyle/>
+          <a:p>
+            <a:fld id="{F7021451-1387-4CA6-816F-3879F97B5CBC}" type="slidenum">
+              <a:rPr lang="en-US"/>
+              <a:t>15</a:t>
+            </a:fld>
+            <a:endParaRPr lang="en-US"/>
+          </a:p>
+        </p:txBody>
+      </p:sp>
+    </p:spTree>
+    <p:extLst>
+      <p:ext uri="{BB962C8B-B14F-4D97-AF65-F5344CB8AC3E}">
+        <p14:creationId xmlns:p14="http://schemas.microsoft.com/office/powerpoint/2010/main" val="3333808627"/>
       </p:ext>
     </p:extLst>
   </p:cSld>
@@ -873,7 +1762,13 @@
   <p:cSld>
     <p:spTree>
       <p:nvGrpSpPr>
-        <p:cNvPr id="1" name=""/>
+        <p:cNvPr id="1" name="">
+          <a:extLst>
+            <a:ext uri="{FF2B5EF4-FFF2-40B4-BE49-F238E27FC236}">
+              <a16:creationId xmlns:a16="http://schemas.microsoft.com/office/drawing/2014/main" id="{E8551203-4160-7754-A3E3-4D353E8DBE26}"/>
+            </a:ext>
+          </a:extLst>
+        </p:cNvPr>
         <p:cNvGrpSpPr/>
         <p:nvPr/>
       </p:nvGrpSpPr>
@@ -887,7 +1782,13 @@
       </p:grpSpPr>
       <p:sp>
         <p:nvSpPr>
-          <p:cNvPr id="2" name="Slide Image Placeholder 1"/>
+          <p:cNvPr id="2" name="Slide Image Placeholder 1">
+            <a:extLst>
+              <a:ext uri="{FF2B5EF4-FFF2-40B4-BE49-F238E27FC236}">
+                <a16:creationId xmlns:a16="http://schemas.microsoft.com/office/drawing/2014/main" id="{B7146ADE-3C76-CB64-25E5-7BCA916DAD60}"/>
+              </a:ext>
+            </a:extLst>
+          </p:cNvPr>
           <p:cNvSpPr>
             <a:spLocks noGrp="1" noRot="1" noChangeAspect="1"/>
           </p:cNvSpPr>
@@ -906,7 +1807,13 @@
       </p:sp>
       <p:sp>
         <p:nvSpPr>
-          <p:cNvPr id="3" name="Notes Placeholder 2"/>
+          <p:cNvPr id="3" name="Notes Placeholder 2">
+            <a:extLst>
+              <a:ext uri="{FF2B5EF4-FFF2-40B4-BE49-F238E27FC236}">
+                <a16:creationId xmlns:a16="http://schemas.microsoft.com/office/drawing/2014/main" id="{2C50AD92-D95B-CF2F-F002-7CDF154A3845}"/>
+              </a:ext>
+            </a:extLst>
+          </p:cNvPr>
           <p:cNvSpPr>
             <a:spLocks noGrp="1"/>
           </p:cNvSpPr>
@@ -925,7 +1832,13 @@
       </p:sp>
       <p:sp>
         <p:nvSpPr>
-          <p:cNvPr id="4" name="Slide Number Placeholder 3"/>
+          <p:cNvPr id="4" name="Slide Number Placeholder 3">
+            <a:extLst>
+              <a:ext uri="{FF2B5EF4-FFF2-40B4-BE49-F238E27FC236}">
+                <a16:creationId xmlns:a16="http://schemas.microsoft.com/office/drawing/2014/main" id="{D9B0A241-DC74-9F0B-5BB5-7B6DB54425D4}"/>
+              </a:ext>
+            </a:extLst>
+          </p:cNvPr>
           <p:cNvSpPr>
             <a:spLocks noGrp="1"/>
           </p:cNvSpPr>
@@ -949,7 +1862,7 @@
     </p:spTree>
     <p:extLst>
       <p:ext uri="{BB962C8B-B14F-4D97-AF65-F5344CB8AC3E}">
-        <p14:creationId xmlns:p14="http://schemas.microsoft.com/office/powerpoint/2010/main" val="1024086991"/>
+        <p14:creationId xmlns:p14="http://schemas.microsoft.com/office/powerpoint/2010/main" val="2740935189"/>
       </p:ext>
     </p:extLst>
   </p:cSld>
@@ -964,7 +1877,13 @@
   <p:cSld>
     <p:spTree>
       <p:nvGrpSpPr>
-        <p:cNvPr id="1" name=""/>
+        <p:cNvPr id="1" name="">
+          <a:extLst>
+            <a:ext uri="{FF2B5EF4-FFF2-40B4-BE49-F238E27FC236}">
+              <a16:creationId xmlns:a16="http://schemas.microsoft.com/office/drawing/2014/main" id="{F0C57761-2DA5-F95A-929A-BEC74D9ED392}"/>
+            </a:ext>
+          </a:extLst>
+        </p:cNvPr>
         <p:cNvGrpSpPr/>
         <p:nvPr/>
       </p:nvGrpSpPr>
@@ -978,7 +1897,13 @@
       </p:grpSpPr>
       <p:sp>
         <p:nvSpPr>
-          <p:cNvPr id="2" name="Slide Image Placeholder 1"/>
+          <p:cNvPr id="2" name="Slide Image Placeholder 1">
+            <a:extLst>
+              <a:ext uri="{FF2B5EF4-FFF2-40B4-BE49-F238E27FC236}">
+                <a16:creationId xmlns:a16="http://schemas.microsoft.com/office/drawing/2014/main" id="{FDB894AD-1717-EFD7-4ED6-0B77507988D2}"/>
+              </a:ext>
+            </a:extLst>
+          </p:cNvPr>
           <p:cNvSpPr>
             <a:spLocks noGrp="1" noRot="1" noChangeAspect="1"/>
           </p:cNvSpPr>
@@ -997,7 +1922,13 @@
       </p:sp>
       <p:sp>
         <p:nvSpPr>
-          <p:cNvPr id="3" name="Notes Placeholder 2"/>
+          <p:cNvPr id="3" name="Notes Placeholder 2">
+            <a:extLst>
+              <a:ext uri="{FF2B5EF4-FFF2-40B4-BE49-F238E27FC236}">
+                <a16:creationId xmlns:a16="http://schemas.microsoft.com/office/drawing/2014/main" id="{1ED629F4-4ED5-D541-348C-94AD5394395E}"/>
+              </a:ext>
+            </a:extLst>
+          </p:cNvPr>
           <p:cNvSpPr>
             <a:spLocks noGrp="1"/>
           </p:cNvSpPr>
@@ -1016,7 +1947,13 @@
       </p:sp>
       <p:sp>
         <p:nvSpPr>
-          <p:cNvPr id="4" name="Slide Number Placeholder 3"/>
+          <p:cNvPr id="4" name="Slide Number Placeholder 3">
+            <a:extLst>
+              <a:ext uri="{FF2B5EF4-FFF2-40B4-BE49-F238E27FC236}">
+                <a16:creationId xmlns:a16="http://schemas.microsoft.com/office/drawing/2014/main" id="{9896BA59-8799-5953-A2AF-57BCA30F7403}"/>
+              </a:ext>
+            </a:extLst>
+          </p:cNvPr>
           <p:cNvSpPr>
             <a:spLocks noGrp="1"/>
           </p:cNvSpPr>
@@ -1040,7 +1977,7 @@
     </p:spTree>
     <p:extLst>
       <p:ext uri="{BB962C8B-B14F-4D97-AF65-F5344CB8AC3E}">
-        <p14:creationId xmlns:p14="http://schemas.microsoft.com/office/powerpoint/2010/main" val="1024086991"/>
+        <p14:creationId xmlns:p14="http://schemas.microsoft.com/office/powerpoint/2010/main" val="3947858220"/>
       </p:ext>
     </p:extLst>
   </p:cSld>
@@ -2154,6 +3091,2243 @@
 
 <file path=ppt/slides/slide10.xml><?xml version="1.0" encoding="utf-8"?>
 <p:sld xmlns:a="http://schemas.openxmlformats.org/drawingml/2006/main" xmlns:r="http://schemas.openxmlformats.org/officeDocument/2006/relationships" xmlns:p="http://schemas.openxmlformats.org/presentationml/2006/main">
+  <p:cSld>
+    <p:bg>
+      <p:bgPr>
+        <a:solidFill>
+          <a:srgbClr val="E0F2FE"/>
+        </a:solidFill>
+        <a:effectLst/>
+      </p:bgPr>
+    </p:bg>
+    <p:spTree>
+      <p:nvGrpSpPr>
+        <p:cNvPr id="1" name="">
+          <a:extLst>
+            <a:ext uri="{FF2B5EF4-FFF2-40B4-BE49-F238E27FC236}">
+              <a16:creationId xmlns:a16="http://schemas.microsoft.com/office/drawing/2014/main" id="{423A96F3-AE9E-0C39-6BA1-984A519FDDF3}"/>
+            </a:ext>
+          </a:extLst>
+        </p:cNvPr>
+        <p:cNvGrpSpPr/>
+        <p:nvPr/>
+      </p:nvGrpSpPr>
+      <p:grpSpPr>
+        <a:xfrm>
+          <a:off x="0" y="0"/>
+          <a:ext cx="0" cy="0"/>
+          <a:chOff x="0" y="0"/>
+          <a:chExt cx="0" cy="0"/>
+        </a:xfrm>
+      </p:grpSpPr>
+      <p:sp>
+        <p:nvSpPr>
+          <p:cNvPr id="2" name="Shape 0">
+            <a:extLst>
+              <a:ext uri="{FF2B5EF4-FFF2-40B4-BE49-F238E27FC236}">
+                <a16:creationId xmlns:a16="http://schemas.microsoft.com/office/drawing/2014/main" id="{42F1661C-44CD-FE26-1907-1484B168DE49}"/>
+              </a:ext>
+            </a:extLst>
+          </p:cNvPr>
+          <p:cNvSpPr/>
+          <p:nvPr/>
+        </p:nvSpPr>
+        <p:spPr>
+          <a:xfrm>
+            <a:off x="0" y="0"/>
+            <a:ext cx="9144000" cy="685800"/>
+          </a:xfrm>
+          <a:prstGeom prst="rect">
+            <a:avLst/>
+          </a:prstGeom>
+          <a:solidFill>
+            <a:srgbClr val="0A2342"/>
+          </a:solidFill>
+          <a:ln w="12700">
+            <a:solidFill>
+              <a:srgbClr val="0A2342"/>
+            </a:solidFill>
+            <a:prstDash val="solid"/>
+          </a:ln>
+        </p:spPr>
+        <p:txBody>
+          <a:bodyPr/>
+          <a:lstStyle/>
+          <a:p>
+            <a:endParaRPr lang="en-IN"/>
+          </a:p>
+        </p:txBody>
+      </p:sp>
+      <p:sp>
+        <p:nvSpPr>
+          <p:cNvPr id="3" name="Text 1">
+            <a:extLst>
+              <a:ext uri="{FF2B5EF4-FFF2-40B4-BE49-F238E27FC236}">
+                <a16:creationId xmlns:a16="http://schemas.microsoft.com/office/drawing/2014/main" id="{4E192D58-4766-1FAB-4AF3-CC4CC19AD6DD}"/>
+              </a:ext>
+            </a:extLst>
+          </p:cNvPr>
+          <p:cNvSpPr/>
+          <p:nvPr/>
+        </p:nvSpPr>
+        <p:spPr>
+          <a:xfrm>
+            <a:off x="365760" y="0"/>
+            <a:ext cx="8229600" cy="685800"/>
+          </a:xfrm>
+          <a:prstGeom prst="rect">
+            <a:avLst/>
+          </a:prstGeom>
+          <a:noFill/>
+          <a:ln/>
+        </p:spPr>
+        <p:txBody>
+          <a:bodyPr wrap="square" lIns="0" tIns="0" rIns="0" bIns="0" rtlCol="0" anchor="ctr"/>
+          <a:lstStyle/>
+          <a:p>
+            <a:pPr marL="0" indent="0" algn="l">
+              <a:buNone/>
+            </a:pPr>
+            <a:r>
+              <a:rPr lang="en-US" sz="1300" b="1" kern="0" spc="300" dirty="0">
+                <a:solidFill>
+                  <a:srgbClr val="5EEAD4"/>
+                </a:solidFill>
+                <a:latin typeface="Calibri" pitchFamily="34" charset="0"/>
+                <a:ea typeface="Calibri" pitchFamily="34" charset="-122"/>
+                <a:cs typeface="Calibri" pitchFamily="34" charset="-120"/>
+              </a:rPr>
+              <a:t>TRENDS OVER TIME</a:t>
+            </a:r>
+            <a:endParaRPr lang="en-US" sz="1300" dirty="0"/>
+          </a:p>
+        </p:txBody>
+      </p:sp>
+      <p:sp>
+        <p:nvSpPr>
+          <p:cNvPr id="4" name="Shape 2">
+            <a:extLst>
+              <a:ext uri="{FF2B5EF4-FFF2-40B4-BE49-F238E27FC236}">
+                <a16:creationId xmlns:a16="http://schemas.microsoft.com/office/drawing/2014/main" id="{710F79B2-B5C2-B851-76B1-4130B0C312DA}"/>
+              </a:ext>
+            </a:extLst>
+          </p:cNvPr>
+          <p:cNvSpPr/>
+          <p:nvPr/>
+        </p:nvSpPr>
+        <p:spPr>
+          <a:xfrm>
+            <a:off x="320040" y="868680"/>
+            <a:ext cx="5303520" cy="3977640"/>
+          </a:xfrm>
+          <a:prstGeom prst="rect">
+            <a:avLst/>
+          </a:prstGeom>
+          <a:solidFill>
+            <a:srgbClr val="FFFFFF"/>
+          </a:solidFill>
+          <a:ln w="12700">
+            <a:solidFill>
+              <a:srgbClr val="D1E9FF"/>
+            </a:solidFill>
+            <a:prstDash val="solid"/>
+          </a:ln>
+          <a:effectLst>
+            <a:outerShdw blurRad="101600" dist="38100" dir="8100000" algn="bl" rotWithShape="0">
+              <a:srgbClr val="000000">
+                <a:alpha val="10000"/>
+              </a:srgbClr>
+            </a:outerShdw>
+          </a:effectLst>
+        </p:spPr>
+        <p:txBody>
+          <a:bodyPr/>
+          <a:lstStyle/>
+          <a:p>
+            <a:endParaRPr lang="en-IN"/>
+          </a:p>
+        </p:txBody>
+      </p:sp>
+      <p:graphicFrame>
+        <p:nvGraphicFramePr>
+          <p:cNvPr id="5" name="Chart 0">
+            <a:extLst>
+              <a:ext uri="{FF2B5EF4-FFF2-40B4-BE49-F238E27FC236}">
+                <a16:creationId xmlns:a16="http://schemas.microsoft.com/office/drawing/2014/main" id="{CA76E09F-078F-3C38-DE7C-D84C9EB7706C}"/>
+              </a:ext>
+            </a:extLst>
+          </p:cNvPr>
+          <p:cNvGraphicFramePr/>
+          <p:nvPr>
+            <p:extLst>
+              <p:ext uri="{D42A27DB-BD31-4B8C-83A1-F6EECF244321}">
+                <p14:modId xmlns:p14="http://schemas.microsoft.com/office/powerpoint/2010/main" val="1540678249"/>
+              </p:ext>
+            </p:extLst>
+          </p:nvPr>
+        </p:nvGraphicFramePr>
+        <p:xfrm>
+          <a:off x="365760" y="914400"/>
+          <a:ext cx="5212080" cy="4114800"/>
+        </p:xfrm>
+        <a:graphic>
+          <a:graphicData uri="http://schemas.openxmlformats.org/drawingml/2006/chart">
+            <c:chart xmlns:c="http://schemas.openxmlformats.org/drawingml/2006/chart" xmlns:r="http://schemas.openxmlformats.org/officeDocument/2006/relationships" r:id="rId3"/>
+          </a:graphicData>
+        </a:graphic>
+      </p:graphicFrame>
+      <p:sp>
+        <p:nvSpPr>
+          <p:cNvPr id="18" name="Shape 15">
+            <a:extLst>
+              <a:ext uri="{FF2B5EF4-FFF2-40B4-BE49-F238E27FC236}">
+                <a16:creationId xmlns:a16="http://schemas.microsoft.com/office/drawing/2014/main" id="{4AF3F001-84CE-7512-CD9C-7AF12B609086}"/>
+              </a:ext>
+            </a:extLst>
+          </p:cNvPr>
+          <p:cNvSpPr/>
+          <p:nvPr/>
+        </p:nvSpPr>
+        <p:spPr>
+          <a:xfrm>
+            <a:off x="5806440" y="4480560"/>
+            <a:ext cx="3017520" cy="548640"/>
+          </a:xfrm>
+          <a:prstGeom prst="rect">
+            <a:avLst/>
+          </a:prstGeom>
+          <a:solidFill>
+            <a:srgbClr val="E0F2FE"/>
+          </a:solidFill>
+          <a:ln w="12700">
+            <a:solidFill>
+              <a:srgbClr val="BAE6FD"/>
+            </a:solidFill>
+            <a:prstDash val="solid"/>
+          </a:ln>
+        </p:spPr>
+        <p:txBody>
+          <a:bodyPr/>
+          <a:lstStyle/>
+          <a:p>
+            <a:endParaRPr lang="en-IN"/>
+          </a:p>
+        </p:txBody>
+      </p:sp>
+      <p:sp>
+        <p:nvSpPr>
+          <p:cNvPr id="20" name="TextBox 19">
+            <a:extLst>
+              <a:ext uri="{FF2B5EF4-FFF2-40B4-BE49-F238E27FC236}">
+                <a16:creationId xmlns:a16="http://schemas.microsoft.com/office/drawing/2014/main" id="{62F742AB-C292-2B9D-B80A-7288ECDDD396}"/>
+              </a:ext>
+            </a:extLst>
+          </p:cNvPr>
+          <p:cNvSpPr txBox="1"/>
+          <p:nvPr/>
+        </p:nvSpPr>
+        <p:spPr>
+          <a:xfrm>
+            <a:off x="5806440" y="1079292"/>
+            <a:ext cx="2971800" cy="4247317"/>
+          </a:xfrm>
+          <a:prstGeom prst="rect">
+            <a:avLst/>
+          </a:prstGeom>
+          <a:noFill/>
+        </p:spPr>
+        <p:txBody>
+          <a:bodyPr wrap="square" rtlCol="0">
+            <a:spAutoFit/>
+          </a:bodyPr>
+          <a:lstStyle/>
+          <a:p>
+            <a:r>
+              <a:rPr lang="en-US" dirty="0"/>
+              <a:t>While the world’s population tripled in the 20th century, the use of renewable water resources has grown six-fold. Within the next fifty years, the world population will increase by another 40 to 50 %. This population growth – coupled with industrialization and urbanization – will result in an increasing demand for water and will have serious consequences on the environment.</a:t>
+            </a:r>
+            <a:endParaRPr lang="en-IN" dirty="0"/>
+          </a:p>
+          <a:p>
+            <a:endParaRPr lang="en-IN" dirty="0"/>
+          </a:p>
+        </p:txBody>
+      </p:sp>
+    </p:spTree>
+    <p:extLst>
+      <p:ext uri="{BB962C8B-B14F-4D97-AF65-F5344CB8AC3E}">
+        <p14:creationId xmlns:p14="http://schemas.microsoft.com/office/powerpoint/2010/main" val="3472540166"/>
+      </p:ext>
+    </p:extLst>
+  </p:cSld>
+  <p:clrMapOvr>
+    <a:masterClrMapping/>
+  </p:clrMapOvr>
+</p:sld>
+</file>
+
+<file path=ppt/slides/slide11.xml><?xml version="1.0" encoding="utf-8"?>
+<p:sld xmlns:a="http://schemas.openxmlformats.org/drawingml/2006/main" xmlns:r="http://schemas.openxmlformats.org/officeDocument/2006/relationships" xmlns:p="http://schemas.openxmlformats.org/presentationml/2006/main">
+  <p:cSld>
+    <p:bg>
+      <p:bgPr>
+        <a:solidFill>
+          <a:srgbClr val="E0F2FE"/>
+        </a:solidFill>
+        <a:effectLst/>
+      </p:bgPr>
+    </p:bg>
+    <p:spTree>
+      <p:nvGrpSpPr>
+        <p:cNvPr id="1" name="">
+          <a:extLst>
+            <a:ext uri="{FF2B5EF4-FFF2-40B4-BE49-F238E27FC236}">
+              <a16:creationId xmlns:a16="http://schemas.microsoft.com/office/drawing/2014/main" id="{1603D677-EB6C-6F90-289A-7B51FC74D138}"/>
+            </a:ext>
+          </a:extLst>
+        </p:cNvPr>
+        <p:cNvGrpSpPr/>
+        <p:nvPr/>
+      </p:nvGrpSpPr>
+      <p:grpSpPr>
+        <a:xfrm>
+          <a:off x="0" y="0"/>
+          <a:ext cx="0" cy="0"/>
+          <a:chOff x="0" y="0"/>
+          <a:chExt cx="0" cy="0"/>
+        </a:xfrm>
+      </p:grpSpPr>
+      <p:sp>
+        <p:nvSpPr>
+          <p:cNvPr id="2" name="Shape 0">
+            <a:extLst>
+              <a:ext uri="{FF2B5EF4-FFF2-40B4-BE49-F238E27FC236}">
+                <a16:creationId xmlns:a16="http://schemas.microsoft.com/office/drawing/2014/main" id="{DDAF1A1E-5750-5592-B8D8-33AD6AEC075A}"/>
+              </a:ext>
+            </a:extLst>
+          </p:cNvPr>
+          <p:cNvSpPr/>
+          <p:nvPr/>
+        </p:nvSpPr>
+        <p:spPr>
+          <a:xfrm>
+            <a:off x="0" y="0"/>
+            <a:ext cx="9144000" cy="685800"/>
+          </a:xfrm>
+          <a:prstGeom prst="rect">
+            <a:avLst/>
+          </a:prstGeom>
+          <a:solidFill>
+            <a:srgbClr val="0A2342"/>
+          </a:solidFill>
+          <a:ln w="12700">
+            <a:solidFill>
+              <a:srgbClr val="0A2342"/>
+            </a:solidFill>
+            <a:prstDash val="solid"/>
+          </a:ln>
+        </p:spPr>
+        <p:txBody>
+          <a:bodyPr/>
+          <a:lstStyle/>
+          <a:p>
+            <a:endParaRPr lang="en-IN" dirty="0"/>
+          </a:p>
+        </p:txBody>
+      </p:sp>
+      <p:sp>
+        <p:nvSpPr>
+          <p:cNvPr id="3" name="Text 1">
+            <a:extLst>
+              <a:ext uri="{FF2B5EF4-FFF2-40B4-BE49-F238E27FC236}">
+                <a16:creationId xmlns:a16="http://schemas.microsoft.com/office/drawing/2014/main" id="{9096D2BC-0F2C-8666-2931-A34F6FF8A486}"/>
+              </a:ext>
+            </a:extLst>
+          </p:cNvPr>
+          <p:cNvSpPr/>
+          <p:nvPr/>
+        </p:nvSpPr>
+        <p:spPr>
+          <a:xfrm>
+            <a:off x="365760" y="0"/>
+            <a:ext cx="8229600" cy="685800"/>
+          </a:xfrm>
+          <a:prstGeom prst="rect">
+            <a:avLst/>
+          </a:prstGeom>
+          <a:noFill/>
+          <a:ln/>
+        </p:spPr>
+        <p:txBody>
+          <a:bodyPr wrap="square" lIns="0" tIns="0" rIns="0" bIns="0" rtlCol="0" anchor="ctr"/>
+          <a:lstStyle/>
+          <a:p>
+            <a:pPr marL="0" indent="0" algn="l">
+              <a:buNone/>
+            </a:pPr>
+            <a:r>
+              <a:rPr lang="en-US" sz="1300" b="1" kern="0" spc="300" dirty="0">
+                <a:solidFill>
+                  <a:srgbClr val="5EEAD4"/>
+                </a:solidFill>
+                <a:latin typeface="Calibri" pitchFamily="34" charset="0"/>
+                <a:ea typeface="Calibri" pitchFamily="34" charset="-122"/>
+                <a:cs typeface="Calibri" pitchFamily="34" charset="-120"/>
+              </a:rPr>
+              <a:t>  Globol Water Consumption</a:t>
+            </a:r>
+            <a:endParaRPr lang="en-US" sz="1300" dirty="0"/>
+          </a:p>
+        </p:txBody>
+      </p:sp>
+      <p:pic>
+        <p:nvPicPr>
+          <p:cNvPr id="24" name="Picture 2">
+            <a:extLst>
+              <a:ext uri="{FF2B5EF4-FFF2-40B4-BE49-F238E27FC236}">
+                <a16:creationId xmlns:a16="http://schemas.microsoft.com/office/drawing/2014/main" id="{A93A261A-89D1-E39A-0B0F-29A8105633A1}"/>
+              </a:ext>
+            </a:extLst>
+          </p:cNvPr>
+          <p:cNvPicPr>
+            <a:picLocks noChangeAspect="1" noChangeArrowheads="1"/>
+          </p:cNvPicPr>
+          <p:nvPr/>
+        </p:nvPicPr>
+        <p:blipFill>
+          <a:blip r:embed="rId3">
+            <a:extLst>
+              <a:ext uri="{28A0092B-C50C-407E-A947-70E740481C1C}">
+                <a14:useLocalDpi xmlns:a14="http://schemas.microsoft.com/office/drawing/2010/main" val="0"/>
+              </a:ext>
+            </a:extLst>
+          </a:blip>
+          <a:srcRect/>
+          <a:stretch>
+            <a:fillRect/>
+          </a:stretch>
+        </p:blipFill>
+        <p:spPr bwMode="auto">
+          <a:xfrm>
+            <a:off x="143155" y="945629"/>
+            <a:ext cx="4601232" cy="4076700"/>
+          </a:xfrm>
+          <a:prstGeom prst="rect">
+            <a:avLst/>
+          </a:prstGeom>
+          <a:noFill/>
+          <a:extLst>
+            <a:ext uri="{909E8E84-426E-40DD-AFC4-6F175D3DCCD1}">
+              <a14:hiddenFill xmlns:a14="http://schemas.microsoft.com/office/drawing/2010/main">
+                <a:solidFill>
+                  <a:srgbClr val="FFFFFF"/>
+                </a:solidFill>
+              </a14:hiddenFill>
+            </a:ext>
+          </a:extLst>
+        </p:spPr>
+      </p:pic>
+      <p:sp>
+        <p:nvSpPr>
+          <p:cNvPr id="25" name="TextBox 24">
+            <a:extLst>
+              <a:ext uri="{FF2B5EF4-FFF2-40B4-BE49-F238E27FC236}">
+                <a16:creationId xmlns:a16="http://schemas.microsoft.com/office/drawing/2014/main" id="{A154E903-A33D-38F2-1451-2F9D49B21BBA}"/>
+              </a:ext>
+            </a:extLst>
+          </p:cNvPr>
+          <p:cNvSpPr txBox="1"/>
+          <p:nvPr/>
+        </p:nvSpPr>
+        <p:spPr>
+          <a:xfrm>
+            <a:off x="5006715" y="1041816"/>
+            <a:ext cx="3852472" cy="3139321"/>
+          </a:xfrm>
+          <a:prstGeom prst="rect">
+            <a:avLst/>
+          </a:prstGeom>
+          <a:noFill/>
+        </p:spPr>
+        <p:txBody>
+          <a:bodyPr wrap="square" rtlCol="0">
+            <a:spAutoFit/>
+          </a:bodyPr>
+          <a:lstStyle/>
+          <a:p>
+            <a:r>
+              <a:rPr lang="en-US" dirty="0"/>
+              <a:t>While the world’s population tripled in the 20th century, the use of renewable water resources has grown six-fold. Within the next fifty years, the world population will increase by another 40 to 50 %. This population growth – coupled with industrialization and urbanization – will result in an increasing demand for water and will have serious consequences on the environment.</a:t>
+            </a:r>
+            <a:endParaRPr lang="en-IN" dirty="0"/>
+          </a:p>
+        </p:txBody>
+      </p:sp>
+      <p:sp>
+        <p:nvSpPr>
+          <p:cNvPr id="26" name="TextBox 25">
+            <a:extLst>
+              <a:ext uri="{FF2B5EF4-FFF2-40B4-BE49-F238E27FC236}">
+                <a16:creationId xmlns:a16="http://schemas.microsoft.com/office/drawing/2014/main" id="{65877FE9-2799-689E-CC3A-B31DE5791998}"/>
+              </a:ext>
+            </a:extLst>
+          </p:cNvPr>
+          <p:cNvSpPr txBox="1"/>
+          <p:nvPr/>
+        </p:nvSpPr>
+        <p:spPr>
+          <a:xfrm>
+            <a:off x="5216577" y="4414603"/>
+            <a:ext cx="3515193" cy="646331"/>
+          </a:xfrm>
+          <a:prstGeom prst="rect">
+            <a:avLst/>
+          </a:prstGeom>
+          <a:noFill/>
+        </p:spPr>
+        <p:txBody>
+          <a:bodyPr wrap="square" rtlCol="0">
+            <a:spAutoFit/>
+          </a:bodyPr>
+          <a:lstStyle/>
+          <a:p>
+            <a:r>
+              <a:rPr lang="en-US">
+                <a:hlinkClick r:id="rId4"/>
+              </a:rPr>
+              <a:t>Global Water Consumption 1900-2025 | SIMCenter</a:t>
+            </a:r>
+            <a:endParaRPr lang="en-IN" dirty="0"/>
+          </a:p>
+        </p:txBody>
+      </p:sp>
+    </p:spTree>
+    <p:extLst>
+      <p:ext uri="{BB962C8B-B14F-4D97-AF65-F5344CB8AC3E}">
+        <p14:creationId xmlns:p14="http://schemas.microsoft.com/office/powerpoint/2010/main" val="1697629698"/>
+      </p:ext>
+    </p:extLst>
+  </p:cSld>
+  <p:clrMapOvr>
+    <a:masterClrMapping/>
+  </p:clrMapOvr>
+</p:sld>
+</file>
+
+<file path=ppt/slides/slide12.xml><?xml version="1.0" encoding="utf-8"?>
+<p:sld xmlns:a="http://schemas.openxmlformats.org/drawingml/2006/main" xmlns:r="http://schemas.openxmlformats.org/officeDocument/2006/relationships" xmlns:p="http://schemas.openxmlformats.org/presentationml/2006/main">
+  <p:cSld name="Slide 8">
+    <p:bg>
+      <p:bgPr>
+        <a:solidFill>
+          <a:srgbClr val="E0F2FE"/>
+        </a:solidFill>
+        <a:effectLst/>
+      </p:bgPr>
+    </p:bg>
+    <p:spTree>
+      <p:nvGrpSpPr>
+        <p:cNvPr id="1" name=""/>
+        <p:cNvGrpSpPr/>
+        <p:nvPr/>
+      </p:nvGrpSpPr>
+      <p:grpSpPr>
+        <a:xfrm>
+          <a:off x="0" y="0"/>
+          <a:ext cx="0" cy="0"/>
+          <a:chOff x="0" y="0"/>
+          <a:chExt cx="0" cy="0"/>
+        </a:xfrm>
+      </p:grpSpPr>
+      <p:sp>
+        <p:nvSpPr>
+          <p:cNvPr id="2" name="Shape 0"/>
+          <p:cNvSpPr/>
+          <p:nvPr/>
+        </p:nvSpPr>
+        <p:spPr>
+          <a:xfrm>
+            <a:off x="0" y="0"/>
+            <a:ext cx="9144000" cy="685800"/>
+          </a:xfrm>
+          <a:prstGeom prst="rect">
+            <a:avLst/>
+          </a:prstGeom>
+          <a:solidFill>
+            <a:srgbClr val="0A2342"/>
+          </a:solidFill>
+          <a:ln w="12700">
+            <a:solidFill>
+              <a:srgbClr val="0A2342"/>
+            </a:solidFill>
+            <a:prstDash val="solid"/>
+          </a:ln>
+        </p:spPr>
+        <p:txBody>
+          <a:bodyPr/>
+          <a:lstStyle/>
+          <a:p>
+            <a:endParaRPr lang="en-IN"/>
+          </a:p>
+        </p:txBody>
+      </p:sp>
+      <p:sp>
+        <p:nvSpPr>
+          <p:cNvPr id="3" name="Text 1"/>
+          <p:cNvSpPr/>
+          <p:nvPr/>
+        </p:nvSpPr>
+        <p:spPr>
+          <a:xfrm>
+            <a:off x="365760" y="0"/>
+            <a:ext cx="8229600" cy="685800"/>
+          </a:xfrm>
+          <a:prstGeom prst="rect">
+            <a:avLst/>
+          </a:prstGeom>
+          <a:noFill/>
+          <a:ln/>
+        </p:spPr>
+        <p:txBody>
+          <a:bodyPr wrap="square" lIns="0" tIns="0" rIns="0" bIns="0" rtlCol="0" anchor="ctr"/>
+          <a:lstStyle/>
+          <a:p>
+            <a:pPr marL="0" indent="0" algn="l">
+              <a:buNone/>
+            </a:pPr>
+            <a:r>
+              <a:rPr lang="en-US" sz="1300" b="1" kern="0" spc="300" dirty="0">
+                <a:solidFill>
+                  <a:srgbClr val="5EEAD4"/>
+                </a:solidFill>
+                <a:latin typeface="Calibri" pitchFamily="34" charset="0"/>
+                <a:ea typeface="Calibri" pitchFamily="34" charset="-122"/>
+                <a:cs typeface="Calibri" pitchFamily="34" charset="-120"/>
+              </a:rPr>
+              <a:t>KEY INSIGHTS &amp; OBSERVATIONS</a:t>
+            </a:r>
+            <a:endParaRPr lang="en-US" sz="1300" dirty="0"/>
+          </a:p>
+        </p:txBody>
+      </p:sp>
+      <p:sp>
+        <p:nvSpPr>
+          <p:cNvPr id="4" name="Shape 2"/>
+          <p:cNvSpPr/>
+          <p:nvPr/>
+        </p:nvSpPr>
+        <p:spPr>
+          <a:xfrm>
+            <a:off x="320040" y="868680"/>
+            <a:ext cx="4160520" cy="1874520"/>
+          </a:xfrm>
+          <a:prstGeom prst="rect">
+            <a:avLst/>
+          </a:prstGeom>
+          <a:solidFill>
+            <a:srgbClr val="FFFFFF"/>
+          </a:solidFill>
+          <a:ln w="12700">
+            <a:solidFill>
+              <a:srgbClr val="D1E9FF"/>
+            </a:solidFill>
+            <a:prstDash val="solid"/>
+          </a:ln>
+          <a:effectLst>
+            <a:outerShdw blurRad="101600" dist="38100" dir="8100000" algn="bl" rotWithShape="0">
+              <a:srgbClr val="000000">
+                <a:alpha val="10000"/>
+              </a:srgbClr>
+            </a:outerShdw>
+          </a:effectLst>
+        </p:spPr>
+        <p:txBody>
+          <a:bodyPr/>
+          <a:lstStyle/>
+          <a:p>
+            <a:endParaRPr lang="en-IN"/>
+          </a:p>
+        </p:txBody>
+      </p:sp>
+      <p:sp>
+        <p:nvSpPr>
+          <p:cNvPr id="5" name="Shape 3"/>
+          <p:cNvSpPr/>
+          <p:nvPr/>
+        </p:nvSpPr>
+        <p:spPr>
+          <a:xfrm>
+            <a:off x="320040" y="868680"/>
+            <a:ext cx="4160520" cy="182880"/>
+          </a:xfrm>
+          <a:prstGeom prst="rect">
+            <a:avLst/>
+          </a:prstGeom>
+          <a:solidFill>
+            <a:srgbClr val="0D9488"/>
+          </a:solidFill>
+          <a:ln w="12700">
+            <a:solidFill>
+              <a:srgbClr val="0D9488"/>
+            </a:solidFill>
+            <a:prstDash val="solid"/>
+          </a:ln>
+        </p:spPr>
+        <p:txBody>
+          <a:bodyPr/>
+          <a:lstStyle/>
+          <a:p>
+            <a:endParaRPr lang="en-IN"/>
+          </a:p>
+        </p:txBody>
+      </p:sp>
+      <p:sp>
+        <p:nvSpPr>
+          <p:cNvPr id="6" name="Text 4"/>
+          <p:cNvSpPr/>
+          <p:nvPr/>
+        </p:nvSpPr>
+        <p:spPr>
+          <a:xfrm>
+            <a:off x="502920" y="1143000"/>
+            <a:ext cx="594360" cy="502920"/>
+          </a:xfrm>
+          <a:prstGeom prst="rect">
+            <a:avLst/>
+          </a:prstGeom>
+          <a:noFill/>
+          <a:ln/>
+        </p:spPr>
+        <p:txBody>
+          <a:bodyPr wrap="square" lIns="0" tIns="0" rIns="0" bIns="0" rtlCol="0" anchor="ctr"/>
+          <a:lstStyle/>
+          <a:p>
+            <a:pPr marL="0" indent="0" algn="ctr">
+              <a:buNone/>
+            </a:pPr>
+            <a:r>
+              <a:rPr lang="en-US" sz="2600" b="1" dirty="0">
+                <a:solidFill>
+                  <a:srgbClr val="0D9488"/>
+                </a:solidFill>
+                <a:latin typeface="Calibri" pitchFamily="34" charset="0"/>
+                <a:ea typeface="Calibri" pitchFamily="34" charset="-122"/>
+                <a:cs typeface="Calibri" pitchFamily="34" charset="-120"/>
+              </a:rPr>
+              <a:t>01</a:t>
+            </a:r>
+            <a:endParaRPr lang="en-US" sz="2600" dirty="0"/>
+          </a:p>
+        </p:txBody>
+      </p:sp>
+      <p:sp>
+        <p:nvSpPr>
+          <p:cNvPr id="7" name="Text 5"/>
+          <p:cNvSpPr/>
+          <p:nvPr/>
+        </p:nvSpPr>
+        <p:spPr>
+          <a:xfrm>
+            <a:off x="1143000" y="1161288"/>
+            <a:ext cx="3108960" cy="365760"/>
+          </a:xfrm>
+          <a:prstGeom prst="rect">
+            <a:avLst/>
+          </a:prstGeom>
+          <a:noFill/>
+          <a:ln/>
+        </p:spPr>
+        <p:txBody>
+          <a:bodyPr wrap="square" lIns="0" tIns="0" rIns="0" bIns="0" rtlCol="0" anchor="ctr"/>
+          <a:lstStyle/>
+          <a:p>
+            <a:pPr marL="0" indent="0">
+              <a:buNone/>
+            </a:pPr>
+            <a:r>
+              <a:rPr lang="en-US" sz="1400" b="1" dirty="0">
+                <a:solidFill>
+                  <a:srgbClr val="0A2342"/>
+                </a:solidFill>
+                <a:latin typeface="Calibri" pitchFamily="34" charset="0"/>
+                <a:ea typeface="Calibri" pitchFamily="34" charset="-122"/>
+                <a:cs typeface="Calibri" pitchFamily="34" charset="-120"/>
+              </a:rPr>
+              <a:t>Agriculture Dominates</a:t>
+            </a:r>
+            <a:endParaRPr lang="en-US" sz="1400" dirty="0"/>
+          </a:p>
+        </p:txBody>
+      </p:sp>
+      <p:sp>
+        <p:nvSpPr>
+          <p:cNvPr id="8" name="Text 6"/>
+          <p:cNvSpPr/>
+          <p:nvPr/>
+        </p:nvSpPr>
+        <p:spPr>
+          <a:xfrm>
+            <a:off x="502920" y="1673352"/>
+            <a:ext cx="3794760" cy="914400"/>
+          </a:xfrm>
+          <a:prstGeom prst="rect">
+            <a:avLst/>
+          </a:prstGeom>
+          <a:noFill/>
+          <a:ln/>
+        </p:spPr>
+        <p:txBody>
+          <a:bodyPr wrap="square" lIns="0" tIns="0" rIns="0" bIns="0" rtlCol="0" anchor="ctr"/>
+          <a:lstStyle/>
+          <a:p>
+            <a:pPr marL="0" indent="0">
+              <a:buNone/>
+            </a:pPr>
+            <a:r>
+              <a:rPr lang="en-US" sz="1150" dirty="0">
+                <a:solidFill>
+                  <a:srgbClr val="1E293B"/>
+                </a:solidFill>
+                <a:latin typeface="Calibri Light" pitchFamily="34" charset="0"/>
+                <a:ea typeface="Calibri Light" pitchFamily="34" charset="-122"/>
+                <a:cs typeface="Calibri Light" pitchFamily="34" charset="-120"/>
+              </a:rPr>
+              <a:t>Agriculture is the single largest contributor to total water consumption globally</a:t>
+            </a:r>
+            <a:endParaRPr lang="en-US" sz="1150" dirty="0"/>
+          </a:p>
+        </p:txBody>
+      </p:sp>
+      <p:sp>
+        <p:nvSpPr>
+          <p:cNvPr id="9" name="Shape 7"/>
+          <p:cNvSpPr/>
+          <p:nvPr/>
+        </p:nvSpPr>
+        <p:spPr>
+          <a:xfrm>
+            <a:off x="4727448" y="868680"/>
+            <a:ext cx="4160520" cy="1874520"/>
+          </a:xfrm>
+          <a:prstGeom prst="rect">
+            <a:avLst/>
+          </a:prstGeom>
+          <a:solidFill>
+            <a:srgbClr val="FFFFFF"/>
+          </a:solidFill>
+          <a:ln w="12700">
+            <a:solidFill>
+              <a:srgbClr val="D1E9FF"/>
+            </a:solidFill>
+            <a:prstDash val="solid"/>
+          </a:ln>
+          <a:effectLst>
+            <a:outerShdw blurRad="101600" dist="38100" dir="8100000" algn="bl" rotWithShape="0">
+              <a:srgbClr val="000000">
+                <a:alpha val="10000"/>
+              </a:srgbClr>
+            </a:outerShdw>
+          </a:effectLst>
+        </p:spPr>
+        <p:txBody>
+          <a:bodyPr/>
+          <a:lstStyle/>
+          <a:p>
+            <a:endParaRPr lang="en-IN"/>
+          </a:p>
+        </p:txBody>
+      </p:sp>
+      <p:sp>
+        <p:nvSpPr>
+          <p:cNvPr id="10" name="Shape 8"/>
+          <p:cNvSpPr/>
+          <p:nvPr/>
+        </p:nvSpPr>
+        <p:spPr>
+          <a:xfrm>
+            <a:off x="4727448" y="868680"/>
+            <a:ext cx="4160520" cy="182880"/>
+          </a:xfrm>
+          <a:prstGeom prst="rect">
+            <a:avLst/>
+          </a:prstGeom>
+          <a:solidFill>
+            <a:srgbClr val="0D5C8F"/>
+          </a:solidFill>
+          <a:ln w="12700">
+            <a:solidFill>
+              <a:srgbClr val="0D5C8F"/>
+            </a:solidFill>
+            <a:prstDash val="solid"/>
+          </a:ln>
+        </p:spPr>
+        <p:txBody>
+          <a:bodyPr/>
+          <a:lstStyle/>
+          <a:p>
+            <a:endParaRPr lang="en-IN"/>
+          </a:p>
+        </p:txBody>
+      </p:sp>
+      <p:sp>
+        <p:nvSpPr>
+          <p:cNvPr id="11" name="Text 9"/>
+          <p:cNvSpPr/>
+          <p:nvPr/>
+        </p:nvSpPr>
+        <p:spPr>
+          <a:xfrm>
+            <a:off x="4910328" y="1143000"/>
+            <a:ext cx="594360" cy="502920"/>
+          </a:xfrm>
+          <a:prstGeom prst="rect">
+            <a:avLst/>
+          </a:prstGeom>
+          <a:noFill/>
+          <a:ln/>
+        </p:spPr>
+        <p:txBody>
+          <a:bodyPr wrap="square" lIns="0" tIns="0" rIns="0" bIns="0" rtlCol="0" anchor="ctr"/>
+          <a:lstStyle/>
+          <a:p>
+            <a:pPr marL="0" indent="0" algn="ctr">
+              <a:buNone/>
+            </a:pPr>
+            <a:r>
+              <a:rPr lang="en-US" sz="2600" b="1" dirty="0">
+                <a:solidFill>
+                  <a:srgbClr val="0D5C8F"/>
+                </a:solidFill>
+                <a:latin typeface="Calibri" pitchFamily="34" charset="0"/>
+                <a:ea typeface="Calibri" pitchFamily="34" charset="-122"/>
+                <a:cs typeface="Calibri" pitchFamily="34" charset="-120"/>
+              </a:rPr>
+              <a:t>02</a:t>
+            </a:r>
+            <a:endParaRPr lang="en-US" sz="2600" dirty="0"/>
+          </a:p>
+        </p:txBody>
+      </p:sp>
+      <p:sp>
+        <p:nvSpPr>
+          <p:cNvPr id="12" name="Text 10"/>
+          <p:cNvSpPr/>
+          <p:nvPr/>
+        </p:nvSpPr>
+        <p:spPr>
+          <a:xfrm>
+            <a:off x="5550408" y="1161288"/>
+            <a:ext cx="3108960" cy="365760"/>
+          </a:xfrm>
+          <a:prstGeom prst="rect">
+            <a:avLst/>
+          </a:prstGeom>
+          <a:noFill/>
+          <a:ln/>
+        </p:spPr>
+        <p:txBody>
+          <a:bodyPr wrap="square" lIns="0" tIns="0" rIns="0" bIns="0" rtlCol="0" anchor="ctr"/>
+          <a:lstStyle/>
+          <a:p>
+            <a:pPr marL="0" indent="0">
+              <a:buNone/>
+            </a:pPr>
+            <a:r>
+              <a:rPr lang="en-US" sz="1400" b="1" dirty="0">
+                <a:solidFill>
+                  <a:srgbClr val="0A2342"/>
+                </a:solidFill>
+                <a:latin typeface="Calibri" pitchFamily="34" charset="0"/>
+                <a:ea typeface="Calibri" pitchFamily="34" charset="-122"/>
+                <a:cs typeface="Calibri" pitchFamily="34" charset="-120"/>
+              </a:rPr>
+              <a:t>Multi-Factor Scarcity</a:t>
+            </a:r>
+            <a:endParaRPr lang="en-US" sz="1400" dirty="0"/>
+          </a:p>
+        </p:txBody>
+      </p:sp>
+      <p:sp>
+        <p:nvSpPr>
+          <p:cNvPr id="13" name="Text 11"/>
+          <p:cNvSpPr/>
+          <p:nvPr/>
+        </p:nvSpPr>
+        <p:spPr>
+          <a:xfrm>
+            <a:off x="4910328" y="1673352"/>
+            <a:ext cx="3794760" cy="914400"/>
+          </a:xfrm>
+          <a:prstGeom prst="rect">
+            <a:avLst/>
+          </a:prstGeom>
+          <a:noFill/>
+          <a:ln/>
+        </p:spPr>
+        <p:txBody>
+          <a:bodyPr wrap="square" lIns="0" tIns="0" rIns="0" bIns="0" rtlCol="0" anchor="ctr"/>
+          <a:lstStyle/>
+          <a:p>
+            <a:pPr marL="0" indent="0">
+              <a:buNone/>
+            </a:pPr>
+            <a:r>
+              <a:rPr lang="en-US" sz="1150" dirty="0">
+                <a:solidFill>
+                  <a:srgbClr val="1E293B"/>
+                </a:solidFill>
+                <a:latin typeface="Calibri Light" pitchFamily="34" charset="0"/>
+                <a:ea typeface="Calibri Light" pitchFamily="34" charset="-122"/>
+                <a:cs typeface="Calibri Light" pitchFamily="34" charset="-120"/>
+              </a:rPr>
+              <a:t>Water scarcity is driven by multiple environmental factors acting together</a:t>
+            </a:r>
+            <a:endParaRPr lang="en-US" sz="1150" dirty="0"/>
+          </a:p>
+        </p:txBody>
+      </p:sp>
+      <p:sp>
+        <p:nvSpPr>
+          <p:cNvPr id="14" name="Shape 12"/>
+          <p:cNvSpPr/>
+          <p:nvPr/>
+        </p:nvSpPr>
+        <p:spPr>
+          <a:xfrm>
+            <a:off x="320040" y="2971800"/>
+            <a:ext cx="4160520" cy="1874520"/>
+          </a:xfrm>
+          <a:prstGeom prst="rect">
+            <a:avLst/>
+          </a:prstGeom>
+          <a:solidFill>
+            <a:srgbClr val="FFFFFF"/>
+          </a:solidFill>
+          <a:ln w="12700">
+            <a:solidFill>
+              <a:srgbClr val="D1E9FF"/>
+            </a:solidFill>
+            <a:prstDash val="solid"/>
+          </a:ln>
+          <a:effectLst>
+            <a:outerShdw blurRad="101600" dist="38100" dir="8100000" algn="bl" rotWithShape="0">
+              <a:srgbClr val="000000">
+                <a:alpha val="10000"/>
+              </a:srgbClr>
+            </a:outerShdw>
+          </a:effectLst>
+        </p:spPr>
+        <p:txBody>
+          <a:bodyPr/>
+          <a:lstStyle/>
+          <a:p>
+            <a:endParaRPr lang="en-IN"/>
+          </a:p>
+        </p:txBody>
+      </p:sp>
+      <p:sp>
+        <p:nvSpPr>
+          <p:cNvPr id="15" name="Shape 13"/>
+          <p:cNvSpPr/>
+          <p:nvPr/>
+        </p:nvSpPr>
+        <p:spPr>
+          <a:xfrm>
+            <a:off x="320040" y="2971800"/>
+            <a:ext cx="4160520" cy="182880"/>
+          </a:xfrm>
+          <a:prstGeom prst="rect">
+            <a:avLst/>
+          </a:prstGeom>
+          <a:solidFill>
+            <a:srgbClr val="0891B2"/>
+          </a:solidFill>
+          <a:ln w="12700">
+            <a:solidFill>
+              <a:srgbClr val="0891B2"/>
+            </a:solidFill>
+            <a:prstDash val="solid"/>
+          </a:ln>
+        </p:spPr>
+        <p:txBody>
+          <a:bodyPr/>
+          <a:lstStyle/>
+          <a:p>
+            <a:endParaRPr lang="en-IN"/>
+          </a:p>
+        </p:txBody>
+      </p:sp>
+      <p:sp>
+        <p:nvSpPr>
+          <p:cNvPr id="16" name="Text 14"/>
+          <p:cNvSpPr/>
+          <p:nvPr/>
+        </p:nvSpPr>
+        <p:spPr>
+          <a:xfrm>
+            <a:off x="502920" y="3246120"/>
+            <a:ext cx="594360" cy="502920"/>
+          </a:xfrm>
+          <a:prstGeom prst="rect">
+            <a:avLst/>
+          </a:prstGeom>
+          <a:noFill/>
+          <a:ln/>
+        </p:spPr>
+        <p:txBody>
+          <a:bodyPr wrap="square" lIns="0" tIns="0" rIns="0" bIns="0" rtlCol="0" anchor="ctr"/>
+          <a:lstStyle/>
+          <a:p>
+            <a:pPr marL="0" indent="0" algn="ctr">
+              <a:buNone/>
+            </a:pPr>
+            <a:r>
+              <a:rPr lang="en-US" sz="2600" b="1" dirty="0">
+                <a:solidFill>
+                  <a:srgbClr val="0891B2"/>
+                </a:solidFill>
+                <a:latin typeface="Calibri" pitchFamily="34" charset="0"/>
+                <a:ea typeface="Calibri" pitchFamily="34" charset="-122"/>
+                <a:cs typeface="Calibri" pitchFamily="34" charset="-120"/>
+              </a:rPr>
+              <a:t>03</a:t>
+            </a:r>
+            <a:endParaRPr lang="en-US" sz="2600" dirty="0"/>
+          </a:p>
+        </p:txBody>
+      </p:sp>
+      <p:sp>
+        <p:nvSpPr>
+          <p:cNvPr id="17" name="Text 15"/>
+          <p:cNvSpPr/>
+          <p:nvPr/>
+        </p:nvSpPr>
+        <p:spPr>
+          <a:xfrm>
+            <a:off x="1143000" y="3264408"/>
+            <a:ext cx="3108960" cy="365760"/>
+          </a:xfrm>
+          <a:prstGeom prst="rect">
+            <a:avLst/>
+          </a:prstGeom>
+          <a:noFill/>
+          <a:ln/>
+        </p:spPr>
+        <p:txBody>
+          <a:bodyPr wrap="square" lIns="0" tIns="0" rIns="0" bIns="0" rtlCol="0" anchor="ctr"/>
+          <a:lstStyle/>
+          <a:p>
+            <a:pPr marL="0" indent="0">
+              <a:buNone/>
+            </a:pPr>
+            <a:r>
+              <a:rPr lang="en-US" sz="1400" b="1" dirty="0">
+                <a:solidFill>
+                  <a:srgbClr val="0A2342"/>
+                </a:solidFill>
+                <a:latin typeface="Calibri" pitchFamily="34" charset="0"/>
+                <a:ea typeface="Calibri" pitchFamily="34" charset="-122"/>
+                <a:cs typeface="Calibri" pitchFamily="34" charset="-120"/>
+              </a:rPr>
+              <a:t>Groundwater Stress</a:t>
+            </a:r>
+            <a:endParaRPr lang="en-US" sz="1400" dirty="0"/>
+          </a:p>
+        </p:txBody>
+      </p:sp>
+      <p:sp>
+        <p:nvSpPr>
+          <p:cNvPr id="18" name="Text 16"/>
+          <p:cNvSpPr/>
+          <p:nvPr/>
+        </p:nvSpPr>
+        <p:spPr>
+          <a:xfrm>
+            <a:off x="502920" y="3776472"/>
+            <a:ext cx="3794760" cy="914400"/>
+          </a:xfrm>
+          <a:prstGeom prst="rect">
+            <a:avLst/>
+          </a:prstGeom>
+          <a:noFill/>
+          <a:ln/>
+        </p:spPr>
+        <p:txBody>
+          <a:bodyPr wrap="square" lIns="0" tIns="0" rIns="0" bIns="0" rtlCol="0" anchor="ctr"/>
+          <a:lstStyle/>
+          <a:p>
+            <a:pPr marL="0" indent="0">
+              <a:buNone/>
+            </a:pPr>
+            <a:r>
+              <a:rPr lang="en-US" sz="1150" dirty="0">
+                <a:solidFill>
+                  <a:srgbClr val="1E293B"/>
+                </a:solidFill>
+                <a:latin typeface="Calibri Light" pitchFamily="34" charset="0"/>
+                <a:ea typeface="Calibri Light" pitchFamily="34" charset="-122"/>
+                <a:cs typeface="Calibri Light" pitchFamily="34" charset="-120"/>
+              </a:rPr>
+              <a:t>Groundwater depletion is a critical sustainability concern for future water security</a:t>
+            </a:r>
+            <a:endParaRPr lang="en-US" sz="1150" dirty="0"/>
+          </a:p>
+        </p:txBody>
+      </p:sp>
+      <p:sp>
+        <p:nvSpPr>
+          <p:cNvPr id="19" name="Shape 17"/>
+          <p:cNvSpPr/>
+          <p:nvPr/>
+        </p:nvSpPr>
+        <p:spPr>
+          <a:xfrm>
+            <a:off x="4727448" y="2971800"/>
+            <a:ext cx="4160520" cy="1874520"/>
+          </a:xfrm>
+          <a:prstGeom prst="rect">
+            <a:avLst/>
+          </a:prstGeom>
+          <a:solidFill>
+            <a:srgbClr val="FFFFFF"/>
+          </a:solidFill>
+          <a:ln w="12700">
+            <a:solidFill>
+              <a:srgbClr val="D1E9FF"/>
+            </a:solidFill>
+            <a:prstDash val="solid"/>
+          </a:ln>
+          <a:effectLst>
+            <a:outerShdw blurRad="101600" dist="38100" dir="8100000" algn="bl" rotWithShape="0">
+              <a:srgbClr val="000000">
+                <a:alpha val="10000"/>
+              </a:srgbClr>
+            </a:outerShdw>
+          </a:effectLst>
+        </p:spPr>
+        <p:txBody>
+          <a:bodyPr/>
+          <a:lstStyle/>
+          <a:p>
+            <a:endParaRPr lang="en-IN"/>
+          </a:p>
+        </p:txBody>
+      </p:sp>
+      <p:sp>
+        <p:nvSpPr>
+          <p:cNvPr id="20" name="Shape 18"/>
+          <p:cNvSpPr/>
+          <p:nvPr/>
+        </p:nvSpPr>
+        <p:spPr>
+          <a:xfrm>
+            <a:off x="4727448" y="2971800"/>
+            <a:ext cx="4160520" cy="182880"/>
+          </a:xfrm>
+          <a:prstGeom prst="rect">
+            <a:avLst/>
+          </a:prstGeom>
+          <a:solidFill>
+            <a:srgbClr val="0E7490"/>
+          </a:solidFill>
+          <a:ln w="12700">
+            <a:solidFill>
+              <a:srgbClr val="0E7490"/>
+            </a:solidFill>
+            <a:prstDash val="solid"/>
+          </a:ln>
+        </p:spPr>
+        <p:txBody>
+          <a:bodyPr/>
+          <a:lstStyle/>
+          <a:p>
+            <a:endParaRPr lang="en-IN"/>
+          </a:p>
+        </p:txBody>
+      </p:sp>
+      <p:sp>
+        <p:nvSpPr>
+          <p:cNvPr id="21" name="Text 19"/>
+          <p:cNvSpPr/>
+          <p:nvPr/>
+        </p:nvSpPr>
+        <p:spPr>
+          <a:xfrm>
+            <a:off x="4910328" y="3246120"/>
+            <a:ext cx="594360" cy="502920"/>
+          </a:xfrm>
+          <a:prstGeom prst="rect">
+            <a:avLst/>
+          </a:prstGeom>
+          <a:noFill/>
+          <a:ln/>
+        </p:spPr>
+        <p:txBody>
+          <a:bodyPr wrap="square" lIns="0" tIns="0" rIns="0" bIns="0" rtlCol="0" anchor="ctr"/>
+          <a:lstStyle/>
+          <a:p>
+            <a:pPr marL="0" indent="0" algn="ctr">
+              <a:buNone/>
+            </a:pPr>
+            <a:r>
+              <a:rPr lang="en-US" sz="2600" b="1" dirty="0">
+                <a:solidFill>
+                  <a:srgbClr val="0E7490"/>
+                </a:solidFill>
+                <a:latin typeface="Calibri" pitchFamily="34" charset="0"/>
+                <a:ea typeface="Calibri" pitchFamily="34" charset="-122"/>
+                <a:cs typeface="Calibri" pitchFamily="34" charset="-120"/>
+              </a:rPr>
+              <a:t>04</a:t>
+            </a:r>
+            <a:endParaRPr lang="en-US" sz="2600" dirty="0"/>
+          </a:p>
+        </p:txBody>
+      </p:sp>
+      <p:sp>
+        <p:nvSpPr>
+          <p:cNvPr id="22" name="Text 20"/>
+          <p:cNvSpPr/>
+          <p:nvPr/>
+        </p:nvSpPr>
+        <p:spPr>
+          <a:xfrm>
+            <a:off x="5550408" y="3264408"/>
+            <a:ext cx="3108960" cy="365760"/>
+          </a:xfrm>
+          <a:prstGeom prst="rect">
+            <a:avLst/>
+          </a:prstGeom>
+          <a:noFill/>
+          <a:ln/>
+        </p:spPr>
+        <p:txBody>
+          <a:bodyPr wrap="square" lIns="0" tIns="0" rIns="0" bIns="0" rtlCol="0" anchor="ctr"/>
+          <a:lstStyle/>
+          <a:p>
+            <a:pPr marL="0" indent="0">
+              <a:buNone/>
+            </a:pPr>
+            <a:r>
+              <a:rPr lang="en-US" sz="1400" b="1" dirty="0">
+                <a:solidFill>
+                  <a:srgbClr val="0A2342"/>
+                </a:solidFill>
+                <a:latin typeface="Calibri" pitchFamily="34" charset="0"/>
+                <a:ea typeface="Calibri" pitchFamily="34" charset="-122"/>
+                <a:cs typeface="Calibri" pitchFamily="34" charset="-120"/>
+              </a:rPr>
+              <a:t>Regional Variation</a:t>
+            </a:r>
+            <a:endParaRPr lang="en-US" sz="1400" dirty="0"/>
+          </a:p>
+        </p:txBody>
+      </p:sp>
+      <p:sp>
+        <p:nvSpPr>
+          <p:cNvPr id="23" name="Text 21"/>
+          <p:cNvSpPr/>
+          <p:nvPr/>
+        </p:nvSpPr>
+        <p:spPr>
+          <a:xfrm>
+            <a:off x="4910328" y="3776472"/>
+            <a:ext cx="3794760" cy="914400"/>
+          </a:xfrm>
+          <a:prstGeom prst="rect">
+            <a:avLst/>
+          </a:prstGeom>
+          <a:noFill/>
+          <a:ln/>
+        </p:spPr>
+        <p:txBody>
+          <a:bodyPr wrap="square" lIns="0" tIns="0" rIns="0" bIns="0" rtlCol="0" anchor="ctr"/>
+          <a:lstStyle/>
+          <a:p>
+            <a:pPr marL="0" indent="0">
+              <a:buNone/>
+            </a:pPr>
+            <a:r>
+              <a:rPr lang="en-US" sz="1150" dirty="0">
+                <a:solidFill>
+                  <a:srgbClr val="1E293B"/>
+                </a:solidFill>
+                <a:latin typeface="Calibri Light" pitchFamily="34" charset="0"/>
+                <a:ea typeface="Calibri Light" pitchFamily="34" charset="-122"/>
+                <a:cs typeface="Calibri Light" pitchFamily="34" charset="-120"/>
+              </a:rPr>
+              <a:t>Significant differences in consumption and scarcity exist across regions worldwide</a:t>
+            </a:r>
+            <a:endParaRPr lang="en-US" sz="1150" dirty="0"/>
+          </a:p>
+        </p:txBody>
+      </p:sp>
+    </p:spTree>
+  </p:cSld>
+  <p:clrMapOvr>
+    <a:masterClrMapping/>
+  </p:clrMapOvr>
+</p:sld>
+</file>
+
+<file path=ppt/slides/slide13.xml><?xml version="1.0" encoding="utf-8"?>
+<p:sld xmlns:a="http://schemas.openxmlformats.org/drawingml/2006/main" xmlns:r="http://schemas.openxmlformats.org/officeDocument/2006/relationships" xmlns:p="http://schemas.openxmlformats.org/presentationml/2006/main">
+  <p:cSld name="Slide 9">
+    <p:bg>
+      <p:bgPr>
+        <a:solidFill>
+          <a:srgbClr val="E0F2FE"/>
+        </a:solidFill>
+        <a:effectLst/>
+      </p:bgPr>
+    </p:bg>
+    <p:spTree>
+      <p:nvGrpSpPr>
+        <p:cNvPr id="1" name=""/>
+        <p:cNvGrpSpPr/>
+        <p:nvPr/>
+      </p:nvGrpSpPr>
+      <p:grpSpPr>
+        <a:xfrm>
+          <a:off x="0" y="0"/>
+          <a:ext cx="0" cy="0"/>
+          <a:chOff x="0" y="0"/>
+          <a:chExt cx="0" cy="0"/>
+        </a:xfrm>
+      </p:grpSpPr>
+      <p:sp>
+        <p:nvSpPr>
+          <p:cNvPr id="2" name="Shape 0"/>
+          <p:cNvSpPr/>
+          <p:nvPr/>
+        </p:nvSpPr>
+        <p:spPr>
+          <a:xfrm>
+            <a:off x="0" y="0"/>
+            <a:ext cx="9144000" cy="685800"/>
+          </a:xfrm>
+          <a:prstGeom prst="rect">
+            <a:avLst/>
+          </a:prstGeom>
+          <a:solidFill>
+            <a:srgbClr val="0A2342"/>
+          </a:solidFill>
+          <a:ln w="12700">
+            <a:solidFill>
+              <a:srgbClr val="0A2342"/>
+            </a:solidFill>
+            <a:prstDash val="solid"/>
+          </a:ln>
+        </p:spPr>
+        <p:txBody>
+          <a:bodyPr/>
+          <a:lstStyle/>
+          <a:p>
+            <a:endParaRPr lang="en-IN"/>
+          </a:p>
+        </p:txBody>
+      </p:sp>
+      <p:sp>
+        <p:nvSpPr>
+          <p:cNvPr id="3" name="Text 1"/>
+          <p:cNvSpPr/>
+          <p:nvPr/>
+        </p:nvSpPr>
+        <p:spPr>
+          <a:xfrm>
+            <a:off x="365760" y="0"/>
+            <a:ext cx="8229600" cy="685800"/>
+          </a:xfrm>
+          <a:prstGeom prst="rect">
+            <a:avLst/>
+          </a:prstGeom>
+          <a:noFill/>
+          <a:ln/>
+        </p:spPr>
+        <p:txBody>
+          <a:bodyPr wrap="square" lIns="0" tIns="0" rIns="0" bIns="0" rtlCol="0" anchor="ctr"/>
+          <a:lstStyle/>
+          <a:p>
+            <a:pPr marL="0" indent="0" algn="l">
+              <a:buNone/>
+            </a:pPr>
+            <a:r>
+              <a:rPr lang="en-US" sz="1300" b="1" kern="0" spc="300" dirty="0">
+                <a:solidFill>
+                  <a:srgbClr val="5EEAD4"/>
+                </a:solidFill>
+                <a:latin typeface="Calibri" pitchFamily="34" charset="0"/>
+                <a:ea typeface="Calibri" pitchFamily="34" charset="-122"/>
+                <a:cs typeface="Calibri" pitchFamily="34" charset="-120"/>
+              </a:rPr>
+              <a:t>FUTURE WORK</a:t>
+            </a:r>
+            <a:endParaRPr lang="en-US" sz="1300" dirty="0"/>
+          </a:p>
+        </p:txBody>
+      </p:sp>
+      <p:sp>
+        <p:nvSpPr>
+          <p:cNvPr id="4" name="Shape 2"/>
+          <p:cNvSpPr/>
+          <p:nvPr/>
+        </p:nvSpPr>
+        <p:spPr>
+          <a:xfrm>
+            <a:off x="320040" y="868680"/>
+            <a:ext cx="4160520" cy="1874520"/>
+          </a:xfrm>
+          <a:prstGeom prst="rect">
+            <a:avLst/>
+          </a:prstGeom>
+          <a:solidFill>
+            <a:srgbClr val="FFFFFF"/>
+          </a:solidFill>
+          <a:ln w="12700">
+            <a:solidFill>
+              <a:srgbClr val="D1E9FF"/>
+            </a:solidFill>
+            <a:prstDash val="solid"/>
+          </a:ln>
+          <a:effectLst>
+            <a:outerShdw blurRad="101600" dist="38100" dir="8100000" algn="bl" rotWithShape="0">
+              <a:srgbClr val="000000">
+                <a:alpha val="10000"/>
+              </a:srgbClr>
+            </a:outerShdw>
+          </a:effectLst>
+        </p:spPr>
+        <p:txBody>
+          <a:bodyPr/>
+          <a:lstStyle/>
+          <a:p>
+            <a:endParaRPr lang="en-IN"/>
+          </a:p>
+        </p:txBody>
+      </p:sp>
+      <p:sp>
+        <p:nvSpPr>
+          <p:cNvPr id="5" name="Shape 3"/>
+          <p:cNvSpPr/>
+          <p:nvPr/>
+        </p:nvSpPr>
+        <p:spPr>
+          <a:xfrm>
+            <a:off x="502920" y="1051560"/>
+            <a:ext cx="566928" cy="566928"/>
+          </a:xfrm>
+          <a:prstGeom prst="ellipse">
+            <a:avLst/>
+          </a:prstGeom>
+          <a:solidFill>
+            <a:srgbClr val="0D9488"/>
+          </a:solidFill>
+          <a:ln w="12700">
+            <a:solidFill>
+              <a:srgbClr val="0D9488"/>
+            </a:solidFill>
+            <a:prstDash val="solid"/>
+          </a:ln>
+        </p:spPr>
+        <p:txBody>
+          <a:bodyPr/>
+          <a:lstStyle/>
+          <a:p>
+            <a:endParaRPr lang="en-IN"/>
+          </a:p>
+        </p:txBody>
+      </p:sp>
+      <p:sp>
+        <p:nvSpPr>
+          <p:cNvPr id="6" name="Text 4"/>
+          <p:cNvSpPr/>
+          <p:nvPr/>
+        </p:nvSpPr>
+        <p:spPr>
+          <a:xfrm>
+            <a:off x="502920" y="1051560"/>
+            <a:ext cx="566928" cy="566928"/>
+          </a:xfrm>
+          <a:prstGeom prst="rect">
+            <a:avLst/>
+          </a:prstGeom>
+          <a:noFill/>
+          <a:ln/>
+        </p:spPr>
+        <p:txBody>
+          <a:bodyPr wrap="square" lIns="0" tIns="0" rIns="0" bIns="0" rtlCol="0" anchor="ctr"/>
+          <a:lstStyle/>
+          <a:p>
+            <a:pPr marL="0" indent="0" algn="ctr">
+              <a:buNone/>
+            </a:pPr>
+            <a:r>
+              <a:rPr lang="en-US" sz="1600" b="1" dirty="0">
+                <a:solidFill>
+                  <a:srgbClr val="FFFFFF"/>
+                </a:solidFill>
+                <a:latin typeface="Calibri" pitchFamily="34" charset="0"/>
+                <a:ea typeface="Calibri" pitchFamily="34" charset="-122"/>
+                <a:cs typeface="Calibri" pitchFamily="34" charset="-120"/>
+              </a:rPr>
+              <a:t>1</a:t>
+            </a:r>
+            <a:endParaRPr lang="en-US" sz="1600" dirty="0"/>
+          </a:p>
+        </p:txBody>
+      </p:sp>
+      <p:sp>
+        <p:nvSpPr>
+          <p:cNvPr id="7" name="Text 5"/>
+          <p:cNvSpPr/>
+          <p:nvPr/>
+        </p:nvSpPr>
+        <p:spPr>
+          <a:xfrm>
+            <a:off x="1207008" y="1088136"/>
+            <a:ext cx="3090672" cy="384048"/>
+          </a:xfrm>
+          <a:prstGeom prst="rect">
+            <a:avLst/>
+          </a:prstGeom>
+          <a:noFill/>
+          <a:ln/>
+        </p:spPr>
+        <p:txBody>
+          <a:bodyPr wrap="square" lIns="0" tIns="0" rIns="0" bIns="0" rtlCol="0" anchor="ctr"/>
+          <a:lstStyle/>
+          <a:p>
+            <a:pPr marL="0" indent="0">
+              <a:buNone/>
+            </a:pPr>
+            <a:r>
+              <a:rPr lang="en-US" sz="1400" b="1" dirty="0">
+                <a:solidFill>
+                  <a:srgbClr val="0A2342"/>
+                </a:solidFill>
+                <a:latin typeface="Calibri" pitchFamily="34" charset="0"/>
+                <a:ea typeface="Calibri" pitchFamily="34" charset="-122"/>
+                <a:cs typeface="Calibri" pitchFamily="34" charset="-120"/>
+              </a:rPr>
+              <a:t>ML Forecasting</a:t>
+            </a:r>
+            <a:endParaRPr lang="en-US" sz="1400" dirty="0"/>
+          </a:p>
+        </p:txBody>
+      </p:sp>
+      <p:sp>
+        <p:nvSpPr>
+          <p:cNvPr id="8" name="Text 6"/>
+          <p:cNvSpPr/>
+          <p:nvPr/>
+        </p:nvSpPr>
+        <p:spPr>
+          <a:xfrm>
+            <a:off x="502920" y="1709928"/>
+            <a:ext cx="3794760" cy="914400"/>
+          </a:xfrm>
+          <a:prstGeom prst="rect">
+            <a:avLst/>
+          </a:prstGeom>
+          <a:noFill/>
+          <a:ln/>
+        </p:spPr>
+        <p:txBody>
+          <a:bodyPr wrap="square" lIns="0" tIns="0" rIns="0" bIns="0" rtlCol="0" anchor="ctr"/>
+          <a:lstStyle/>
+          <a:p>
+            <a:pPr marL="0" indent="0">
+              <a:buNone/>
+            </a:pPr>
+            <a:r>
+              <a:rPr lang="en-US" sz="1150" dirty="0">
+                <a:solidFill>
+                  <a:srgbClr val="1E293B"/>
+                </a:solidFill>
+                <a:latin typeface="Calibri Light" pitchFamily="34" charset="0"/>
+                <a:ea typeface="Calibri Light" pitchFamily="34" charset="-122"/>
+                <a:cs typeface="Calibri Light" pitchFamily="34" charset="-120"/>
+              </a:rPr>
+              <a:t>Predict future water consumption using regression and time-series ML models</a:t>
+            </a:r>
+            <a:endParaRPr lang="en-US" sz="1150" dirty="0"/>
+          </a:p>
+        </p:txBody>
+      </p:sp>
+      <p:sp>
+        <p:nvSpPr>
+          <p:cNvPr id="9" name="Shape 7"/>
+          <p:cNvSpPr/>
+          <p:nvPr/>
+        </p:nvSpPr>
+        <p:spPr>
+          <a:xfrm>
+            <a:off x="4727448" y="868680"/>
+            <a:ext cx="4160520" cy="1874520"/>
+          </a:xfrm>
+          <a:prstGeom prst="rect">
+            <a:avLst/>
+          </a:prstGeom>
+          <a:solidFill>
+            <a:srgbClr val="FFFFFF"/>
+          </a:solidFill>
+          <a:ln w="12700">
+            <a:solidFill>
+              <a:srgbClr val="D1E9FF"/>
+            </a:solidFill>
+            <a:prstDash val="solid"/>
+          </a:ln>
+          <a:effectLst>
+            <a:outerShdw blurRad="101600" dist="38100" dir="8100000" algn="bl" rotWithShape="0">
+              <a:srgbClr val="000000">
+                <a:alpha val="10000"/>
+              </a:srgbClr>
+            </a:outerShdw>
+          </a:effectLst>
+        </p:spPr>
+        <p:txBody>
+          <a:bodyPr/>
+          <a:lstStyle/>
+          <a:p>
+            <a:endParaRPr lang="en-IN"/>
+          </a:p>
+        </p:txBody>
+      </p:sp>
+      <p:sp>
+        <p:nvSpPr>
+          <p:cNvPr id="10" name="Shape 8"/>
+          <p:cNvSpPr/>
+          <p:nvPr/>
+        </p:nvSpPr>
+        <p:spPr>
+          <a:xfrm>
+            <a:off x="4910328" y="1051560"/>
+            <a:ext cx="566928" cy="566928"/>
+          </a:xfrm>
+          <a:prstGeom prst="ellipse">
+            <a:avLst/>
+          </a:prstGeom>
+          <a:solidFill>
+            <a:srgbClr val="0D5C8F"/>
+          </a:solidFill>
+          <a:ln w="12700">
+            <a:solidFill>
+              <a:srgbClr val="0D5C8F"/>
+            </a:solidFill>
+            <a:prstDash val="solid"/>
+          </a:ln>
+        </p:spPr>
+        <p:txBody>
+          <a:bodyPr/>
+          <a:lstStyle/>
+          <a:p>
+            <a:endParaRPr lang="en-IN"/>
+          </a:p>
+        </p:txBody>
+      </p:sp>
+      <p:sp>
+        <p:nvSpPr>
+          <p:cNvPr id="11" name="Text 9"/>
+          <p:cNvSpPr/>
+          <p:nvPr/>
+        </p:nvSpPr>
+        <p:spPr>
+          <a:xfrm>
+            <a:off x="4910328" y="1051560"/>
+            <a:ext cx="566928" cy="566928"/>
+          </a:xfrm>
+          <a:prstGeom prst="rect">
+            <a:avLst/>
+          </a:prstGeom>
+          <a:noFill/>
+          <a:ln/>
+        </p:spPr>
+        <p:txBody>
+          <a:bodyPr wrap="square" lIns="0" tIns="0" rIns="0" bIns="0" rtlCol="0" anchor="ctr"/>
+          <a:lstStyle/>
+          <a:p>
+            <a:pPr marL="0" indent="0" algn="ctr">
+              <a:buNone/>
+            </a:pPr>
+            <a:r>
+              <a:rPr lang="en-US" sz="1600" b="1" dirty="0">
+                <a:solidFill>
+                  <a:srgbClr val="FFFFFF"/>
+                </a:solidFill>
+                <a:latin typeface="Calibri" pitchFamily="34" charset="0"/>
+                <a:ea typeface="Calibri" pitchFamily="34" charset="-122"/>
+                <a:cs typeface="Calibri" pitchFamily="34" charset="-120"/>
+              </a:rPr>
+              <a:t>2</a:t>
+            </a:r>
+            <a:endParaRPr lang="en-US" sz="1600" dirty="0"/>
+          </a:p>
+        </p:txBody>
+      </p:sp>
+      <p:sp>
+        <p:nvSpPr>
+          <p:cNvPr id="12" name="Text 10"/>
+          <p:cNvSpPr/>
+          <p:nvPr/>
+        </p:nvSpPr>
+        <p:spPr>
+          <a:xfrm>
+            <a:off x="5614416" y="1088136"/>
+            <a:ext cx="3090672" cy="384048"/>
+          </a:xfrm>
+          <a:prstGeom prst="rect">
+            <a:avLst/>
+          </a:prstGeom>
+          <a:noFill/>
+          <a:ln/>
+        </p:spPr>
+        <p:txBody>
+          <a:bodyPr wrap="square" lIns="0" tIns="0" rIns="0" bIns="0" rtlCol="0" anchor="ctr"/>
+          <a:lstStyle/>
+          <a:p>
+            <a:pPr marL="0" indent="0">
+              <a:buNone/>
+            </a:pPr>
+            <a:r>
+              <a:rPr lang="en-US" sz="1400" b="1" dirty="0">
+                <a:solidFill>
+                  <a:srgbClr val="0A2342"/>
+                </a:solidFill>
+                <a:latin typeface="Calibri" pitchFamily="34" charset="0"/>
+                <a:ea typeface="Calibri" pitchFamily="34" charset="-122"/>
+                <a:cs typeface="Calibri" pitchFamily="34" charset="-120"/>
+              </a:rPr>
+              <a:t>Risk Identification</a:t>
+            </a:r>
+            <a:endParaRPr lang="en-US" sz="1400" dirty="0"/>
+          </a:p>
+        </p:txBody>
+      </p:sp>
+      <p:sp>
+        <p:nvSpPr>
+          <p:cNvPr id="13" name="Text 11"/>
+          <p:cNvSpPr/>
+          <p:nvPr/>
+        </p:nvSpPr>
+        <p:spPr>
+          <a:xfrm>
+            <a:off x="4910328" y="1709928"/>
+            <a:ext cx="3794760" cy="914400"/>
+          </a:xfrm>
+          <a:prstGeom prst="rect">
+            <a:avLst/>
+          </a:prstGeom>
+          <a:noFill/>
+          <a:ln/>
+        </p:spPr>
+        <p:txBody>
+          <a:bodyPr wrap="square" lIns="0" tIns="0" rIns="0" bIns="0" rtlCol="0" anchor="ctr"/>
+          <a:lstStyle/>
+          <a:p>
+            <a:pPr marL="0" indent="0">
+              <a:buNone/>
+            </a:pPr>
+            <a:r>
+              <a:rPr lang="en-US" sz="1150" dirty="0">
+                <a:solidFill>
+                  <a:srgbClr val="1E293B"/>
+                </a:solidFill>
+                <a:latin typeface="Calibri Light" pitchFamily="34" charset="0"/>
+                <a:ea typeface="Calibri Light" pitchFamily="34" charset="-122"/>
+                <a:cs typeface="Calibri Light" pitchFamily="34" charset="-120"/>
+              </a:rPr>
+              <a:t>Identify countries at risk of severe water scarcity using classification models</a:t>
+            </a:r>
+            <a:endParaRPr lang="en-US" sz="1150" dirty="0"/>
+          </a:p>
+        </p:txBody>
+      </p:sp>
+      <p:sp>
+        <p:nvSpPr>
+          <p:cNvPr id="14" name="Shape 12"/>
+          <p:cNvSpPr/>
+          <p:nvPr/>
+        </p:nvSpPr>
+        <p:spPr>
+          <a:xfrm>
+            <a:off x="320040" y="2971800"/>
+            <a:ext cx="4160520" cy="1874520"/>
+          </a:xfrm>
+          <a:prstGeom prst="rect">
+            <a:avLst/>
+          </a:prstGeom>
+          <a:solidFill>
+            <a:srgbClr val="FFFFFF"/>
+          </a:solidFill>
+          <a:ln w="12700">
+            <a:solidFill>
+              <a:srgbClr val="D1E9FF"/>
+            </a:solidFill>
+            <a:prstDash val="solid"/>
+          </a:ln>
+          <a:effectLst>
+            <a:outerShdw blurRad="101600" dist="38100" dir="8100000" algn="bl" rotWithShape="0">
+              <a:srgbClr val="000000">
+                <a:alpha val="10000"/>
+              </a:srgbClr>
+            </a:outerShdw>
+          </a:effectLst>
+        </p:spPr>
+        <p:txBody>
+          <a:bodyPr/>
+          <a:lstStyle/>
+          <a:p>
+            <a:endParaRPr lang="en-IN"/>
+          </a:p>
+        </p:txBody>
+      </p:sp>
+      <p:sp>
+        <p:nvSpPr>
+          <p:cNvPr id="15" name="Shape 13"/>
+          <p:cNvSpPr/>
+          <p:nvPr/>
+        </p:nvSpPr>
+        <p:spPr>
+          <a:xfrm>
+            <a:off x="502920" y="3154680"/>
+            <a:ext cx="566928" cy="566928"/>
+          </a:xfrm>
+          <a:prstGeom prst="ellipse">
+            <a:avLst/>
+          </a:prstGeom>
+          <a:solidFill>
+            <a:srgbClr val="0891B2"/>
+          </a:solidFill>
+          <a:ln w="12700">
+            <a:solidFill>
+              <a:srgbClr val="0891B2"/>
+            </a:solidFill>
+            <a:prstDash val="solid"/>
+          </a:ln>
+        </p:spPr>
+        <p:txBody>
+          <a:bodyPr/>
+          <a:lstStyle/>
+          <a:p>
+            <a:endParaRPr lang="en-IN"/>
+          </a:p>
+        </p:txBody>
+      </p:sp>
+      <p:sp>
+        <p:nvSpPr>
+          <p:cNvPr id="16" name="Text 14"/>
+          <p:cNvSpPr/>
+          <p:nvPr/>
+        </p:nvSpPr>
+        <p:spPr>
+          <a:xfrm>
+            <a:off x="502920" y="3154680"/>
+            <a:ext cx="566928" cy="566928"/>
+          </a:xfrm>
+          <a:prstGeom prst="rect">
+            <a:avLst/>
+          </a:prstGeom>
+          <a:noFill/>
+          <a:ln/>
+        </p:spPr>
+        <p:txBody>
+          <a:bodyPr wrap="square" lIns="0" tIns="0" rIns="0" bIns="0" rtlCol="0" anchor="ctr"/>
+          <a:lstStyle/>
+          <a:p>
+            <a:pPr marL="0" indent="0" algn="ctr">
+              <a:buNone/>
+            </a:pPr>
+            <a:r>
+              <a:rPr lang="en-US" sz="1600" b="1" dirty="0">
+                <a:solidFill>
+                  <a:srgbClr val="FFFFFF"/>
+                </a:solidFill>
+                <a:latin typeface="Calibri" pitchFamily="34" charset="0"/>
+                <a:ea typeface="Calibri" pitchFamily="34" charset="-122"/>
+                <a:cs typeface="Calibri" pitchFamily="34" charset="-120"/>
+              </a:rPr>
+              <a:t>3</a:t>
+            </a:r>
+            <a:endParaRPr lang="en-US" sz="1600" dirty="0"/>
+          </a:p>
+        </p:txBody>
+      </p:sp>
+      <p:sp>
+        <p:nvSpPr>
+          <p:cNvPr id="17" name="Text 15"/>
+          <p:cNvSpPr/>
+          <p:nvPr/>
+        </p:nvSpPr>
+        <p:spPr>
+          <a:xfrm>
+            <a:off x="1207008" y="3191256"/>
+            <a:ext cx="3090672" cy="384048"/>
+          </a:xfrm>
+          <a:prstGeom prst="rect">
+            <a:avLst/>
+          </a:prstGeom>
+          <a:noFill/>
+          <a:ln/>
+        </p:spPr>
+        <p:txBody>
+          <a:bodyPr wrap="square" lIns="0" tIns="0" rIns="0" bIns="0" rtlCol="0" anchor="ctr"/>
+          <a:lstStyle/>
+          <a:p>
+            <a:pPr marL="0" indent="0">
+              <a:buNone/>
+            </a:pPr>
+            <a:r>
+              <a:rPr lang="en-US" sz="1400" b="1" dirty="0">
+                <a:solidFill>
+                  <a:srgbClr val="0A2342"/>
+                </a:solidFill>
+                <a:latin typeface="Calibri" pitchFamily="34" charset="0"/>
+                <a:ea typeface="Calibri" pitchFamily="34" charset="-122"/>
+                <a:cs typeface="Calibri" pitchFamily="34" charset="-120"/>
+              </a:rPr>
+              <a:t>Country Clustering</a:t>
+            </a:r>
+            <a:endParaRPr lang="en-US" sz="1400" dirty="0"/>
+          </a:p>
+        </p:txBody>
+      </p:sp>
+      <p:sp>
+        <p:nvSpPr>
+          <p:cNvPr id="18" name="Text 16"/>
+          <p:cNvSpPr/>
+          <p:nvPr/>
+        </p:nvSpPr>
+        <p:spPr>
+          <a:xfrm>
+            <a:off x="502920" y="3813048"/>
+            <a:ext cx="3794760" cy="914400"/>
+          </a:xfrm>
+          <a:prstGeom prst="rect">
+            <a:avLst/>
+          </a:prstGeom>
+          <a:noFill/>
+          <a:ln/>
+        </p:spPr>
+        <p:txBody>
+          <a:bodyPr wrap="square" lIns="0" tIns="0" rIns="0" bIns="0" rtlCol="0" anchor="ctr"/>
+          <a:lstStyle/>
+          <a:p>
+            <a:pPr marL="0" indent="0">
+              <a:buNone/>
+            </a:pPr>
+            <a:r>
+              <a:rPr lang="en-US" sz="1150" dirty="0">
+                <a:solidFill>
+                  <a:srgbClr val="1E293B"/>
+                </a:solidFill>
+                <a:latin typeface="Calibri Light" pitchFamily="34" charset="0"/>
+                <a:ea typeface="Calibri Light" pitchFamily="34" charset="-122"/>
+                <a:cs typeface="Calibri Light" pitchFamily="34" charset="-120"/>
+              </a:rPr>
+              <a:t>Cluster countries based on usage patterns using K-Means or DBSCAN</a:t>
+            </a:r>
+            <a:endParaRPr lang="en-US" sz="1150" dirty="0"/>
+          </a:p>
+        </p:txBody>
+      </p:sp>
+      <p:sp>
+        <p:nvSpPr>
+          <p:cNvPr id="19" name="Shape 17"/>
+          <p:cNvSpPr/>
+          <p:nvPr/>
+        </p:nvSpPr>
+        <p:spPr>
+          <a:xfrm>
+            <a:off x="4727448" y="2971800"/>
+            <a:ext cx="4160520" cy="1874520"/>
+          </a:xfrm>
+          <a:prstGeom prst="rect">
+            <a:avLst/>
+          </a:prstGeom>
+          <a:solidFill>
+            <a:srgbClr val="FFFFFF"/>
+          </a:solidFill>
+          <a:ln w="12700">
+            <a:solidFill>
+              <a:srgbClr val="D1E9FF"/>
+            </a:solidFill>
+            <a:prstDash val="solid"/>
+          </a:ln>
+          <a:effectLst>
+            <a:outerShdw blurRad="101600" dist="38100" dir="8100000" algn="bl" rotWithShape="0">
+              <a:srgbClr val="000000">
+                <a:alpha val="10000"/>
+              </a:srgbClr>
+            </a:outerShdw>
+          </a:effectLst>
+        </p:spPr>
+        <p:txBody>
+          <a:bodyPr/>
+          <a:lstStyle/>
+          <a:p>
+            <a:endParaRPr lang="en-IN"/>
+          </a:p>
+        </p:txBody>
+      </p:sp>
+      <p:sp>
+        <p:nvSpPr>
+          <p:cNvPr id="20" name="Shape 18"/>
+          <p:cNvSpPr/>
+          <p:nvPr/>
+        </p:nvSpPr>
+        <p:spPr>
+          <a:xfrm>
+            <a:off x="4910328" y="3154680"/>
+            <a:ext cx="566928" cy="566928"/>
+          </a:xfrm>
+          <a:prstGeom prst="ellipse">
+            <a:avLst/>
+          </a:prstGeom>
+          <a:solidFill>
+            <a:srgbClr val="0E7490"/>
+          </a:solidFill>
+          <a:ln w="12700">
+            <a:solidFill>
+              <a:srgbClr val="0E7490"/>
+            </a:solidFill>
+            <a:prstDash val="solid"/>
+          </a:ln>
+        </p:spPr>
+        <p:txBody>
+          <a:bodyPr/>
+          <a:lstStyle/>
+          <a:p>
+            <a:endParaRPr lang="en-IN"/>
+          </a:p>
+        </p:txBody>
+      </p:sp>
+      <p:sp>
+        <p:nvSpPr>
+          <p:cNvPr id="21" name="Text 19"/>
+          <p:cNvSpPr/>
+          <p:nvPr/>
+        </p:nvSpPr>
+        <p:spPr>
+          <a:xfrm>
+            <a:off x="4910328" y="3154680"/>
+            <a:ext cx="566928" cy="566928"/>
+          </a:xfrm>
+          <a:prstGeom prst="rect">
+            <a:avLst/>
+          </a:prstGeom>
+          <a:noFill/>
+          <a:ln/>
+        </p:spPr>
+        <p:txBody>
+          <a:bodyPr wrap="square" lIns="0" tIns="0" rIns="0" bIns="0" rtlCol="0" anchor="ctr"/>
+          <a:lstStyle/>
+          <a:p>
+            <a:pPr marL="0" indent="0" algn="ctr">
+              <a:buNone/>
+            </a:pPr>
+            <a:r>
+              <a:rPr lang="en-US" sz="1600" b="1" dirty="0">
+                <a:solidFill>
+                  <a:srgbClr val="FFFFFF"/>
+                </a:solidFill>
+                <a:latin typeface="Calibri" pitchFamily="34" charset="0"/>
+                <a:ea typeface="Calibri" pitchFamily="34" charset="-122"/>
+                <a:cs typeface="Calibri" pitchFamily="34" charset="-120"/>
+              </a:rPr>
+              <a:t>4</a:t>
+            </a:r>
+            <a:endParaRPr lang="en-US" sz="1600" dirty="0"/>
+          </a:p>
+        </p:txBody>
+      </p:sp>
+      <p:sp>
+        <p:nvSpPr>
+          <p:cNvPr id="22" name="Text 20"/>
+          <p:cNvSpPr/>
+          <p:nvPr/>
+        </p:nvSpPr>
+        <p:spPr>
+          <a:xfrm>
+            <a:off x="5614416" y="3191256"/>
+            <a:ext cx="3090672" cy="384048"/>
+          </a:xfrm>
+          <a:prstGeom prst="rect">
+            <a:avLst/>
+          </a:prstGeom>
+          <a:noFill/>
+          <a:ln/>
+        </p:spPr>
+        <p:txBody>
+          <a:bodyPr wrap="square" lIns="0" tIns="0" rIns="0" bIns="0" rtlCol="0" anchor="ctr"/>
+          <a:lstStyle/>
+          <a:p>
+            <a:pPr marL="0" indent="0">
+              <a:buNone/>
+            </a:pPr>
+            <a:r>
+              <a:rPr lang="en-US" sz="1400" b="1" dirty="0">
+                <a:solidFill>
+                  <a:srgbClr val="0A2342"/>
+                </a:solidFill>
+                <a:latin typeface="Calibri" pitchFamily="34" charset="0"/>
+                <a:ea typeface="Calibri" pitchFamily="34" charset="-122"/>
+                <a:cs typeface="Calibri" pitchFamily="34" charset="-120"/>
+              </a:rPr>
+              <a:t>Sustainability Trends</a:t>
+            </a:r>
+            <a:endParaRPr lang="en-US" sz="1400" dirty="0"/>
+          </a:p>
+        </p:txBody>
+      </p:sp>
+      <p:sp>
+        <p:nvSpPr>
+          <p:cNvPr id="23" name="Text 21"/>
+          <p:cNvSpPr/>
+          <p:nvPr/>
+        </p:nvSpPr>
+        <p:spPr>
+          <a:xfrm>
+            <a:off x="4910328" y="3813048"/>
+            <a:ext cx="3794760" cy="914400"/>
+          </a:xfrm>
+          <a:prstGeom prst="rect">
+            <a:avLst/>
+          </a:prstGeom>
+          <a:noFill/>
+          <a:ln/>
+        </p:spPr>
+        <p:txBody>
+          <a:bodyPr wrap="square" lIns="0" tIns="0" rIns="0" bIns="0" rtlCol="0" anchor="ctr"/>
+          <a:lstStyle/>
+          <a:p>
+            <a:pPr marL="0" indent="0">
+              <a:buNone/>
+            </a:pPr>
+            <a:r>
+              <a:rPr lang="en-US" sz="1150" dirty="0">
+                <a:solidFill>
+                  <a:srgbClr val="1E293B"/>
+                </a:solidFill>
+                <a:latin typeface="Calibri Light" pitchFamily="34" charset="0"/>
+                <a:ea typeface="Calibri Light" pitchFamily="34" charset="-122"/>
+                <a:cs typeface="Calibri Light" pitchFamily="34" charset="-120"/>
+              </a:rPr>
+              <a:t>Study long-term sustainability trends and policy impact on water usage</a:t>
+            </a:r>
+            <a:endParaRPr lang="en-US" sz="1150" dirty="0"/>
+          </a:p>
+        </p:txBody>
+      </p:sp>
+    </p:spTree>
+  </p:cSld>
+  <p:clrMapOvr>
+    <a:masterClrMapping/>
+  </p:clrMapOvr>
+</p:sld>
+</file>
+
+<file path=ppt/slides/slide14.xml><?xml version="1.0" encoding="utf-8"?>
+<p:sld xmlns:a="http://schemas.openxmlformats.org/drawingml/2006/main" xmlns:r="http://schemas.openxmlformats.org/officeDocument/2006/relationships" xmlns:p="http://schemas.openxmlformats.org/presentationml/2006/main">
   <p:cSld name="Slide 10">
     <p:bg>
       <p:bgPr>
@@ -2770,6 +5944,325 @@
         </p:txBody>
       </p:sp>
     </p:spTree>
+  </p:cSld>
+  <p:clrMapOvr>
+    <a:masterClrMapping/>
+  </p:clrMapOvr>
+</p:sld>
+</file>
+
+<file path=ppt/slides/slide15.xml><?xml version="1.0" encoding="utf-8"?>
+<p:sld xmlns:a="http://schemas.openxmlformats.org/drawingml/2006/main" xmlns:r="http://schemas.openxmlformats.org/officeDocument/2006/relationships" xmlns:p="http://schemas.openxmlformats.org/presentationml/2006/main">
+  <p:cSld>
+    <p:spTree>
+      <p:nvGrpSpPr>
+        <p:cNvPr id="1" name="">
+          <a:extLst>
+            <a:ext uri="{FF2B5EF4-FFF2-40B4-BE49-F238E27FC236}">
+              <a16:creationId xmlns:a16="http://schemas.microsoft.com/office/drawing/2014/main" id="{3946FAEE-B2FA-3609-5291-5A061C10F27E}"/>
+            </a:ext>
+          </a:extLst>
+        </p:cNvPr>
+        <p:cNvGrpSpPr/>
+        <p:nvPr/>
+      </p:nvGrpSpPr>
+      <p:grpSpPr>
+        <a:xfrm>
+          <a:off x="0" y="0"/>
+          <a:ext cx="0" cy="0"/>
+          <a:chOff x="0" y="0"/>
+          <a:chExt cx="0" cy="0"/>
+        </a:xfrm>
+      </p:grpSpPr>
+      <p:sp>
+        <p:nvSpPr>
+          <p:cNvPr id="2" name="Shape 0">
+            <a:extLst>
+              <a:ext uri="{FF2B5EF4-FFF2-40B4-BE49-F238E27FC236}">
+                <a16:creationId xmlns:a16="http://schemas.microsoft.com/office/drawing/2014/main" id="{0294377D-F235-8A23-BC4F-58E8EF5D6F6B}"/>
+              </a:ext>
+            </a:extLst>
+          </p:cNvPr>
+          <p:cNvSpPr/>
+          <p:nvPr/>
+        </p:nvSpPr>
+        <p:spPr>
+          <a:xfrm>
+            <a:off x="0" y="0"/>
+            <a:ext cx="9144000" cy="685800"/>
+          </a:xfrm>
+          <a:prstGeom prst="rect">
+            <a:avLst/>
+          </a:prstGeom>
+          <a:solidFill>
+            <a:srgbClr val="0A2342"/>
+          </a:solidFill>
+          <a:ln w="12700">
+            <a:solidFill>
+              <a:srgbClr val="0A2342"/>
+            </a:solidFill>
+            <a:prstDash val="solid"/>
+          </a:ln>
+        </p:spPr>
+        <p:txBody>
+          <a:bodyPr/>
+          <a:lstStyle/>
+          <a:p>
+            <a:r>
+              <a:rPr lang="en-US" b="1" kern="0" spc="300" dirty="0">
+                <a:solidFill>
+                  <a:srgbClr val="5EEAD4"/>
+                </a:solidFill>
+                <a:latin typeface="Calibri" pitchFamily="34" charset="0"/>
+                <a:ea typeface="Calibri" pitchFamily="34" charset="-122"/>
+                <a:cs typeface="Calibri" pitchFamily="34" charset="-120"/>
+              </a:rPr>
+              <a:t>Water Stewardship</a:t>
+            </a:r>
+            <a:endParaRPr lang="en-IN" dirty="0"/>
+          </a:p>
+        </p:txBody>
+      </p:sp>
+      <p:sp>
+        <p:nvSpPr>
+          <p:cNvPr id="3" name="Text 1">
+            <a:extLst>
+              <a:ext uri="{FF2B5EF4-FFF2-40B4-BE49-F238E27FC236}">
+                <a16:creationId xmlns:a16="http://schemas.microsoft.com/office/drawing/2014/main" id="{80559033-ED6D-F060-A68C-4D82EAC74336}"/>
+              </a:ext>
+            </a:extLst>
+          </p:cNvPr>
+          <p:cNvSpPr/>
+          <p:nvPr/>
+        </p:nvSpPr>
+        <p:spPr>
+          <a:xfrm>
+            <a:off x="365760" y="0"/>
+            <a:ext cx="8229600" cy="685800"/>
+          </a:xfrm>
+          <a:prstGeom prst="rect">
+            <a:avLst/>
+          </a:prstGeom>
+          <a:noFill/>
+          <a:ln/>
+        </p:spPr>
+        <p:txBody>
+          <a:bodyPr wrap="square" lIns="0" tIns="0" rIns="0" bIns="0" rtlCol="0" anchor="ctr"/>
+          <a:lstStyle/>
+          <a:p>
+            <a:pPr marL="0" indent="0" algn="l">
+              <a:buNone/>
+            </a:pPr>
+            <a:endParaRPr lang="en-US" sz="1300" dirty="0"/>
+          </a:p>
+        </p:txBody>
+      </p:sp>
+      <p:sp>
+        <p:nvSpPr>
+          <p:cNvPr id="25" name="AutoShape 2" descr="Early in the morning, children go to fetch water at the nearest water point, 15 kilometres away from their home in Tchadi village.">
+            <a:extLst>
+              <a:ext uri="{FF2B5EF4-FFF2-40B4-BE49-F238E27FC236}">
+                <a16:creationId xmlns:a16="http://schemas.microsoft.com/office/drawing/2014/main" id="{A0E62782-B6EE-62A8-A04D-63A588F79F78}"/>
+              </a:ext>
+            </a:extLst>
+          </p:cNvPr>
+          <p:cNvSpPr>
+            <a:spLocks noChangeAspect="1" noChangeArrowheads="1"/>
+          </p:cNvSpPr>
+          <p:nvPr/>
+        </p:nvSpPr>
+        <p:spPr bwMode="auto">
+          <a:xfrm>
+            <a:off x="4419600" y="2419350"/>
+            <a:ext cx="304800" cy="304800"/>
+          </a:xfrm>
+          <a:prstGeom prst="rect">
+            <a:avLst/>
+          </a:prstGeom>
+          <a:noFill/>
+          <a:extLst>
+            <a:ext uri="{909E8E84-426E-40DD-AFC4-6F175D3DCCD1}">
+              <a14:hiddenFill xmlns:a14="http://schemas.microsoft.com/office/drawing/2010/main">
+                <a:solidFill>
+                  <a:srgbClr val="FFFFFF"/>
+                </a:solidFill>
+              </a14:hiddenFill>
+            </a:ext>
+          </a:extLst>
+        </p:spPr>
+        <p:txBody>
+          <a:bodyPr vert="horz" wrap="square" lIns="91440" tIns="45720" rIns="91440" bIns="45720" numCol="1" anchor="t" anchorCtr="0" compatLnSpc="1">
+            <a:prstTxWarp prst="textNoShape">
+              <a:avLst/>
+            </a:prstTxWarp>
+          </a:bodyPr>
+          <a:lstStyle/>
+          <a:p>
+            <a:endParaRPr lang="en-IN"/>
+          </a:p>
+        </p:txBody>
+      </p:sp>
+      <p:sp>
+        <p:nvSpPr>
+          <p:cNvPr id="26" name="AutoShape 4" descr="Early in the morning, children go to fetch water at the nearest water point, 15 kilometres away from their home in Tchadi village.">
+            <a:extLst>
+              <a:ext uri="{FF2B5EF4-FFF2-40B4-BE49-F238E27FC236}">
+                <a16:creationId xmlns:a16="http://schemas.microsoft.com/office/drawing/2014/main" id="{DA6479CF-C888-6E19-261D-B4FA031902A4}"/>
+              </a:ext>
+            </a:extLst>
+          </p:cNvPr>
+          <p:cNvSpPr>
+            <a:spLocks noChangeAspect="1" noChangeArrowheads="1"/>
+          </p:cNvSpPr>
+          <p:nvPr/>
+        </p:nvSpPr>
+        <p:spPr bwMode="auto">
+          <a:xfrm>
+            <a:off x="4572000" y="2571750"/>
+            <a:ext cx="304800" cy="304800"/>
+          </a:xfrm>
+          <a:prstGeom prst="rect">
+            <a:avLst/>
+          </a:prstGeom>
+          <a:noFill/>
+          <a:extLst>
+            <a:ext uri="{909E8E84-426E-40DD-AFC4-6F175D3DCCD1}">
+              <a14:hiddenFill xmlns:a14="http://schemas.microsoft.com/office/drawing/2010/main">
+                <a:solidFill>
+                  <a:srgbClr val="FFFFFF"/>
+                </a:solidFill>
+              </a14:hiddenFill>
+            </a:ext>
+          </a:extLst>
+        </p:spPr>
+        <p:txBody>
+          <a:bodyPr vert="horz" wrap="square" lIns="91440" tIns="45720" rIns="91440" bIns="45720" numCol="1" anchor="t" anchorCtr="0" compatLnSpc="1">
+            <a:prstTxWarp prst="textNoShape">
+              <a:avLst/>
+            </a:prstTxWarp>
+          </a:bodyPr>
+          <a:lstStyle/>
+          <a:p>
+            <a:endParaRPr lang="en-IN"/>
+          </a:p>
+        </p:txBody>
+      </p:sp>
+      <p:sp>
+        <p:nvSpPr>
+          <p:cNvPr id="27" name="AutoShape 6" descr="Early in the morning, children go to fetch water at the nearest water point, 15 kilometres away from their home in Tchadi village.">
+            <a:extLst>
+              <a:ext uri="{FF2B5EF4-FFF2-40B4-BE49-F238E27FC236}">
+                <a16:creationId xmlns:a16="http://schemas.microsoft.com/office/drawing/2014/main" id="{B080C8DD-8824-68A4-41AF-70132299BFAB}"/>
+              </a:ext>
+            </a:extLst>
+          </p:cNvPr>
+          <p:cNvSpPr>
+            <a:spLocks noChangeAspect="1" noChangeArrowheads="1"/>
+          </p:cNvSpPr>
+          <p:nvPr/>
+        </p:nvSpPr>
+        <p:spPr bwMode="auto">
+          <a:xfrm>
+            <a:off x="4724400" y="2724150"/>
+            <a:ext cx="304800" cy="304800"/>
+          </a:xfrm>
+          <a:prstGeom prst="rect">
+            <a:avLst/>
+          </a:prstGeom>
+          <a:noFill/>
+          <a:extLst>
+            <a:ext uri="{909E8E84-426E-40DD-AFC4-6F175D3DCCD1}">
+              <a14:hiddenFill xmlns:a14="http://schemas.microsoft.com/office/drawing/2010/main">
+                <a:solidFill>
+                  <a:srgbClr val="FFFFFF"/>
+                </a:solidFill>
+              </a14:hiddenFill>
+            </a:ext>
+          </a:extLst>
+        </p:spPr>
+        <p:txBody>
+          <a:bodyPr vert="horz" wrap="square" lIns="91440" tIns="45720" rIns="91440" bIns="45720" numCol="1" anchor="t" anchorCtr="0" compatLnSpc="1">
+            <a:prstTxWarp prst="textNoShape">
+              <a:avLst/>
+            </a:prstTxWarp>
+          </a:bodyPr>
+          <a:lstStyle/>
+          <a:p>
+            <a:endParaRPr lang="en-IN"/>
+          </a:p>
+        </p:txBody>
+      </p:sp>
+      <p:pic>
+        <p:nvPicPr>
+          <p:cNvPr id="11" name="Picture 10">
+            <a:extLst>
+              <a:ext uri="{FF2B5EF4-FFF2-40B4-BE49-F238E27FC236}">
+                <a16:creationId xmlns:a16="http://schemas.microsoft.com/office/drawing/2014/main" id="{09D0E276-9FB6-E442-F8F8-C84690EBFF21}"/>
+              </a:ext>
+            </a:extLst>
+          </p:cNvPr>
+          <p:cNvPicPr>
+            <a:picLocks noChangeAspect="1"/>
+          </p:cNvPicPr>
+          <p:nvPr/>
+        </p:nvPicPr>
+        <p:blipFill>
+          <a:blip r:embed="rId3"/>
+          <a:stretch>
+            <a:fillRect/>
+          </a:stretch>
+        </p:blipFill>
+        <p:spPr>
+          <a:xfrm>
+            <a:off x="9993" y="685800"/>
+            <a:ext cx="9144000" cy="4043597"/>
+          </a:xfrm>
+          <a:prstGeom prst="rect">
+            <a:avLst/>
+          </a:prstGeom>
+        </p:spPr>
+      </p:pic>
+      <p:sp>
+        <p:nvSpPr>
+          <p:cNvPr id="12" name="TextBox 11">
+            <a:extLst>
+              <a:ext uri="{FF2B5EF4-FFF2-40B4-BE49-F238E27FC236}">
+                <a16:creationId xmlns:a16="http://schemas.microsoft.com/office/drawing/2014/main" id="{F94C9CDA-B9E2-3500-F721-89B9E230BF5A}"/>
+              </a:ext>
+            </a:extLst>
+          </p:cNvPr>
+          <p:cNvSpPr txBox="1"/>
+          <p:nvPr/>
+        </p:nvSpPr>
+        <p:spPr>
+          <a:xfrm>
+            <a:off x="82446" y="4729397"/>
+            <a:ext cx="9071547" cy="369332"/>
+          </a:xfrm>
+          <a:prstGeom prst="rect">
+            <a:avLst/>
+          </a:prstGeom>
+          <a:noFill/>
+        </p:spPr>
+        <p:txBody>
+          <a:bodyPr wrap="square" rtlCol="0">
+            <a:spAutoFit/>
+          </a:bodyPr>
+          <a:lstStyle/>
+          <a:p>
+            <a:r>
+              <a:rPr lang="en-US"/>
+              <a:t>Groundwater May Be Hidden, But the Secret to Its Sustainability Is Not</a:t>
+            </a:r>
+          </a:p>
+        </p:txBody>
+      </p:sp>
+    </p:spTree>
+    <p:extLst>
+      <p:ext uri="{BB962C8B-B14F-4D97-AF65-F5344CB8AC3E}">
+        <p14:creationId xmlns:p14="http://schemas.microsoft.com/office/powerpoint/2010/main" val="1672113240"/>
+      </p:ext>
+    </p:extLst>
   </p:cSld>
   <p:clrMapOvr>
     <a:masterClrMapping/>
@@ -2830,36 +6323,8 @@
           <a:bodyPr/>
           <a:lstStyle/>
           <a:p>
-            <a:endParaRPr lang="en-IN"/>
-          </a:p>
-        </p:txBody>
-      </p:sp>
-      <p:sp>
-        <p:nvSpPr>
-          <p:cNvPr id="3" name="Text 1"/>
-          <p:cNvSpPr/>
-          <p:nvPr/>
-        </p:nvSpPr>
-        <p:spPr>
-          <a:xfrm>
-            <a:off x="365760" y="0"/>
-            <a:ext cx="8229600" cy="685800"/>
-          </a:xfrm>
-          <a:prstGeom prst="rect">
-            <a:avLst/>
-          </a:prstGeom>
-          <a:noFill/>
-          <a:ln/>
-        </p:spPr>
-        <p:txBody>
-          <a:bodyPr wrap="square" lIns="0" tIns="0" rIns="0" bIns="0" rtlCol="0" anchor="ctr"/>
-          <a:lstStyle/>
-          <a:p>
-            <a:pPr marL="0" indent="0" algn="l">
-              <a:buNone/>
-            </a:pPr>
-            <a:r>
-              <a:rPr lang="en-US" sz="1300" b="1" kern="0" spc="300" dirty="0">
+            <a:r>
+              <a:rPr lang="en-US" b="1" kern="0" spc="300" dirty="0">
                 <a:solidFill>
                   <a:srgbClr val="5EEAD4"/>
                 </a:solidFill>
@@ -2867,8 +6332,36 @@
                 <a:ea typeface="Calibri" pitchFamily="34" charset="-122"/>
                 <a:cs typeface="Calibri" pitchFamily="34" charset="-120"/>
               </a:rPr>
-              <a:t>OBJECTIVE &amp; DATASET</a:t>
-            </a:r>
+              <a:t>Context</a:t>
+            </a:r>
+            <a:endParaRPr lang="en-IN" dirty="0"/>
+          </a:p>
+        </p:txBody>
+      </p:sp>
+      <p:sp>
+        <p:nvSpPr>
+          <p:cNvPr id="3" name="Text 1"/>
+          <p:cNvSpPr/>
+          <p:nvPr/>
+        </p:nvSpPr>
+        <p:spPr>
+          <a:xfrm>
+            <a:off x="365760" y="0"/>
+            <a:ext cx="8229600" cy="685800"/>
+          </a:xfrm>
+          <a:prstGeom prst="rect">
+            <a:avLst/>
+          </a:prstGeom>
+          <a:noFill/>
+          <a:ln/>
+        </p:spPr>
+        <p:txBody>
+          <a:bodyPr wrap="square" lIns="0" tIns="0" rIns="0" bIns="0" rtlCol="0" anchor="ctr"/>
+          <a:lstStyle/>
+          <a:p>
+            <a:pPr marL="0" indent="0" algn="l">
+              <a:buNone/>
+            </a:pPr>
             <a:endParaRPr lang="en-US" sz="1300" dirty="0"/>
           </a:p>
         </p:txBody>
@@ -2881,8 +6374,8 @@
         </p:nvSpPr>
         <p:spPr>
           <a:xfrm>
-            <a:off x="320040" y="868680"/>
-            <a:ext cx="4206240" cy="3977640"/>
+            <a:off x="205740" y="793729"/>
+            <a:ext cx="4206240" cy="4274820"/>
           </a:xfrm>
           <a:prstGeom prst="rect">
             <a:avLst/>
@@ -2908,7 +6401,7 @@
           <a:bodyPr/>
           <a:lstStyle/>
           <a:p>
-            <a:endParaRPr lang="en-IN"/>
+            <a:endParaRPr lang="en-IN" dirty="0"/>
           </a:p>
         </p:txBody>
       </p:sp>
@@ -2920,8 +6413,8 @@
         </p:nvSpPr>
         <p:spPr>
           <a:xfrm>
-            <a:off x="320040" y="868680"/>
-            <a:ext cx="164592" cy="3977640"/>
+            <a:off x="353568" y="887730"/>
+            <a:ext cx="210312" cy="4274820"/>
           </a:xfrm>
           <a:prstGeom prst="rect">
             <a:avLst/>
@@ -2977,7 +6470,7 @@
                 <a:ea typeface="Calibri" pitchFamily="34" charset="-122"/>
                 <a:cs typeface="Calibri" pitchFamily="34" charset="-120"/>
               </a:rPr>
-              <a:t>Objective</a:t>
+              <a:t>Key Facts</a:t>
             </a:r>
             <a:endParaRPr lang="en-US" sz="1600" dirty="0"/>
           </a:p>
@@ -3020,9 +6513,8 @@
                 <a:ea typeface="Calibri" pitchFamily="34" charset="-122"/>
                 <a:cs typeface="Calibri" pitchFamily="34" charset="-120"/>
               </a:rPr>
-              <a:t>Perform EDA on a global water consumption dataset</a:t>
-            </a:r>
-            <a:endParaRPr lang="en-US" sz="1200" dirty="0"/>
+              <a:t>Four billion people — almost two thirds of the world’s population —  experience severe water scarcity for at least one month each year.</a:t>
+            </a:r>
           </a:p>
           <a:p>
             <a:pPr marL="342900" indent="-342900">
@@ -3041,9 +6533,8 @@
                 <a:ea typeface="Calibri" pitchFamily="34" charset="-122"/>
                 <a:cs typeface="Calibri" pitchFamily="34" charset="-120"/>
               </a:rPr>
-              <a:t>Analyse water usage patterns across countries and years</a:t>
-            </a:r>
-            <a:endParaRPr lang="en-US" sz="1200" dirty="0"/>
+              <a:t>Over two billion people live in countries where water supply is inadequate.</a:t>
+            </a:r>
           </a:p>
           <a:p>
             <a:pPr marL="342900" indent="-342900">
@@ -3062,9 +6553,8 @@
                 <a:ea typeface="Calibri" pitchFamily="34" charset="-122"/>
                 <a:cs typeface="Calibri" pitchFamily="34" charset="-120"/>
               </a:rPr>
-              <a:t>Identify relationships between environmental factors and water scarcity</a:t>
-            </a:r>
-            <a:endParaRPr lang="en-US" sz="1200" dirty="0"/>
+              <a:t>Half of the world’s population could be living in areas facing water scarcity by as early as 2025.</a:t>
+            </a:r>
           </a:p>
           <a:p>
             <a:pPr marL="342900" indent="-342900">
@@ -3083,7 +6573,27 @@
                 <a:ea typeface="Calibri" pitchFamily="34" charset="-122"/>
                 <a:cs typeface="Calibri" pitchFamily="34" charset="-120"/>
               </a:rPr>
-              <a:t>Generate insights supporting sustainable water management</a:t>
+              <a:t>Some 700 million people could be displaced by intense water scarcity by 2030.</a:t>
+            </a:r>
+          </a:p>
+          <a:p>
+            <a:pPr marL="342900" indent="-342900">
+              <a:spcAft>
+                <a:spcPts val="1000"/>
+              </a:spcAft>
+              <a:buSzPct val="100000"/>
+              <a:buChar char="•"/>
+            </a:pPr>
+            <a:r>
+              <a:rPr lang="en-US" sz="1200" dirty="0">
+                <a:solidFill>
+                  <a:srgbClr val="1E293B"/>
+                </a:solidFill>
+                <a:latin typeface="Calibri" pitchFamily="34" charset="0"/>
+                <a:ea typeface="Calibri" pitchFamily="34" charset="-122"/>
+                <a:cs typeface="Calibri" pitchFamily="34" charset="-120"/>
+              </a:rPr>
+              <a:t>By 2040, roughly 1 in 4 children worldwide will be living in areas of extremely high water stress.</a:t>
             </a:r>
             <a:endParaRPr lang="en-US" sz="1200" dirty="0"/>
           </a:p>
@@ -3091,14 +6601,502 @@
       </p:sp>
       <p:sp>
         <p:nvSpPr>
-          <p:cNvPr id="8" name="Shape 6"/>
-          <p:cNvSpPr/>
-          <p:nvPr/>
-        </p:nvSpPr>
-        <p:spPr>
-          <a:xfrm>
-            <a:off x="4709160" y="868680"/>
-            <a:ext cx="4114800" cy="3977640"/>
+          <p:cNvPr id="25" name="AutoShape 2" descr="Early in the morning, children go to fetch water at the nearest water point, 15 kilometres away from their home in Tchadi village.">
+            <a:extLst>
+              <a:ext uri="{FF2B5EF4-FFF2-40B4-BE49-F238E27FC236}">
+                <a16:creationId xmlns:a16="http://schemas.microsoft.com/office/drawing/2014/main" id="{60845419-C7DB-8B6C-7EA8-9B3CDD2BF870}"/>
+              </a:ext>
+            </a:extLst>
+          </p:cNvPr>
+          <p:cNvSpPr>
+            <a:spLocks noChangeAspect="1" noChangeArrowheads="1"/>
+          </p:cNvSpPr>
+          <p:nvPr/>
+        </p:nvSpPr>
+        <p:spPr bwMode="auto">
+          <a:xfrm>
+            <a:off x="4419600" y="2419350"/>
+            <a:ext cx="304800" cy="304800"/>
+          </a:xfrm>
+          <a:prstGeom prst="rect">
+            <a:avLst/>
+          </a:prstGeom>
+          <a:noFill/>
+          <a:extLst>
+            <a:ext uri="{909E8E84-426E-40DD-AFC4-6F175D3DCCD1}">
+              <a14:hiddenFill xmlns:a14="http://schemas.microsoft.com/office/drawing/2010/main">
+                <a:solidFill>
+                  <a:srgbClr val="FFFFFF"/>
+                </a:solidFill>
+              </a14:hiddenFill>
+            </a:ext>
+          </a:extLst>
+        </p:spPr>
+        <p:txBody>
+          <a:bodyPr vert="horz" wrap="square" lIns="91440" tIns="45720" rIns="91440" bIns="45720" numCol="1" anchor="t" anchorCtr="0" compatLnSpc="1">
+            <a:prstTxWarp prst="textNoShape">
+              <a:avLst/>
+            </a:prstTxWarp>
+          </a:bodyPr>
+          <a:lstStyle/>
+          <a:p>
+            <a:endParaRPr lang="en-IN"/>
+          </a:p>
+        </p:txBody>
+      </p:sp>
+      <p:sp>
+        <p:nvSpPr>
+          <p:cNvPr id="26" name="AutoShape 4" descr="Early in the morning, children go to fetch water at the nearest water point, 15 kilometres away from their home in Tchadi village.">
+            <a:extLst>
+              <a:ext uri="{FF2B5EF4-FFF2-40B4-BE49-F238E27FC236}">
+                <a16:creationId xmlns:a16="http://schemas.microsoft.com/office/drawing/2014/main" id="{281A3834-5C42-27A0-C0C0-BBD515C0CA6F}"/>
+              </a:ext>
+            </a:extLst>
+          </p:cNvPr>
+          <p:cNvSpPr>
+            <a:spLocks noChangeAspect="1" noChangeArrowheads="1"/>
+          </p:cNvSpPr>
+          <p:nvPr/>
+        </p:nvSpPr>
+        <p:spPr bwMode="auto">
+          <a:xfrm>
+            <a:off x="4572000" y="2571750"/>
+            <a:ext cx="304800" cy="304800"/>
+          </a:xfrm>
+          <a:prstGeom prst="rect">
+            <a:avLst/>
+          </a:prstGeom>
+          <a:noFill/>
+          <a:extLst>
+            <a:ext uri="{909E8E84-426E-40DD-AFC4-6F175D3DCCD1}">
+              <a14:hiddenFill xmlns:a14="http://schemas.microsoft.com/office/drawing/2010/main">
+                <a:solidFill>
+                  <a:srgbClr val="FFFFFF"/>
+                </a:solidFill>
+              </a14:hiddenFill>
+            </a:ext>
+          </a:extLst>
+        </p:spPr>
+        <p:txBody>
+          <a:bodyPr vert="horz" wrap="square" lIns="91440" tIns="45720" rIns="91440" bIns="45720" numCol="1" anchor="t" anchorCtr="0" compatLnSpc="1">
+            <a:prstTxWarp prst="textNoShape">
+              <a:avLst/>
+            </a:prstTxWarp>
+          </a:bodyPr>
+          <a:lstStyle/>
+          <a:p>
+            <a:endParaRPr lang="en-IN"/>
+          </a:p>
+        </p:txBody>
+      </p:sp>
+      <p:sp>
+        <p:nvSpPr>
+          <p:cNvPr id="27" name="AutoShape 6" descr="Early in the morning, children go to fetch water at the nearest water point, 15 kilometres away from their home in Tchadi village.">
+            <a:extLst>
+              <a:ext uri="{FF2B5EF4-FFF2-40B4-BE49-F238E27FC236}">
+                <a16:creationId xmlns:a16="http://schemas.microsoft.com/office/drawing/2014/main" id="{FE8059A3-5E75-19CE-54A3-4CD60B889636}"/>
+              </a:ext>
+            </a:extLst>
+          </p:cNvPr>
+          <p:cNvSpPr>
+            <a:spLocks noChangeAspect="1" noChangeArrowheads="1"/>
+          </p:cNvSpPr>
+          <p:nvPr/>
+        </p:nvSpPr>
+        <p:spPr bwMode="auto">
+          <a:xfrm>
+            <a:off x="4724400" y="2724150"/>
+            <a:ext cx="304800" cy="304800"/>
+          </a:xfrm>
+          <a:prstGeom prst="rect">
+            <a:avLst/>
+          </a:prstGeom>
+          <a:noFill/>
+          <a:extLst>
+            <a:ext uri="{909E8E84-426E-40DD-AFC4-6F175D3DCCD1}">
+              <a14:hiddenFill xmlns:a14="http://schemas.microsoft.com/office/drawing/2010/main">
+                <a:solidFill>
+                  <a:srgbClr val="FFFFFF"/>
+                </a:solidFill>
+              </a14:hiddenFill>
+            </a:ext>
+          </a:extLst>
+        </p:spPr>
+        <p:txBody>
+          <a:bodyPr vert="horz" wrap="square" lIns="91440" tIns="45720" rIns="91440" bIns="45720" numCol="1" anchor="t" anchorCtr="0" compatLnSpc="1">
+            <a:prstTxWarp prst="textNoShape">
+              <a:avLst/>
+            </a:prstTxWarp>
+          </a:bodyPr>
+          <a:lstStyle/>
+          <a:p>
+            <a:endParaRPr lang="en-IN"/>
+          </a:p>
+        </p:txBody>
+      </p:sp>
+      <p:pic>
+        <p:nvPicPr>
+          <p:cNvPr id="29" name="Picture 28">
+            <a:extLst>
+              <a:ext uri="{FF2B5EF4-FFF2-40B4-BE49-F238E27FC236}">
+                <a16:creationId xmlns:a16="http://schemas.microsoft.com/office/drawing/2014/main" id="{6949F607-CE0F-95E2-5538-69A22E45F6AD}"/>
+              </a:ext>
+            </a:extLst>
+          </p:cNvPr>
+          <p:cNvPicPr>
+            <a:picLocks noChangeAspect="1"/>
+          </p:cNvPicPr>
+          <p:nvPr/>
+        </p:nvPicPr>
+        <p:blipFill>
+          <a:blip r:embed="rId3"/>
+          <a:stretch>
+            <a:fillRect/>
+          </a:stretch>
+        </p:blipFill>
+        <p:spPr>
+          <a:xfrm>
+            <a:off x="4465320" y="868680"/>
+            <a:ext cx="4587240" cy="3977640"/>
+          </a:xfrm>
+          <a:prstGeom prst="rect">
+            <a:avLst/>
+          </a:prstGeom>
+        </p:spPr>
+      </p:pic>
+      <p:sp>
+        <p:nvSpPr>
+          <p:cNvPr id="30" name="TextBox 29">
+            <a:extLst>
+              <a:ext uri="{FF2B5EF4-FFF2-40B4-BE49-F238E27FC236}">
+                <a16:creationId xmlns:a16="http://schemas.microsoft.com/office/drawing/2014/main" id="{3D262C4B-4402-1B79-CF67-D1BB1EEEF130}"/>
+              </a:ext>
+            </a:extLst>
+          </p:cNvPr>
+          <p:cNvSpPr txBox="1"/>
+          <p:nvPr/>
+        </p:nvSpPr>
+        <p:spPr>
+          <a:xfrm>
+            <a:off x="846944" y="4572000"/>
+            <a:ext cx="3230381" cy="369332"/>
+          </a:xfrm>
+          <a:prstGeom prst="rect">
+            <a:avLst/>
+          </a:prstGeom>
+          <a:noFill/>
+        </p:spPr>
+        <p:txBody>
+          <a:bodyPr wrap="square" rtlCol="0">
+            <a:spAutoFit/>
+          </a:bodyPr>
+          <a:lstStyle/>
+          <a:p>
+            <a:r>
+              <a:rPr lang="en-IN" dirty="0">
+                <a:hlinkClick r:id="rId4"/>
+              </a:rPr>
+              <a:t>Water scarcity | UNICEF</a:t>
+            </a:r>
+            <a:endParaRPr lang="en-IN" dirty="0"/>
+          </a:p>
+        </p:txBody>
+      </p:sp>
+    </p:spTree>
+  </p:cSld>
+  <p:clrMapOvr>
+    <a:masterClrMapping/>
+  </p:clrMapOvr>
+</p:sld>
+</file>
+
+<file path=ppt/slides/slide3.xml><?xml version="1.0" encoding="utf-8"?>
+<p:sld xmlns:a="http://schemas.openxmlformats.org/drawingml/2006/main" xmlns:r="http://schemas.openxmlformats.org/officeDocument/2006/relationships" xmlns:p="http://schemas.openxmlformats.org/presentationml/2006/main">
+  <p:cSld>
+    <p:bg>
+      <p:bgPr>
+        <a:solidFill>
+          <a:srgbClr val="E0F2FE"/>
+        </a:solidFill>
+        <a:effectLst/>
+      </p:bgPr>
+    </p:bg>
+    <p:spTree>
+      <p:nvGrpSpPr>
+        <p:cNvPr id="1" name="">
+          <a:extLst>
+            <a:ext uri="{FF2B5EF4-FFF2-40B4-BE49-F238E27FC236}">
+              <a16:creationId xmlns:a16="http://schemas.microsoft.com/office/drawing/2014/main" id="{D67AE73F-4849-44E3-4E40-4ED2966B40A4}"/>
+            </a:ext>
+          </a:extLst>
+        </p:cNvPr>
+        <p:cNvGrpSpPr/>
+        <p:nvPr/>
+      </p:nvGrpSpPr>
+      <p:grpSpPr>
+        <a:xfrm>
+          <a:off x="0" y="0"/>
+          <a:ext cx="0" cy="0"/>
+          <a:chOff x="0" y="0"/>
+          <a:chExt cx="0" cy="0"/>
+        </a:xfrm>
+      </p:grpSpPr>
+      <p:sp>
+        <p:nvSpPr>
+          <p:cNvPr id="2" name="Shape 0">
+            <a:extLst>
+              <a:ext uri="{FF2B5EF4-FFF2-40B4-BE49-F238E27FC236}">
+                <a16:creationId xmlns:a16="http://schemas.microsoft.com/office/drawing/2014/main" id="{A3123662-7747-02DB-92BF-4EA47CCF4324}"/>
+              </a:ext>
+            </a:extLst>
+          </p:cNvPr>
+          <p:cNvSpPr/>
+          <p:nvPr/>
+        </p:nvSpPr>
+        <p:spPr>
+          <a:xfrm>
+            <a:off x="0" y="0"/>
+            <a:ext cx="9144000" cy="685800"/>
+          </a:xfrm>
+          <a:prstGeom prst="rect">
+            <a:avLst/>
+          </a:prstGeom>
+          <a:solidFill>
+            <a:srgbClr val="0A2342"/>
+          </a:solidFill>
+          <a:ln w="12700">
+            <a:solidFill>
+              <a:srgbClr val="0A2342"/>
+            </a:solidFill>
+            <a:prstDash val="solid"/>
+          </a:ln>
+        </p:spPr>
+        <p:txBody>
+          <a:bodyPr/>
+          <a:lstStyle/>
+          <a:p>
+            <a:endParaRPr lang="en-IN" dirty="0"/>
+          </a:p>
+        </p:txBody>
+      </p:sp>
+      <p:sp>
+        <p:nvSpPr>
+          <p:cNvPr id="3" name="Text 1">
+            <a:extLst>
+              <a:ext uri="{FF2B5EF4-FFF2-40B4-BE49-F238E27FC236}">
+                <a16:creationId xmlns:a16="http://schemas.microsoft.com/office/drawing/2014/main" id="{A6E3E850-27C3-F433-CB4A-9BBFA2EE3044}"/>
+              </a:ext>
+            </a:extLst>
+          </p:cNvPr>
+          <p:cNvSpPr/>
+          <p:nvPr/>
+        </p:nvSpPr>
+        <p:spPr>
+          <a:xfrm>
+            <a:off x="365760" y="0"/>
+            <a:ext cx="8229600" cy="685800"/>
+          </a:xfrm>
+          <a:prstGeom prst="rect">
+            <a:avLst/>
+          </a:prstGeom>
+          <a:noFill/>
+          <a:ln/>
+        </p:spPr>
+        <p:txBody>
+          <a:bodyPr wrap="square" lIns="0" tIns="0" rIns="0" bIns="0" rtlCol="0" anchor="ctr"/>
+          <a:lstStyle/>
+          <a:p>
+            <a:pPr marL="0" indent="0" algn="l">
+              <a:buNone/>
+            </a:pPr>
+            <a:r>
+              <a:rPr lang="en-US" sz="1300" b="1" kern="0" spc="300" dirty="0">
+                <a:solidFill>
+                  <a:srgbClr val="5EEAD4"/>
+                </a:solidFill>
+                <a:latin typeface="Calibri" pitchFamily="34" charset="0"/>
+                <a:ea typeface="Calibri" pitchFamily="34" charset="-122"/>
+                <a:cs typeface="Calibri" pitchFamily="34" charset="-120"/>
+              </a:rPr>
+              <a:t>  Globol Water Consumption Dataset Columns</a:t>
+            </a:r>
+            <a:endParaRPr lang="en-US" sz="1300" dirty="0"/>
+          </a:p>
+        </p:txBody>
+      </p:sp>
+      <p:pic>
+        <p:nvPicPr>
+          <p:cNvPr id="6" name="Picture 5">
+            <a:extLst>
+              <a:ext uri="{FF2B5EF4-FFF2-40B4-BE49-F238E27FC236}">
+                <a16:creationId xmlns:a16="http://schemas.microsoft.com/office/drawing/2014/main" id="{DADF3803-479A-71EA-1CD0-3793673FF1D7}"/>
+              </a:ext>
+            </a:extLst>
+          </p:cNvPr>
+          <p:cNvPicPr>
+            <a:picLocks noChangeAspect="1"/>
+          </p:cNvPicPr>
+          <p:nvPr/>
+        </p:nvPicPr>
+        <p:blipFill>
+          <a:blip r:embed="rId3"/>
+          <a:stretch>
+            <a:fillRect/>
+          </a:stretch>
+        </p:blipFill>
+        <p:spPr>
+          <a:xfrm>
+            <a:off x="-194872" y="798225"/>
+            <a:ext cx="8940497" cy="4274070"/>
+          </a:xfrm>
+          <a:prstGeom prst="rect">
+            <a:avLst/>
+          </a:prstGeom>
+        </p:spPr>
+      </p:pic>
+    </p:spTree>
+    <p:extLst>
+      <p:ext uri="{BB962C8B-B14F-4D97-AF65-F5344CB8AC3E}">
+        <p14:creationId xmlns:p14="http://schemas.microsoft.com/office/powerpoint/2010/main" val="2148500607"/>
+      </p:ext>
+    </p:extLst>
+  </p:cSld>
+  <p:clrMapOvr>
+    <a:masterClrMapping/>
+  </p:clrMapOvr>
+</p:sld>
+</file>
+
+<file path=ppt/slides/slide4.xml><?xml version="1.0" encoding="utf-8"?>
+<p:sld xmlns:a="http://schemas.openxmlformats.org/drawingml/2006/main" xmlns:r="http://schemas.openxmlformats.org/officeDocument/2006/relationships" xmlns:p="http://schemas.openxmlformats.org/presentationml/2006/main">
+  <p:cSld>
+    <p:bg>
+      <p:bgPr>
+        <a:solidFill>
+          <a:srgbClr val="E0F2FE"/>
+        </a:solidFill>
+        <a:effectLst/>
+      </p:bgPr>
+    </p:bg>
+    <p:spTree>
+      <p:nvGrpSpPr>
+        <p:cNvPr id="1" name="">
+          <a:extLst>
+            <a:ext uri="{FF2B5EF4-FFF2-40B4-BE49-F238E27FC236}">
+              <a16:creationId xmlns:a16="http://schemas.microsoft.com/office/drawing/2014/main" id="{102829A3-951A-169E-DF5C-43729CDAAD9D}"/>
+            </a:ext>
+          </a:extLst>
+        </p:cNvPr>
+        <p:cNvGrpSpPr/>
+        <p:nvPr/>
+      </p:nvGrpSpPr>
+      <p:grpSpPr>
+        <a:xfrm>
+          <a:off x="0" y="0"/>
+          <a:ext cx="0" cy="0"/>
+          <a:chOff x="0" y="0"/>
+          <a:chExt cx="0" cy="0"/>
+        </a:xfrm>
+      </p:grpSpPr>
+      <p:sp>
+        <p:nvSpPr>
+          <p:cNvPr id="2" name="Shape 0">
+            <a:extLst>
+              <a:ext uri="{FF2B5EF4-FFF2-40B4-BE49-F238E27FC236}">
+                <a16:creationId xmlns:a16="http://schemas.microsoft.com/office/drawing/2014/main" id="{BC4D7FBA-ECF6-E117-0B6B-B15002277BCA}"/>
+              </a:ext>
+            </a:extLst>
+          </p:cNvPr>
+          <p:cNvSpPr/>
+          <p:nvPr/>
+        </p:nvSpPr>
+        <p:spPr>
+          <a:xfrm>
+            <a:off x="0" y="0"/>
+            <a:ext cx="9144000" cy="685800"/>
+          </a:xfrm>
+          <a:prstGeom prst="rect">
+            <a:avLst/>
+          </a:prstGeom>
+          <a:solidFill>
+            <a:srgbClr val="0A2342"/>
+          </a:solidFill>
+          <a:ln w="12700">
+            <a:solidFill>
+              <a:srgbClr val="0A2342"/>
+            </a:solidFill>
+            <a:prstDash val="solid"/>
+          </a:ln>
+        </p:spPr>
+        <p:txBody>
+          <a:bodyPr/>
+          <a:lstStyle/>
+          <a:p>
+            <a:endParaRPr lang="en-IN" dirty="0"/>
+          </a:p>
+        </p:txBody>
+      </p:sp>
+      <p:sp>
+        <p:nvSpPr>
+          <p:cNvPr id="3" name="Text 1">
+            <a:extLst>
+              <a:ext uri="{FF2B5EF4-FFF2-40B4-BE49-F238E27FC236}">
+                <a16:creationId xmlns:a16="http://schemas.microsoft.com/office/drawing/2014/main" id="{6BA56517-917E-682D-5749-3370191773A9}"/>
+              </a:ext>
+            </a:extLst>
+          </p:cNvPr>
+          <p:cNvSpPr/>
+          <p:nvPr/>
+        </p:nvSpPr>
+        <p:spPr>
+          <a:xfrm>
+            <a:off x="365760" y="0"/>
+            <a:ext cx="8229600" cy="685800"/>
+          </a:xfrm>
+          <a:prstGeom prst="rect">
+            <a:avLst/>
+          </a:prstGeom>
+          <a:noFill/>
+          <a:ln/>
+        </p:spPr>
+        <p:txBody>
+          <a:bodyPr wrap="square" lIns="0" tIns="0" rIns="0" bIns="0" rtlCol="0" anchor="ctr"/>
+          <a:lstStyle/>
+          <a:p>
+            <a:pPr marL="0" indent="0" algn="l">
+              <a:buNone/>
+            </a:pPr>
+            <a:r>
+              <a:rPr lang="en-US" sz="1300" b="1" kern="0" spc="300" dirty="0">
+                <a:solidFill>
+                  <a:srgbClr val="5EEAD4"/>
+                </a:solidFill>
+                <a:latin typeface="Calibri" pitchFamily="34" charset="0"/>
+                <a:ea typeface="Calibri" pitchFamily="34" charset="-122"/>
+                <a:cs typeface="Calibri" pitchFamily="34" charset="-120"/>
+              </a:rPr>
+              <a:t>OBJECTIVE &amp; DATASET</a:t>
+            </a:r>
+            <a:endParaRPr lang="en-US" sz="1300" dirty="0"/>
+          </a:p>
+        </p:txBody>
+      </p:sp>
+      <p:sp>
+        <p:nvSpPr>
+          <p:cNvPr id="4" name="Shape 2">
+            <a:extLst>
+              <a:ext uri="{FF2B5EF4-FFF2-40B4-BE49-F238E27FC236}">
+                <a16:creationId xmlns:a16="http://schemas.microsoft.com/office/drawing/2014/main" id="{DCAF0FF5-E0A2-D318-1326-C3F99C470B3C}"/>
+              </a:ext>
+            </a:extLst>
+          </p:cNvPr>
+          <p:cNvSpPr/>
+          <p:nvPr/>
+        </p:nvSpPr>
+        <p:spPr>
+          <a:xfrm>
+            <a:off x="320040" y="868680"/>
+            <a:ext cx="4206240" cy="3977640"/>
           </a:xfrm>
           <a:prstGeom prst="rect">
             <a:avLst/>
@@ -3130,7 +7128,253 @@
       </p:sp>
       <p:sp>
         <p:nvSpPr>
-          <p:cNvPr id="9" name="Shape 7"/>
+          <p:cNvPr id="5" name="Shape 3">
+            <a:extLst>
+              <a:ext uri="{FF2B5EF4-FFF2-40B4-BE49-F238E27FC236}">
+                <a16:creationId xmlns:a16="http://schemas.microsoft.com/office/drawing/2014/main" id="{40891E9C-281D-F4CB-9C5B-BB34D3BB9282}"/>
+              </a:ext>
+            </a:extLst>
+          </p:cNvPr>
+          <p:cNvSpPr/>
+          <p:nvPr/>
+        </p:nvSpPr>
+        <p:spPr>
+          <a:xfrm>
+            <a:off x="320040" y="868680"/>
+            <a:ext cx="164592" cy="3977640"/>
+          </a:xfrm>
+          <a:prstGeom prst="rect">
+            <a:avLst/>
+          </a:prstGeom>
+          <a:solidFill>
+            <a:srgbClr val="0D9488"/>
+          </a:solidFill>
+          <a:ln w="12700">
+            <a:solidFill>
+              <a:srgbClr val="0D9488"/>
+            </a:solidFill>
+            <a:prstDash val="solid"/>
+          </a:ln>
+        </p:spPr>
+        <p:txBody>
+          <a:bodyPr/>
+          <a:lstStyle/>
+          <a:p>
+            <a:endParaRPr lang="en-IN"/>
+          </a:p>
+        </p:txBody>
+      </p:sp>
+      <p:sp>
+        <p:nvSpPr>
+          <p:cNvPr id="6" name="Text 4">
+            <a:extLst>
+              <a:ext uri="{FF2B5EF4-FFF2-40B4-BE49-F238E27FC236}">
+                <a16:creationId xmlns:a16="http://schemas.microsoft.com/office/drawing/2014/main" id="{218AE8D0-1FAC-460F-751B-D7F7FEC6581A}"/>
+              </a:ext>
+            </a:extLst>
+          </p:cNvPr>
+          <p:cNvSpPr/>
+          <p:nvPr/>
+        </p:nvSpPr>
+        <p:spPr>
+          <a:xfrm>
+            <a:off x="594360" y="1005840"/>
+            <a:ext cx="3749040" cy="347472"/>
+          </a:xfrm>
+          <a:prstGeom prst="rect">
+            <a:avLst/>
+          </a:prstGeom>
+          <a:noFill/>
+          <a:ln/>
+        </p:spPr>
+        <p:txBody>
+          <a:bodyPr wrap="square" lIns="0" tIns="0" rIns="0" bIns="0" rtlCol="0" anchor="ctr"/>
+          <a:lstStyle/>
+          <a:p>
+            <a:pPr marL="0" indent="0">
+              <a:buNone/>
+            </a:pPr>
+            <a:r>
+              <a:rPr lang="en-US" sz="1600" b="1" dirty="0">
+                <a:solidFill>
+                  <a:srgbClr val="0A2342"/>
+                </a:solidFill>
+                <a:latin typeface="Calibri" pitchFamily="34" charset="0"/>
+                <a:ea typeface="Calibri" pitchFamily="34" charset="-122"/>
+                <a:cs typeface="Calibri" pitchFamily="34" charset="-120"/>
+              </a:rPr>
+              <a:t>Objective</a:t>
+            </a:r>
+            <a:endParaRPr lang="en-US" sz="1600" dirty="0"/>
+          </a:p>
+        </p:txBody>
+      </p:sp>
+      <p:sp>
+        <p:nvSpPr>
+          <p:cNvPr id="7" name="Text 5">
+            <a:extLst>
+              <a:ext uri="{FF2B5EF4-FFF2-40B4-BE49-F238E27FC236}">
+                <a16:creationId xmlns:a16="http://schemas.microsoft.com/office/drawing/2014/main" id="{B465378B-2055-C108-7A9E-4CC8518759B0}"/>
+              </a:ext>
+            </a:extLst>
+          </p:cNvPr>
+          <p:cNvSpPr/>
+          <p:nvPr/>
+        </p:nvSpPr>
+        <p:spPr>
+          <a:xfrm>
+            <a:off x="640080" y="1463040"/>
+            <a:ext cx="3749040" cy="3108960"/>
+          </a:xfrm>
+          <a:prstGeom prst="rect">
+            <a:avLst/>
+          </a:prstGeom>
+          <a:noFill/>
+          <a:ln/>
+        </p:spPr>
+        <p:txBody>
+          <a:bodyPr wrap="square" rtlCol="0" anchor="ctr"/>
+          <a:lstStyle/>
+          <a:p>
+            <a:pPr marL="342900" indent="-342900">
+              <a:spcAft>
+                <a:spcPts val="1000"/>
+              </a:spcAft>
+              <a:buSzPct val="100000"/>
+              <a:buChar char="•"/>
+            </a:pPr>
+            <a:r>
+              <a:rPr lang="en-US" sz="1200" dirty="0">
+                <a:solidFill>
+                  <a:srgbClr val="1E293B"/>
+                </a:solidFill>
+                <a:latin typeface="Calibri" pitchFamily="34" charset="0"/>
+                <a:ea typeface="Calibri" pitchFamily="34" charset="-122"/>
+                <a:cs typeface="Calibri" pitchFamily="34" charset="-120"/>
+              </a:rPr>
+              <a:t>Perform EDA on a global water consumption dataset</a:t>
+            </a:r>
+            <a:endParaRPr lang="en-US" sz="1200" dirty="0"/>
+          </a:p>
+          <a:p>
+            <a:pPr marL="342900" indent="-342900">
+              <a:spcAft>
+                <a:spcPts val="1000"/>
+              </a:spcAft>
+              <a:buSzPct val="100000"/>
+              <a:buChar char="•"/>
+            </a:pPr>
+            <a:r>
+              <a:rPr lang="en-US" sz="1200" dirty="0">
+                <a:solidFill>
+                  <a:srgbClr val="1E293B"/>
+                </a:solidFill>
+                <a:latin typeface="Calibri" pitchFamily="34" charset="0"/>
+                <a:ea typeface="Calibri" pitchFamily="34" charset="-122"/>
+                <a:cs typeface="Calibri" pitchFamily="34" charset="-120"/>
+              </a:rPr>
+              <a:t>Analyse water usage patterns across countries and years</a:t>
+            </a:r>
+            <a:endParaRPr lang="en-US" sz="1200" dirty="0"/>
+          </a:p>
+          <a:p>
+            <a:pPr marL="342900" indent="-342900">
+              <a:spcAft>
+                <a:spcPts val="1000"/>
+              </a:spcAft>
+              <a:buSzPct val="100000"/>
+              <a:buChar char="•"/>
+            </a:pPr>
+            <a:r>
+              <a:rPr lang="en-US" sz="1200" dirty="0">
+                <a:solidFill>
+                  <a:srgbClr val="1E293B"/>
+                </a:solidFill>
+                <a:latin typeface="Calibri" pitchFamily="34" charset="0"/>
+                <a:ea typeface="Calibri" pitchFamily="34" charset="-122"/>
+                <a:cs typeface="Calibri" pitchFamily="34" charset="-120"/>
+              </a:rPr>
+              <a:t>Identify relationships between environmental factors and water scarcity</a:t>
+            </a:r>
+            <a:endParaRPr lang="en-US" sz="1200" dirty="0"/>
+          </a:p>
+          <a:p>
+            <a:pPr marL="342900" indent="-342900">
+              <a:spcAft>
+                <a:spcPts val="1000"/>
+              </a:spcAft>
+              <a:buSzPct val="100000"/>
+              <a:buChar char="•"/>
+            </a:pPr>
+            <a:r>
+              <a:rPr lang="en-US" sz="1200" dirty="0">
+                <a:solidFill>
+                  <a:srgbClr val="1E293B"/>
+                </a:solidFill>
+                <a:latin typeface="Calibri" pitchFamily="34" charset="0"/>
+                <a:ea typeface="Calibri" pitchFamily="34" charset="-122"/>
+                <a:cs typeface="Calibri" pitchFamily="34" charset="-120"/>
+              </a:rPr>
+              <a:t>Generate insights supporting sustainable water management</a:t>
+            </a:r>
+            <a:endParaRPr lang="en-US" sz="1200" dirty="0"/>
+          </a:p>
+        </p:txBody>
+      </p:sp>
+      <p:sp>
+        <p:nvSpPr>
+          <p:cNvPr id="8" name="Shape 6">
+            <a:extLst>
+              <a:ext uri="{FF2B5EF4-FFF2-40B4-BE49-F238E27FC236}">
+                <a16:creationId xmlns:a16="http://schemas.microsoft.com/office/drawing/2014/main" id="{157F8D7C-8E01-1D63-19E2-441CA2227D98}"/>
+              </a:ext>
+            </a:extLst>
+          </p:cNvPr>
+          <p:cNvSpPr/>
+          <p:nvPr/>
+        </p:nvSpPr>
+        <p:spPr>
+          <a:xfrm>
+            <a:off x="4709160" y="868680"/>
+            <a:ext cx="4114800" cy="3977640"/>
+          </a:xfrm>
+          <a:prstGeom prst="rect">
+            <a:avLst/>
+          </a:prstGeom>
+          <a:solidFill>
+            <a:srgbClr val="FFFFFF"/>
+          </a:solidFill>
+          <a:ln w="12700">
+            <a:solidFill>
+              <a:srgbClr val="D1E9FF"/>
+            </a:solidFill>
+            <a:prstDash val="solid"/>
+          </a:ln>
+          <a:effectLst>
+            <a:outerShdw blurRad="101600" dist="38100" dir="8100000" algn="bl" rotWithShape="0">
+              <a:srgbClr val="000000">
+                <a:alpha val="10000"/>
+              </a:srgbClr>
+            </a:outerShdw>
+          </a:effectLst>
+        </p:spPr>
+        <p:txBody>
+          <a:bodyPr/>
+          <a:lstStyle/>
+          <a:p>
+            <a:endParaRPr lang="en-IN"/>
+          </a:p>
+        </p:txBody>
+      </p:sp>
+      <p:sp>
+        <p:nvSpPr>
+          <p:cNvPr id="9" name="Shape 7">
+            <a:extLst>
+              <a:ext uri="{FF2B5EF4-FFF2-40B4-BE49-F238E27FC236}">
+                <a16:creationId xmlns:a16="http://schemas.microsoft.com/office/drawing/2014/main" id="{493FA904-2D25-D5E1-452B-AC36B57DF2B4}"/>
+              </a:ext>
+            </a:extLst>
+          </p:cNvPr>
           <p:cNvSpPr/>
           <p:nvPr/>
         </p:nvSpPr>
@@ -3162,7 +7406,13 @@
       </p:sp>
       <p:sp>
         <p:nvSpPr>
-          <p:cNvPr id="10" name="Text 8"/>
+          <p:cNvPr id="10" name="Text 8">
+            <a:extLst>
+              <a:ext uri="{FF2B5EF4-FFF2-40B4-BE49-F238E27FC236}">
+                <a16:creationId xmlns:a16="http://schemas.microsoft.com/office/drawing/2014/main" id="{3460B2EE-3102-2988-3784-D0DC2834C808}"/>
+              </a:ext>
+            </a:extLst>
+          </p:cNvPr>
           <p:cNvSpPr/>
           <p:nvPr/>
         </p:nvSpPr>
@@ -3201,7 +7451,13 @@
       </p:sp>
       <p:sp>
         <p:nvSpPr>
-          <p:cNvPr id="11" name="Shape 9"/>
+          <p:cNvPr id="11" name="Shape 9">
+            <a:extLst>
+              <a:ext uri="{FF2B5EF4-FFF2-40B4-BE49-F238E27FC236}">
+                <a16:creationId xmlns:a16="http://schemas.microsoft.com/office/drawing/2014/main" id="{33E6B549-D197-ABE9-33D0-68C3F82CDED3}"/>
+              </a:ext>
+            </a:extLst>
+          </p:cNvPr>
           <p:cNvSpPr/>
           <p:nvPr/>
         </p:nvSpPr>
@@ -3233,7 +7489,13 @@
       </p:sp>
       <p:sp>
         <p:nvSpPr>
-          <p:cNvPr id="12" name="Text 10"/>
+          <p:cNvPr id="12" name="Text 10">
+            <a:extLst>
+              <a:ext uri="{FF2B5EF4-FFF2-40B4-BE49-F238E27FC236}">
+                <a16:creationId xmlns:a16="http://schemas.microsoft.com/office/drawing/2014/main" id="{F816013D-7017-1BAE-B802-4B50B904D2ED}"/>
+              </a:ext>
+            </a:extLst>
+          </p:cNvPr>
           <p:cNvSpPr/>
           <p:nvPr/>
         </p:nvSpPr>
@@ -3272,7 +7534,13 @@
       </p:sp>
       <p:sp>
         <p:nvSpPr>
-          <p:cNvPr id="13" name="Text 11"/>
+          <p:cNvPr id="13" name="Text 11">
+            <a:extLst>
+              <a:ext uri="{FF2B5EF4-FFF2-40B4-BE49-F238E27FC236}">
+                <a16:creationId xmlns:a16="http://schemas.microsoft.com/office/drawing/2014/main" id="{A1EBE6FB-2D16-F546-3761-6DDE1934D6D2}"/>
+              </a:ext>
+            </a:extLst>
+          </p:cNvPr>
           <p:cNvSpPr/>
           <p:nvPr/>
         </p:nvSpPr>
@@ -3311,7 +7579,13 @@
       </p:sp>
       <p:sp>
         <p:nvSpPr>
-          <p:cNvPr id="14" name="Shape 12"/>
+          <p:cNvPr id="14" name="Shape 12">
+            <a:extLst>
+              <a:ext uri="{FF2B5EF4-FFF2-40B4-BE49-F238E27FC236}">
+                <a16:creationId xmlns:a16="http://schemas.microsoft.com/office/drawing/2014/main" id="{A1AF2040-4218-3BD2-1C55-FD3CB64CD58E}"/>
+              </a:ext>
+            </a:extLst>
+          </p:cNvPr>
           <p:cNvSpPr/>
           <p:nvPr/>
         </p:nvSpPr>
@@ -3343,7 +7617,13 @@
       </p:sp>
       <p:sp>
         <p:nvSpPr>
-          <p:cNvPr id="15" name="Text 13"/>
+          <p:cNvPr id="15" name="Text 13">
+            <a:extLst>
+              <a:ext uri="{FF2B5EF4-FFF2-40B4-BE49-F238E27FC236}">
+                <a16:creationId xmlns:a16="http://schemas.microsoft.com/office/drawing/2014/main" id="{3075530E-36ED-1DF7-17B3-797B8FDBA04C}"/>
+              </a:ext>
+            </a:extLst>
+          </p:cNvPr>
           <p:cNvSpPr/>
           <p:nvPr/>
         </p:nvSpPr>
@@ -3382,7 +7662,13 @@
       </p:sp>
       <p:sp>
         <p:nvSpPr>
-          <p:cNvPr id="16" name="Text 14"/>
+          <p:cNvPr id="16" name="Text 14">
+            <a:extLst>
+              <a:ext uri="{FF2B5EF4-FFF2-40B4-BE49-F238E27FC236}">
+                <a16:creationId xmlns:a16="http://schemas.microsoft.com/office/drawing/2014/main" id="{D55292CC-4DF0-7BD4-748B-F5877B01311D}"/>
+              </a:ext>
+            </a:extLst>
+          </p:cNvPr>
           <p:cNvSpPr/>
           <p:nvPr/>
         </p:nvSpPr>
@@ -3421,7 +7707,13 @@
       </p:sp>
       <p:sp>
         <p:nvSpPr>
-          <p:cNvPr id="17" name="Shape 15"/>
+          <p:cNvPr id="17" name="Shape 15">
+            <a:extLst>
+              <a:ext uri="{FF2B5EF4-FFF2-40B4-BE49-F238E27FC236}">
+                <a16:creationId xmlns:a16="http://schemas.microsoft.com/office/drawing/2014/main" id="{4187B36D-3F33-086D-1DCF-41F7E556984C}"/>
+              </a:ext>
+            </a:extLst>
+          </p:cNvPr>
           <p:cNvSpPr/>
           <p:nvPr/>
         </p:nvSpPr>
@@ -3453,7 +7745,13 @@
       </p:sp>
       <p:sp>
         <p:nvSpPr>
-          <p:cNvPr id="18" name="Text 16"/>
+          <p:cNvPr id="18" name="Text 16">
+            <a:extLst>
+              <a:ext uri="{FF2B5EF4-FFF2-40B4-BE49-F238E27FC236}">
+                <a16:creationId xmlns:a16="http://schemas.microsoft.com/office/drawing/2014/main" id="{8D43EFD4-B415-54EA-9767-F931B71AF333}"/>
+              </a:ext>
+            </a:extLst>
+          </p:cNvPr>
           <p:cNvSpPr/>
           <p:nvPr/>
         </p:nvSpPr>
@@ -3492,7 +7790,13 @@
       </p:sp>
       <p:sp>
         <p:nvSpPr>
-          <p:cNvPr id="19" name="Text 17"/>
+          <p:cNvPr id="19" name="Text 17">
+            <a:extLst>
+              <a:ext uri="{FF2B5EF4-FFF2-40B4-BE49-F238E27FC236}">
+                <a16:creationId xmlns:a16="http://schemas.microsoft.com/office/drawing/2014/main" id="{3FB2EF6D-3408-AD76-4B74-F48EF9CFA8C8}"/>
+              </a:ext>
+            </a:extLst>
+          </p:cNvPr>
           <p:cNvSpPr/>
           <p:nvPr/>
         </p:nvSpPr>
@@ -3531,7 +7835,13 @@
       </p:sp>
       <p:sp>
         <p:nvSpPr>
-          <p:cNvPr id="20" name="Shape 18"/>
+          <p:cNvPr id="20" name="Shape 18">
+            <a:extLst>
+              <a:ext uri="{FF2B5EF4-FFF2-40B4-BE49-F238E27FC236}">
+                <a16:creationId xmlns:a16="http://schemas.microsoft.com/office/drawing/2014/main" id="{8178BB05-29D6-ECCB-A4D8-7B0454A9100E}"/>
+              </a:ext>
+            </a:extLst>
+          </p:cNvPr>
           <p:cNvSpPr/>
           <p:nvPr/>
         </p:nvSpPr>
@@ -3563,7 +7873,13 @@
       </p:sp>
       <p:sp>
         <p:nvSpPr>
-          <p:cNvPr id="21" name="Text 19"/>
+          <p:cNvPr id="21" name="Text 19">
+            <a:extLst>
+              <a:ext uri="{FF2B5EF4-FFF2-40B4-BE49-F238E27FC236}">
+                <a16:creationId xmlns:a16="http://schemas.microsoft.com/office/drawing/2014/main" id="{CF6CC5A6-D44C-9C89-72BE-F342AB464A76}"/>
+              </a:ext>
+            </a:extLst>
+          </p:cNvPr>
           <p:cNvSpPr/>
           <p:nvPr/>
         </p:nvSpPr>
@@ -3602,7 +7918,13 @@
       </p:sp>
       <p:sp>
         <p:nvSpPr>
-          <p:cNvPr id="22" name="Text 20"/>
+          <p:cNvPr id="22" name="Text 20">
+            <a:extLst>
+              <a:ext uri="{FF2B5EF4-FFF2-40B4-BE49-F238E27FC236}">
+                <a16:creationId xmlns:a16="http://schemas.microsoft.com/office/drawing/2014/main" id="{147B4CA7-C252-935F-EFB6-D1EEBF099C0B}"/>
+              </a:ext>
+            </a:extLst>
+          </p:cNvPr>
           <p:cNvSpPr/>
           <p:nvPr/>
         </p:nvSpPr>
@@ -3641,7 +7963,13 @@
       </p:sp>
       <p:sp>
         <p:nvSpPr>
-          <p:cNvPr id="23" name="Text 21"/>
+          <p:cNvPr id="23" name="Text 21">
+            <a:extLst>
+              <a:ext uri="{FF2B5EF4-FFF2-40B4-BE49-F238E27FC236}">
+                <a16:creationId xmlns:a16="http://schemas.microsoft.com/office/drawing/2014/main" id="{9E1CF3F4-CAFA-F24B-A7CF-B2FDC42622DD}"/>
+              </a:ext>
+            </a:extLst>
+          </p:cNvPr>
           <p:cNvSpPr/>
           <p:nvPr/>
         </p:nvSpPr>
@@ -3679,6 +8007,11 @@
         </p:txBody>
       </p:sp>
     </p:spTree>
+    <p:extLst>
+      <p:ext uri="{BB962C8B-B14F-4D97-AF65-F5344CB8AC3E}">
+        <p14:creationId xmlns:p14="http://schemas.microsoft.com/office/powerpoint/2010/main" val="1659316909"/>
+      </p:ext>
+    </p:extLst>
   </p:cSld>
   <p:clrMapOvr>
     <a:masterClrMapping/>
@@ -3686,7 +8019,7 @@
 </p:sld>
 </file>
 
-<file path=ppt/slides/slide3.xml><?xml version="1.0" encoding="utf-8"?>
+<file path=ppt/slides/slide5.xml><?xml version="1.0" encoding="utf-8"?>
 <p:sld xmlns:a="http://schemas.openxmlformats.org/drawingml/2006/main" xmlns:r="http://schemas.openxmlformats.org/officeDocument/2006/relationships" xmlns:p="http://schemas.openxmlformats.org/presentationml/2006/main">
   <p:cSld name="Slide 3">
     <p:bg>
@@ -4487,7 +8820,7 @@
 </p:sld>
 </file>
 
-<file path=ppt/slides/slide4.xml><?xml version="1.0" encoding="utf-8"?>
+<file path=ppt/slides/slide6.xml><?xml version="1.0" encoding="utf-8"?>
 <p:sld xmlns:a="http://schemas.openxmlformats.org/drawingml/2006/main" xmlns:r="http://schemas.openxmlformats.org/officeDocument/2006/relationships" xmlns:p="http://schemas.openxmlformats.org/presentationml/2006/main">
   <p:cSld name="Slide 4">
     <p:bg>
@@ -5665,7 +9998,7 @@
 </p:sld>
 </file>
 
-<file path=ppt/slides/slide5.xml><?xml version="1.0" encoding="utf-8"?>
+<file path=ppt/slides/slide7.xml><?xml version="1.0" encoding="utf-8"?>
 <p:sld xmlns:a="http://schemas.openxmlformats.org/drawingml/2006/main" xmlns:r="http://schemas.openxmlformats.org/officeDocument/2006/relationships" xmlns:p="http://schemas.openxmlformats.org/presentationml/2006/main">
   <p:cSld name="Slide 5">
     <p:bg>
@@ -6120,7 +10453,7 @@
 </p:sld>
 </file>
 
-<file path=ppt/slides/slide6.xml><?xml version="1.0" encoding="utf-8"?>
+<file path=ppt/slides/slide8.xml><?xml version="1.0" encoding="utf-8"?>
 <p:sld xmlns:a="http://schemas.openxmlformats.org/drawingml/2006/main" xmlns:r="http://schemas.openxmlformats.org/officeDocument/2006/relationships" xmlns:p="http://schemas.openxmlformats.org/presentationml/2006/main">
   <p:cSld name="Slide 6">
     <p:bg>
@@ -6575,7 +10908,7 @@
 </p:sld>
 </file>
 
-<file path=ppt/slides/slide7.xml><?xml version="1.0" encoding="utf-8"?>
+<file path=ppt/slides/slide9.xml><?xml version="1.0" encoding="utf-8"?>
 <p:sld xmlns:a="http://schemas.openxmlformats.org/drawingml/2006/main" xmlns:r="http://schemas.openxmlformats.org/officeDocument/2006/relationships" xmlns:p="http://schemas.openxmlformats.org/presentationml/2006/main">
   <p:cSld name="Slide 7">
     <p:bg>
@@ -7208,1718 +11541,6 @@
           <a:lstStyle/>
           <a:p>
             <a:endParaRPr lang="en-IN"/>
-          </a:p>
-        </p:txBody>
-      </p:sp>
-    </p:spTree>
-  </p:cSld>
-  <p:clrMapOvr>
-    <a:masterClrMapping/>
-  </p:clrMapOvr>
-</p:sld>
-</file>
-
-<file path=ppt/slides/slide8.xml><?xml version="1.0" encoding="utf-8"?>
-<p:sld xmlns:a="http://schemas.openxmlformats.org/drawingml/2006/main" xmlns:r="http://schemas.openxmlformats.org/officeDocument/2006/relationships" xmlns:p="http://schemas.openxmlformats.org/presentationml/2006/main">
-  <p:cSld name="Slide 8">
-    <p:bg>
-      <p:bgPr>
-        <a:solidFill>
-          <a:srgbClr val="E0F2FE"/>
-        </a:solidFill>
-        <a:effectLst/>
-      </p:bgPr>
-    </p:bg>
-    <p:spTree>
-      <p:nvGrpSpPr>
-        <p:cNvPr id="1" name=""/>
-        <p:cNvGrpSpPr/>
-        <p:nvPr/>
-      </p:nvGrpSpPr>
-      <p:grpSpPr>
-        <a:xfrm>
-          <a:off x="0" y="0"/>
-          <a:ext cx="0" cy="0"/>
-          <a:chOff x="0" y="0"/>
-          <a:chExt cx="0" cy="0"/>
-        </a:xfrm>
-      </p:grpSpPr>
-      <p:sp>
-        <p:nvSpPr>
-          <p:cNvPr id="2" name="Shape 0"/>
-          <p:cNvSpPr/>
-          <p:nvPr/>
-        </p:nvSpPr>
-        <p:spPr>
-          <a:xfrm>
-            <a:off x="0" y="0"/>
-            <a:ext cx="9144000" cy="685800"/>
-          </a:xfrm>
-          <a:prstGeom prst="rect">
-            <a:avLst/>
-          </a:prstGeom>
-          <a:solidFill>
-            <a:srgbClr val="0A2342"/>
-          </a:solidFill>
-          <a:ln w="12700">
-            <a:solidFill>
-              <a:srgbClr val="0A2342"/>
-            </a:solidFill>
-            <a:prstDash val="solid"/>
-          </a:ln>
-        </p:spPr>
-        <p:txBody>
-          <a:bodyPr/>
-          <a:lstStyle/>
-          <a:p>
-            <a:endParaRPr lang="en-IN"/>
-          </a:p>
-        </p:txBody>
-      </p:sp>
-      <p:sp>
-        <p:nvSpPr>
-          <p:cNvPr id="3" name="Text 1"/>
-          <p:cNvSpPr/>
-          <p:nvPr/>
-        </p:nvSpPr>
-        <p:spPr>
-          <a:xfrm>
-            <a:off x="365760" y="0"/>
-            <a:ext cx="8229600" cy="685800"/>
-          </a:xfrm>
-          <a:prstGeom prst="rect">
-            <a:avLst/>
-          </a:prstGeom>
-          <a:noFill/>
-          <a:ln/>
-        </p:spPr>
-        <p:txBody>
-          <a:bodyPr wrap="square" lIns="0" tIns="0" rIns="0" bIns="0" rtlCol="0" anchor="ctr"/>
-          <a:lstStyle/>
-          <a:p>
-            <a:pPr marL="0" indent="0" algn="l">
-              <a:buNone/>
-            </a:pPr>
-            <a:r>
-              <a:rPr lang="en-US" sz="1300" b="1" kern="0" spc="300" dirty="0">
-                <a:solidFill>
-                  <a:srgbClr val="5EEAD4"/>
-                </a:solidFill>
-                <a:latin typeface="Calibri" pitchFamily="34" charset="0"/>
-                <a:ea typeface="Calibri" pitchFamily="34" charset="-122"/>
-                <a:cs typeface="Calibri" pitchFamily="34" charset="-120"/>
-              </a:rPr>
-              <a:t>KEY INSIGHTS &amp; OBSERVATIONS</a:t>
-            </a:r>
-            <a:endParaRPr lang="en-US" sz="1300" dirty="0"/>
-          </a:p>
-        </p:txBody>
-      </p:sp>
-      <p:sp>
-        <p:nvSpPr>
-          <p:cNvPr id="4" name="Shape 2"/>
-          <p:cNvSpPr/>
-          <p:nvPr/>
-        </p:nvSpPr>
-        <p:spPr>
-          <a:xfrm>
-            <a:off x="320040" y="868680"/>
-            <a:ext cx="4160520" cy="1874520"/>
-          </a:xfrm>
-          <a:prstGeom prst="rect">
-            <a:avLst/>
-          </a:prstGeom>
-          <a:solidFill>
-            <a:srgbClr val="FFFFFF"/>
-          </a:solidFill>
-          <a:ln w="12700">
-            <a:solidFill>
-              <a:srgbClr val="D1E9FF"/>
-            </a:solidFill>
-            <a:prstDash val="solid"/>
-          </a:ln>
-          <a:effectLst>
-            <a:outerShdw blurRad="101600" dist="38100" dir="8100000" algn="bl" rotWithShape="0">
-              <a:srgbClr val="000000">
-                <a:alpha val="10000"/>
-              </a:srgbClr>
-            </a:outerShdw>
-          </a:effectLst>
-        </p:spPr>
-        <p:txBody>
-          <a:bodyPr/>
-          <a:lstStyle/>
-          <a:p>
-            <a:endParaRPr lang="en-IN"/>
-          </a:p>
-        </p:txBody>
-      </p:sp>
-      <p:sp>
-        <p:nvSpPr>
-          <p:cNvPr id="5" name="Shape 3"/>
-          <p:cNvSpPr/>
-          <p:nvPr/>
-        </p:nvSpPr>
-        <p:spPr>
-          <a:xfrm>
-            <a:off x="320040" y="868680"/>
-            <a:ext cx="4160520" cy="182880"/>
-          </a:xfrm>
-          <a:prstGeom prst="rect">
-            <a:avLst/>
-          </a:prstGeom>
-          <a:solidFill>
-            <a:srgbClr val="0D9488"/>
-          </a:solidFill>
-          <a:ln w="12700">
-            <a:solidFill>
-              <a:srgbClr val="0D9488"/>
-            </a:solidFill>
-            <a:prstDash val="solid"/>
-          </a:ln>
-        </p:spPr>
-        <p:txBody>
-          <a:bodyPr/>
-          <a:lstStyle/>
-          <a:p>
-            <a:endParaRPr lang="en-IN"/>
-          </a:p>
-        </p:txBody>
-      </p:sp>
-      <p:sp>
-        <p:nvSpPr>
-          <p:cNvPr id="6" name="Text 4"/>
-          <p:cNvSpPr/>
-          <p:nvPr/>
-        </p:nvSpPr>
-        <p:spPr>
-          <a:xfrm>
-            <a:off x="502920" y="1143000"/>
-            <a:ext cx="594360" cy="502920"/>
-          </a:xfrm>
-          <a:prstGeom prst="rect">
-            <a:avLst/>
-          </a:prstGeom>
-          <a:noFill/>
-          <a:ln/>
-        </p:spPr>
-        <p:txBody>
-          <a:bodyPr wrap="square" lIns="0" tIns="0" rIns="0" bIns="0" rtlCol="0" anchor="ctr"/>
-          <a:lstStyle/>
-          <a:p>
-            <a:pPr marL="0" indent="0" algn="ctr">
-              <a:buNone/>
-            </a:pPr>
-            <a:r>
-              <a:rPr lang="en-US" sz="2600" b="1" dirty="0">
-                <a:solidFill>
-                  <a:srgbClr val="0D9488"/>
-                </a:solidFill>
-                <a:latin typeface="Calibri" pitchFamily="34" charset="0"/>
-                <a:ea typeface="Calibri" pitchFamily="34" charset="-122"/>
-                <a:cs typeface="Calibri" pitchFamily="34" charset="-120"/>
-              </a:rPr>
-              <a:t>01</a:t>
-            </a:r>
-            <a:endParaRPr lang="en-US" sz="2600" dirty="0"/>
-          </a:p>
-        </p:txBody>
-      </p:sp>
-      <p:sp>
-        <p:nvSpPr>
-          <p:cNvPr id="7" name="Text 5"/>
-          <p:cNvSpPr/>
-          <p:nvPr/>
-        </p:nvSpPr>
-        <p:spPr>
-          <a:xfrm>
-            <a:off x="1143000" y="1161288"/>
-            <a:ext cx="3108960" cy="365760"/>
-          </a:xfrm>
-          <a:prstGeom prst="rect">
-            <a:avLst/>
-          </a:prstGeom>
-          <a:noFill/>
-          <a:ln/>
-        </p:spPr>
-        <p:txBody>
-          <a:bodyPr wrap="square" lIns="0" tIns="0" rIns="0" bIns="0" rtlCol="0" anchor="ctr"/>
-          <a:lstStyle/>
-          <a:p>
-            <a:pPr marL="0" indent="0">
-              <a:buNone/>
-            </a:pPr>
-            <a:r>
-              <a:rPr lang="en-US" sz="1400" b="1" dirty="0">
-                <a:solidFill>
-                  <a:srgbClr val="0A2342"/>
-                </a:solidFill>
-                <a:latin typeface="Calibri" pitchFamily="34" charset="0"/>
-                <a:ea typeface="Calibri" pitchFamily="34" charset="-122"/>
-                <a:cs typeface="Calibri" pitchFamily="34" charset="-120"/>
-              </a:rPr>
-              <a:t>Agriculture Dominates</a:t>
-            </a:r>
-            <a:endParaRPr lang="en-US" sz="1400" dirty="0"/>
-          </a:p>
-        </p:txBody>
-      </p:sp>
-      <p:sp>
-        <p:nvSpPr>
-          <p:cNvPr id="8" name="Text 6"/>
-          <p:cNvSpPr/>
-          <p:nvPr/>
-        </p:nvSpPr>
-        <p:spPr>
-          <a:xfrm>
-            <a:off x="502920" y="1673352"/>
-            <a:ext cx="3794760" cy="914400"/>
-          </a:xfrm>
-          <a:prstGeom prst="rect">
-            <a:avLst/>
-          </a:prstGeom>
-          <a:noFill/>
-          <a:ln/>
-        </p:spPr>
-        <p:txBody>
-          <a:bodyPr wrap="square" lIns="0" tIns="0" rIns="0" bIns="0" rtlCol="0" anchor="ctr"/>
-          <a:lstStyle/>
-          <a:p>
-            <a:pPr marL="0" indent="0">
-              <a:buNone/>
-            </a:pPr>
-            <a:r>
-              <a:rPr lang="en-US" sz="1150" dirty="0">
-                <a:solidFill>
-                  <a:srgbClr val="1E293B"/>
-                </a:solidFill>
-                <a:latin typeface="Calibri Light" pitchFamily="34" charset="0"/>
-                <a:ea typeface="Calibri Light" pitchFamily="34" charset="-122"/>
-                <a:cs typeface="Calibri Light" pitchFamily="34" charset="-120"/>
-              </a:rPr>
-              <a:t>Agriculture is the single largest contributor to total water consumption globally</a:t>
-            </a:r>
-            <a:endParaRPr lang="en-US" sz="1150" dirty="0"/>
-          </a:p>
-        </p:txBody>
-      </p:sp>
-      <p:sp>
-        <p:nvSpPr>
-          <p:cNvPr id="9" name="Shape 7"/>
-          <p:cNvSpPr/>
-          <p:nvPr/>
-        </p:nvSpPr>
-        <p:spPr>
-          <a:xfrm>
-            <a:off x="4727448" y="868680"/>
-            <a:ext cx="4160520" cy="1874520"/>
-          </a:xfrm>
-          <a:prstGeom prst="rect">
-            <a:avLst/>
-          </a:prstGeom>
-          <a:solidFill>
-            <a:srgbClr val="FFFFFF"/>
-          </a:solidFill>
-          <a:ln w="12700">
-            <a:solidFill>
-              <a:srgbClr val="D1E9FF"/>
-            </a:solidFill>
-            <a:prstDash val="solid"/>
-          </a:ln>
-          <a:effectLst>
-            <a:outerShdw blurRad="101600" dist="38100" dir="8100000" algn="bl" rotWithShape="0">
-              <a:srgbClr val="000000">
-                <a:alpha val="10000"/>
-              </a:srgbClr>
-            </a:outerShdw>
-          </a:effectLst>
-        </p:spPr>
-        <p:txBody>
-          <a:bodyPr/>
-          <a:lstStyle/>
-          <a:p>
-            <a:endParaRPr lang="en-IN"/>
-          </a:p>
-        </p:txBody>
-      </p:sp>
-      <p:sp>
-        <p:nvSpPr>
-          <p:cNvPr id="10" name="Shape 8"/>
-          <p:cNvSpPr/>
-          <p:nvPr/>
-        </p:nvSpPr>
-        <p:spPr>
-          <a:xfrm>
-            <a:off x="4727448" y="868680"/>
-            <a:ext cx="4160520" cy="182880"/>
-          </a:xfrm>
-          <a:prstGeom prst="rect">
-            <a:avLst/>
-          </a:prstGeom>
-          <a:solidFill>
-            <a:srgbClr val="0D5C8F"/>
-          </a:solidFill>
-          <a:ln w="12700">
-            <a:solidFill>
-              <a:srgbClr val="0D5C8F"/>
-            </a:solidFill>
-            <a:prstDash val="solid"/>
-          </a:ln>
-        </p:spPr>
-        <p:txBody>
-          <a:bodyPr/>
-          <a:lstStyle/>
-          <a:p>
-            <a:endParaRPr lang="en-IN"/>
-          </a:p>
-        </p:txBody>
-      </p:sp>
-      <p:sp>
-        <p:nvSpPr>
-          <p:cNvPr id="11" name="Text 9"/>
-          <p:cNvSpPr/>
-          <p:nvPr/>
-        </p:nvSpPr>
-        <p:spPr>
-          <a:xfrm>
-            <a:off x="4910328" y="1143000"/>
-            <a:ext cx="594360" cy="502920"/>
-          </a:xfrm>
-          <a:prstGeom prst="rect">
-            <a:avLst/>
-          </a:prstGeom>
-          <a:noFill/>
-          <a:ln/>
-        </p:spPr>
-        <p:txBody>
-          <a:bodyPr wrap="square" lIns="0" tIns="0" rIns="0" bIns="0" rtlCol="0" anchor="ctr"/>
-          <a:lstStyle/>
-          <a:p>
-            <a:pPr marL="0" indent="0" algn="ctr">
-              <a:buNone/>
-            </a:pPr>
-            <a:r>
-              <a:rPr lang="en-US" sz="2600" b="1" dirty="0">
-                <a:solidFill>
-                  <a:srgbClr val="0D5C8F"/>
-                </a:solidFill>
-                <a:latin typeface="Calibri" pitchFamily="34" charset="0"/>
-                <a:ea typeface="Calibri" pitchFamily="34" charset="-122"/>
-                <a:cs typeface="Calibri" pitchFamily="34" charset="-120"/>
-              </a:rPr>
-              <a:t>02</a:t>
-            </a:r>
-            <a:endParaRPr lang="en-US" sz="2600" dirty="0"/>
-          </a:p>
-        </p:txBody>
-      </p:sp>
-      <p:sp>
-        <p:nvSpPr>
-          <p:cNvPr id="12" name="Text 10"/>
-          <p:cNvSpPr/>
-          <p:nvPr/>
-        </p:nvSpPr>
-        <p:spPr>
-          <a:xfrm>
-            <a:off x="5550408" y="1161288"/>
-            <a:ext cx="3108960" cy="365760"/>
-          </a:xfrm>
-          <a:prstGeom prst="rect">
-            <a:avLst/>
-          </a:prstGeom>
-          <a:noFill/>
-          <a:ln/>
-        </p:spPr>
-        <p:txBody>
-          <a:bodyPr wrap="square" lIns="0" tIns="0" rIns="0" bIns="0" rtlCol="0" anchor="ctr"/>
-          <a:lstStyle/>
-          <a:p>
-            <a:pPr marL="0" indent="0">
-              <a:buNone/>
-            </a:pPr>
-            <a:r>
-              <a:rPr lang="en-US" sz="1400" b="1" dirty="0">
-                <a:solidFill>
-                  <a:srgbClr val="0A2342"/>
-                </a:solidFill>
-                <a:latin typeface="Calibri" pitchFamily="34" charset="0"/>
-                <a:ea typeface="Calibri" pitchFamily="34" charset="-122"/>
-                <a:cs typeface="Calibri" pitchFamily="34" charset="-120"/>
-              </a:rPr>
-              <a:t>Multi-Factor Scarcity</a:t>
-            </a:r>
-            <a:endParaRPr lang="en-US" sz="1400" dirty="0"/>
-          </a:p>
-        </p:txBody>
-      </p:sp>
-      <p:sp>
-        <p:nvSpPr>
-          <p:cNvPr id="13" name="Text 11"/>
-          <p:cNvSpPr/>
-          <p:nvPr/>
-        </p:nvSpPr>
-        <p:spPr>
-          <a:xfrm>
-            <a:off x="4910328" y="1673352"/>
-            <a:ext cx="3794760" cy="914400"/>
-          </a:xfrm>
-          <a:prstGeom prst="rect">
-            <a:avLst/>
-          </a:prstGeom>
-          <a:noFill/>
-          <a:ln/>
-        </p:spPr>
-        <p:txBody>
-          <a:bodyPr wrap="square" lIns="0" tIns="0" rIns="0" bIns="0" rtlCol="0" anchor="ctr"/>
-          <a:lstStyle/>
-          <a:p>
-            <a:pPr marL="0" indent="0">
-              <a:buNone/>
-            </a:pPr>
-            <a:r>
-              <a:rPr lang="en-US" sz="1150" dirty="0">
-                <a:solidFill>
-                  <a:srgbClr val="1E293B"/>
-                </a:solidFill>
-                <a:latin typeface="Calibri Light" pitchFamily="34" charset="0"/>
-                <a:ea typeface="Calibri Light" pitchFamily="34" charset="-122"/>
-                <a:cs typeface="Calibri Light" pitchFamily="34" charset="-120"/>
-              </a:rPr>
-              <a:t>Water scarcity is driven by multiple environmental factors acting together</a:t>
-            </a:r>
-            <a:endParaRPr lang="en-US" sz="1150" dirty="0"/>
-          </a:p>
-        </p:txBody>
-      </p:sp>
-      <p:sp>
-        <p:nvSpPr>
-          <p:cNvPr id="14" name="Shape 12"/>
-          <p:cNvSpPr/>
-          <p:nvPr/>
-        </p:nvSpPr>
-        <p:spPr>
-          <a:xfrm>
-            <a:off x="320040" y="2971800"/>
-            <a:ext cx="4160520" cy="1874520"/>
-          </a:xfrm>
-          <a:prstGeom prst="rect">
-            <a:avLst/>
-          </a:prstGeom>
-          <a:solidFill>
-            <a:srgbClr val="FFFFFF"/>
-          </a:solidFill>
-          <a:ln w="12700">
-            <a:solidFill>
-              <a:srgbClr val="D1E9FF"/>
-            </a:solidFill>
-            <a:prstDash val="solid"/>
-          </a:ln>
-          <a:effectLst>
-            <a:outerShdw blurRad="101600" dist="38100" dir="8100000" algn="bl" rotWithShape="0">
-              <a:srgbClr val="000000">
-                <a:alpha val="10000"/>
-              </a:srgbClr>
-            </a:outerShdw>
-          </a:effectLst>
-        </p:spPr>
-        <p:txBody>
-          <a:bodyPr/>
-          <a:lstStyle/>
-          <a:p>
-            <a:endParaRPr lang="en-IN"/>
-          </a:p>
-        </p:txBody>
-      </p:sp>
-      <p:sp>
-        <p:nvSpPr>
-          <p:cNvPr id="15" name="Shape 13"/>
-          <p:cNvSpPr/>
-          <p:nvPr/>
-        </p:nvSpPr>
-        <p:spPr>
-          <a:xfrm>
-            <a:off x="320040" y="2971800"/>
-            <a:ext cx="4160520" cy="182880"/>
-          </a:xfrm>
-          <a:prstGeom prst="rect">
-            <a:avLst/>
-          </a:prstGeom>
-          <a:solidFill>
-            <a:srgbClr val="0891B2"/>
-          </a:solidFill>
-          <a:ln w="12700">
-            <a:solidFill>
-              <a:srgbClr val="0891B2"/>
-            </a:solidFill>
-            <a:prstDash val="solid"/>
-          </a:ln>
-        </p:spPr>
-        <p:txBody>
-          <a:bodyPr/>
-          <a:lstStyle/>
-          <a:p>
-            <a:endParaRPr lang="en-IN"/>
-          </a:p>
-        </p:txBody>
-      </p:sp>
-      <p:sp>
-        <p:nvSpPr>
-          <p:cNvPr id="16" name="Text 14"/>
-          <p:cNvSpPr/>
-          <p:nvPr/>
-        </p:nvSpPr>
-        <p:spPr>
-          <a:xfrm>
-            <a:off x="502920" y="3246120"/>
-            <a:ext cx="594360" cy="502920"/>
-          </a:xfrm>
-          <a:prstGeom prst="rect">
-            <a:avLst/>
-          </a:prstGeom>
-          <a:noFill/>
-          <a:ln/>
-        </p:spPr>
-        <p:txBody>
-          <a:bodyPr wrap="square" lIns="0" tIns="0" rIns="0" bIns="0" rtlCol="0" anchor="ctr"/>
-          <a:lstStyle/>
-          <a:p>
-            <a:pPr marL="0" indent="0" algn="ctr">
-              <a:buNone/>
-            </a:pPr>
-            <a:r>
-              <a:rPr lang="en-US" sz="2600" b="1" dirty="0">
-                <a:solidFill>
-                  <a:srgbClr val="0891B2"/>
-                </a:solidFill>
-                <a:latin typeface="Calibri" pitchFamily="34" charset="0"/>
-                <a:ea typeface="Calibri" pitchFamily="34" charset="-122"/>
-                <a:cs typeface="Calibri" pitchFamily="34" charset="-120"/>
-              </a:rPr>
-              <a:t>03</a:t>
-            </a:r>
-            <a:endParaRPr lang="en-US" sz="2600" dirty="0"/>
-          </a:p>
-        </p:txBody>
-      </p:sp>
-      <p:sp>
-        <p:nvSpPr>
-          <p:cNvPr id="17" name="Text 15"/>
-          <p:cNvSpPr/>
-          <p:nvPr/>
-        </p:nvSpPr>
-        <p:spPr>
-          <a:xfrm>
-            <a:off x="1143000" y="3264408"/>
-            <a:ext cx="3108960" cy="365760"/>
-          </a:xfrm>
-          <a:prstGeom prst="rect">
-            <a:avLst/>
-          </a:prstGeom>
-          <a:noFill/>
-          <a:ln/>
-        </p:spPr>
-        <p:txBody>
-          <a:bodyPr wrap="square" lIns="0" tIns="0" rIns="0" bIns="0" rtlCol="0" anchor="ctr"/>
-          <a:lstStyle/>
-          <a:p>
-            <a:pPr marL="0" indent="0">
-              <a:buNone/>
-            </a:pPr>
-            <a:r>
-              <a:rPr lang="en-US" sz="1400" b="1" dirty="0">
-                <a:solidFill>
-                  <a:srgbClr val="0A2342"/>
-                </a:solidFill>
-                <a:latin typeface="Calibri" pitchFamily="34" charset="0"/>
-                <a:ea typeface="Calibri" pitchFamily="34" charset="-122"/>
-                <a:cs typeface="Calibri" pitchFamily="34" charset="-120"/>
-              </a:rPr>
-              <a:t>Groundwater Stress</a:t>
-            </a:r>
-            <a:endParaRPr lang="en-US" sz="1400" dirty="0"/>
-          </a:p>
-        </p:txBody>
-      </p:sp>
-      <p:sp>
-        <p:nvSpPr>
-          <p:cNvPr id="18" name="Text 16"/>
-          <p:cNvSpPr/>
-          <p:nvPr/>
-        </p:nvSpPr>
-        <p:spPr>
-          <a:xfrm>
-            <a:off x="502920" y="3776472"/>
-            <a:ext cx="3794760" cy="914400"/>
-          </a:xfrm>
-          <a:prstGeom prst="rect">
-            <a:avLst/>
-          </a:prstGeom>
-          <a:noFill/>
-          <a:ln/>
-        </p:spPr>
-        <p:txBody>
-          <a:bodyPr wrap="square" lIns="0" tIns="0" rIns="0" bIns="0" rtlCol="0" anchor="ctr"/>
-          <a:lstStyle/>
-          <a:p>
-            <a:pPr marL="0" indent="0">
-              <a:buNone/>
-            </a:pPr>
-            <a:r>
-              <a:rPr lang="en-US" sz="1150" dirty="0">
-                <a:solidFill>
-                  <a:srgbClr val="1E293B"/>
-                </a:solidFill>
-                <a:latin typeface="Calibri Light" pitchFamily="34" charset="0"/>
-                <a:ea typeface="Calibri Light" pitchFamily="34" charset="-122"/>
-                <a:cs typeface="Calibri Light" pitchFamily="34" charset="-120"/>
-              </a:rPr>
-              <a:t>Groundwater depletion is a critical sustainability concern for future water security</a:t>
-            </a:r>
-            <a:endParaRPr lang="en-US" sz="1150" dirty="0"/>
-          </a:p>
-        </p:txBody>
-      </p:sp>
-      <p:sp>
-        <p:nvSpPr>
-          <p:cNvPr id="19" name="Shape 17"/>
-          <p:cNvSpPr/>
-          <p:nvPr/>
-        </p:nvSpPr>
-        <p:spPr>
-          <a:xfrm>
-            <a:off x="4727448" y="2971800"/>
-            <a:ext cx="4160520" cy="1874520"/>
-          </a:xfrm>
-          <a:prstGeom prst="rect">
-            <a:avLst/>
-          </a:prstGeom>
-          <a:solidFill>
-            <a:srgbClr val="FFFFFF"/>
-          </a:solidFill>
-          <a:ln w="12700">
-            <a:solidFill>
-              <a:srgbClr val="D1E9FF"/>
-            </a:solidFill>
-            <a:prstDash val="solid"/>
-          </a:ln>
-          <a:effectLst>
-            <a:outerShdw blurRad="101600" dist="38100" dir="8100000" algn="bl" rotWithShape="0">
-              <a:srgbClr val="000000">
-                <a:alpha val="10000"/>
-              </a:srgbClr>
-            </a:outerShdw>
-          </a:effectLst>
-        </p:spPr>
-        <p:txBody>
-          <a:bodyPr/>
-          <a:lstStyle/>
-          <a:p>
-            <a:endParaRPr lang="en-IN"/>
-          </a:p>
-        </p:txBody>
-      </p:sp>
-      <p:sp>
-        <p:nvSpPr>
-          <p:cNvPr id="20" name="Shape 18"/>
-          <p:cNvSpPr/>
-          <p:nvPr/>
-        </p:nvSpPr>
-        <p:spPr>
-          <a:xfrm>
-            <a:off x="4727448" y="2971800"/>
-            <a:ext cx="4160520" cy="182880"/>
-          </a:xfrm>
-          <a:prstGeom prst="rect">
-            <a:avLst/>
-          </a:prstGeom>
-          <a:solidFill>
-            <a:srgbClr val="0E7490"/>
-          </a:solidFill>
-          <a:ln w="12700">
-            <a:solidFill>
-              <a:srgbClr val="0E7490"/>
-            </a:solidFill>
-            <a:prstDash val="solid"/>
-          </a:ln>
-        </p:spPr>
-        <p:txBody>
-          <a:bodyPr/>
-          <a:lstStyle/>
-          <a:p>
-            <a:endParaRPr lang="en-IN"/>
-          </a:p>
-        </p:txBody>
-      </p:sp>
-      <p:sp>
-        <p:nvSpPr>
-          <p:cNvPr id="21" name="Text 19"/>
-          <p:cNvSpPr/>
-          <p:nvPr/>
-        </p:nvSpPr>
-        <p:spPr>
-          <a:xfrm>
-            <a:off x="4910328" y="3246120"/>
-            <a:ext cx="594360" cy="502920"/>
-          </a:xfrm>
-          <a:prstGeom prst="rect">
-            <a:avLst/>
-          </a:prstGeom>
-          <a:noFill/>
-          <a:ln/>
-        </p:spPr>
-        <p:txBody>
-          <a:bodyPr wrap="square" lIns="0" tIns="0" rIns="0" bIns="0" rtlCol="0" anchor="ctr"/>
-          <a:lstStyle/>
-          <a:p>
-            <a:pPr marL="0" indent="0" algn="ctr">
-              <a:buNone/>
-            </a:pPr>
-            <a:r>
-              <a:rPr lang="en-US" sz="2600" b="1" dirty="0">
-                <a:solidFill>
-                  <a:srgbClr val="0E7490"/>
-                </a:solidFill>
-                <a:latin typeface="Calibri" pitchFamily="34" charset="0"/>
-                <a:ea typeface="Calibri" pitchFamily="34" charset="-122"/>
-                <a:cs typeface="Calibri" pitchFamily="34" charset="-120"/>
-              </a:rPr>
-              <a:t>04</a:t>
-            </a:r>
-            <a:endParaRPr lang="en-US" sz="2600" dirty="0"/>
-          </a:p>
-        </p:txBody>
-      </p:sp>
-      <p:sp>
-        <p:nvSpPr>
-          <p:cNvPr id="22" name="Text 20"/>
-          <p:cNvSpPr/>
-          <p:nvPr/>
-        </p:nvSpPr>
-        <p:spPr>
-          <a:xfrm>
-            <a:off x="5550408" y="3264408"/>
-            <a:ext cx="3108960" cy="365760"/>
-          </a:xfrm>
-          <a:prstGeom prst="rect">
-            <a:avLst/>
-          </a:prstGeom>
-          <a:noFill/>
-          <a:ln/>
-        </p:spPr>
-        <p:txBody>
-          <a:bodyPr wrap="square" lIns="0" tIns="0" rIns="0" bIns="0" rtlCol="0" anchor="ctr"/>
-          <a:lstStyle/>
-          <a:p>
-            <a:pPr marL="0" indent="0">
-              <a:buNone/>
-            </a:pPr>
-            <a:r>
-              <a:rPr lang="en-US" sz="1400" b="1" dirty="0">
-                <a:solidFill>
-                  <a:srgbClr val="0A2342"/>
-                </a:solidFill>
-                <a:latin typeface="Calibri" pitchFamily="34" charset="0"/>
-                <a:ea typeface="Calibri" pitchFamily="34" charset="-122"/>
-                <a:cs typeface="Calibri" pitchFamily="34" charset="-120"/>
-              </a:rPr>
-              <a:t>Regional Variation</a:t>
-            </a:r>
-            <a:endParaRPr lang="en-US" sz="1400" dirty="0"/>
-          </a:p>
-        </p:txBody>
-      </p:sp>
-      <p:sp>
-        <p:nvSpPr>
-          <p:cNvPr id="23" name="Text 21"/>
-          <p:cNvSpPr/>
-          <p:nvPr/>
-        </p:nvSpPr>
-        <p:spPr>
-          <a:xfrm>
-            <a:off x="4910328" y="3776472"/>
-            <a:ext cx="3794760" cy="914400"/>
-          </a:xfrm>
-          <a:prstGeom prst="rect">
-            <a:avLst/>
-          </a:prstGeom>
-          <a:noFill/>
-          <a:ln/>
-        </p:spPr>
-        <p:txBody>
-          <a:bodyPr wrap="square" lIns="0" tIns="0" rIns="0" bIns="0" rtlCol="0" anchor="ctr"/>
-          <a:lstStyle/>
-          <a:p>
-            <a:pPr marL="0" indent="0">
-              <a:buNone/>
-            </a:pPr>
-            <a:r>
-              <a:rPr lang="en-US" sz="1150" dirty="0">
-                <a:solidFill>
-                  <a:srgbClr val="1E293B"/>
-                </a:solidFill>
-                <a:latin typeface="Calibri Light" pitchFamily="34" charset="0"/>
-                <a:ea typeface="Calibri Light" pitchFamily="34" charset="-122"/>
-                <a:cs typeface="Calibri Light" pitchFamily="34" charset="-120"/>
-              </a:rPr>
-              <a:t>Significant differences in consumption and scarcity exist across regions worldwide</a:t>
-            </a:r>
-            <a:endParaRPr lang="en-US" sz="1150" dirty="0"/>
-          </a:p>
-        </p:txBody>
-      </p:sp>
-    </p:spTree>
-  </p:cSld>
-  <p:clrMapOvr>
-    <a:masterClrMapping/>
-  </p:clrMapOvr>
-</p:sld>
-</file>
-
-<file path=ppt/slides/slide9.xml><?xml version="1.0" encoding="utf-8"?>
-<p:sld xmlns:a="http://schemas.openxmlformats.org/drawingml/2006/main" xmlns:r="http://schemas.openxmlformats.org/officeDocument/2006/relationships" xmlns:p="http://schemas.openxmlformats.org/presentationml/2006/main">
-  <p:cSld name="Slide 9">
-    <p:bg>
-      <p:bgPr>
-        <a:solidFill>
-          <a:srgbClr val="E0F2FE"/>
-        </a:solidFill>
-        <a:effectLst/>
-      </p:bgPr>
-    </p:bg>
-    <p:spTree>
-      <p:nvGrpSpPr>
-        <p:cNvPr id="1" name=""/>
-        <p:cNvGrpSpPr/>
-        <p:nvPr/>
-      </p:nvGrpSpPr>
-      <p:grpSpPr>
-        <a:xfrm>
-          <a:off x="0" y="0"/>
-          <a:ext cx="0" cy="0"/>
-          <a:chOff x="0" y="0"/>
-          <a:chExt cx="0" cy="0"/>
-        </a:xfrm>
-      </p:grpSpPr>
-      <p:sp>
-        <p:nvSpPr>
-          <p:cNvPr id="2" name="Shape 0"/>
-          <p:cNvSpPr/>
-          <p:nvPr/>
-        </p:nvSpPr>
-        <p:spPr>
-          <a:xfrm>
-            <a:off x="0" y="0"/>
-            <a:ext cx="9144000" cy="685800"/>
-          </a:xfrm>
-          <a:prstGeom prst="rect">
-            <a:avLst/>
-          </a:prstGeom>
-          <a:solidFill>
-            <a:srgbClr val="0A2342"/>
-          </a:solidFill>
-          <a:ln w="12700">
-            <a:solidFill>
-              <a:srgbClr val="0A2342"/>
-            </a:solidFill>
-            <a:prstDash val="solid"/>
-          </a:ln>
-        </p:spPr>
-        <p:txBody>
-          <a:bodyPr/>
-          <a:lstStyle/>
-          <a:p>
-            <a:endParaRPr lang="en-IN"/>
-          </a:p>
-        </p:txBody>
-      </p:sp>
-      <p:sp>
-        <p:nvSpPr>
-          <p:cNvPr id="3" name="Text 1"/>
-          <p:cNvSpPr/>
-          <p:nvPr/>
-        </p:nvSpPr>
-        <p:spPr>
-          <a:xfrm>
-            <a:off x="365760" y="0"/>
-            <a:ext cx="8229600" cy="685800"/>
-          </a:xfrm>
-          <a:prstGeom prst="rect">
-            <a:avLst/>
-          </a:prstGeom>
-          <a:noFill/>
-          <a:ln/>
-        </p:spPr>
-        <p:txBody>
-          <a:bodyPr wrap="square" lIns="0" tIns="0" rIns="0" bIns="0" rtlCol="0" anchor="ctr"/>
-          <a:lstStyle/>
-          <a:p>
-            <a:pPr marL="0" indent="0" algn="l">
-              <a:buNone/>
-            </a:pPr>
-            <a:r>
-              <a:rPr lang="en-US" sz="1300" b="1" kern="0" spc="300" dirty="0">
-                <a:solidFill>
-                  <a:srgbClr val="5EEAD4"/>
-                </a:solidFill>
-                <a:latin typeface="Calibri" pitchFamily="34" charset="0"/>
-                <a:ea typeface="Calibri" pitchFamily="34" charset="-122"/>
-                <a:cs typeface="Calibri" pitchFamily="34" charset="-120"/>
-              </a:rPr>
-              <a:t>FUTURE WORK</a:t>
-            </a:r>
-            <a:endParaRPr lang="en-US" sz="1300" dirty="0"/>
-          </a:p>
-        </p:txBody>
-      </p:sp>
-      <p:sp>
-        <p:nvSpPr>
-          <p:cNvPr id="4" name="Shape 2"/>
-          <p:cNvSpPr/>
-          <p:nvPr/>
-        </p:nvSpPr>
-        <p:spPr>
-          <a:xfrm>
-            <a:off x="320040" y="868680"/>
-            <a:ext cx="4160520" cy="1874520"/>
-          </a:xfrm>
-          <a:prstGeom prst="rect">
-            <a:avLst/>
-          </a:prstGeom>
-          <a:solidFill>
-            <a:srgbClr val="FFFFFF"/>
-          </a:solidFill>
-          <a:ln w="12700">
-            <a:solidFill>
-              <a:srgbClr val="D1E9FF"/>
-            </a:solidFill>
-            <a:prstDash val="solid"/>
-          </a:ln>
-          <a:effectLst>
-            <a:outerShdw blurRad="101600" dist="38100" dir="8100000" algn="bl" rotWithShape="0">
-              <a:srgbClr val="000000">
-                <a:alpha val="10000"/>
-              </a:srgbClr>
-            </a:outerShdw>
-          </a:effectLst>
-        </p:spPr>
-        <p:txBody>
-          <a:bodyPr/>
-          <a:lstStyle/>
-          <a:p>
-            <a:endParaRPr lang="en-IN"/>
-          </a:p>
-        </p:txBody>
-      </p:sp>
-      <p:sp>
-        <p:nvSpPr>
-          <p:cNvPr id="5" name="Shape 3"/>
-          <p:cNvSpPr/>
-          <p:nvPr/>
-        </p:nvSpPr>
-        <p:spPr>
-          <a:xfrm>
-            <a:off x="502920" y="1051560"/>
-            <a:ext cx="566928" cy="566928"/>
-          </a:xfrm>
-          <a:prstGeom prst="ellipse">
-            <a:avLst/>
-          </a:prstGeom>
-          <a:solidFill>
-            <a:srgbClr val="0D9488"/>
-          </a:solidFill>
-          <a:ln w="12700">
-            <a:solidFill>
-              <a:srgbClr val="0D9488"/>
-            </a:solidFill>
-            <a:prstDash val="solid"/>
-          </a:ln>
-        </p:spPr>
-        <p:txBody>
-          <a:bodyPr/>
-          <a:lstStyle/>
-          <a:p>
-            <a:endParaRPr lang="en-IN"/>
-          </a:p>
-        </p:txBody>
-      </p:sp>
-      <p:sp>
-        <p:nvSpPr>
-          <p:cNvPr id="6" name="Text 4"/>
-          <p:cNvSpPr/>
-          <p:nvPr/>
-        </p:nvSpPr>
-        <p:spPr>
-          <a:xfrm>
-            <a:off x="502920" y="1051560"/>
-            <a:ext cx="566928" cy="566928"/>
-          </a:xfrm>
-          <a:prstGeom prst="rect">
-            <a:avLst/>
-          </a:prstGeom>
-          <a:noFill/>
-          <a:ln/>
-        </p:spPr>
-        <p:txBody>
-          <a:bodyPr wrap="square" lIns="0" tIns="0" rIns="0" bIns="0" rtlCol="0" anchor="ctr"/>
-          <a:lstStyle/>
-          <a:p>
-            <a:pPr marL="0" indent="0" algn="ctr">
-              <a:buNone/>
-            </a:pPr>
-            <a:r>
-              <a:rPr lang="en-US" sz="1600" b="1" dirty="0">
-                <a:solidFill>
-                  <a:srgbClr val="FFFFFF"/>
-                </a:solidFill>
-                <a:latin typeface="Calibri" pitchFamily="34" charset="0"/>
-                <a:ea typeface="Calibri" pitchFamily="34" charset="-122"/>
-                <a:cs typeface="Calibri" pitchFamily="34" charset="-120"/>
-              </a:rPr>
-              <a:t>1</a:t>
-            </a:r>
-            <a:endParaRPr lang="en-US" sz="1600" dirty="0"/>
-          </a:p>
-        </p:txBody>
-      </p:sp>
-      <p:sp>
-        <p:nvSpPr>
-          <p:cNvPr id="7" name="Text 5"/>
-          <p:cNvSpPr/>
-          <p:nvPr/>
-        </p:nvSpPr>
-        <p:spPr>
-          <a:xfrm>
-            <a:off x="1207008" y="1088136"/>
-            <a:ext cx="3090672" cy="384048"/>
-          </a:xfrm>
-          <a:prstGeom prst="rect">
-            <a:avLst/>
-          </a:prstGeom>
-          <a:noFill/>
-          <a:ln/>
-        </p:spPr>
-        <p:txBody>
-          <a:bodyPr wrap="square" lIns="0" tIns="0" rIns="0" bIns="0" rtlCol="0" anchor="ctr"/>
-          <a:lstStyle/>
-          <a:p>
-            <a:pPr marL="0" indent="0">
-              <a:buNone/>
-            </a:pPr>
-            <a:r>
-              <a:rPr lang="en-US" sz="1400" b="1" dirty="0">
-                <a:solidFill>
-                  <a:srgbClr val="0A2342"/>
-                </a:solidFill>
-                <a:latin typeface="Calibri" pitchFamily="34" charset="0"/>
-                <a:ea typeface="Calibri" pitchFamily="34" charset="-122"/>
-                <a:cs typeface="Calibri" pitchFamily="34" charset="-120"/>
-              </a:rPr>
-              <a:t>ML Forecasting</a:t>
-            </a:r>
-            <a:endParaRPr lang="en-US" sz="1400" dirty="0"/>
-          </a:p>
-        </p:txBody>
-      </p:sp>
-      <p:sp>
-        <p:nvSpPr>
-          <p:cNvPr id="8" name="Text 6"/>
-          <p:cNvSpPr/>
-          <p:nvPr/>
-        </p:nvSpPr>
-        <p:spPr>
-          <a:xfrm>
-            <a:off x="502920" y="1709928"/>
-            <a:ext cx="3794760" cy="914400"/>
-          </a:xfrm>
-          <a:prstGeom prst="rect">
-            <a:avLst/>
-          </a:prstGeom>
-          <a:noFill/>
-          <a:ln/>
-        </p:spPr>
-        <p:txBody>
-          <a:bodyPr wrap="square" lIns="0" tIns="0" rIns="0" bIns="0" rtlCol="0" anchor="ctr"/>
-          <a:lstStyle/>
-          <a:p>
-            <a:pPr marL="0" indent="0">
-              <a:buNone/>
-            </a:pPr>
-            <a:r>
-              <a:rPr lang="en-US" sz="1150" dirty="0">
-                <a:solidFill>
-                  <a:srgbClr val="1E293B"/>
-                </a:solidFill>
-                <a:latin typeface="Calibri Light" pitchFamily="34" charset="0"/>
-                <a:ea typeface="Calibri Light" pitchFamily="34" charset="-122"/>
-                <a:cs typeface="Calibri Light" pitchFamily="34" charset="-120"/>
-              </a:rPr>
-              <a:t>Predict future water consumption using regression and time-series ML models</a:t>
-            </a:r>
-            <a:endParaRPr lang="en-US" sz="1150" dirty="0"/>
-          </a:p>
-        </p:txBody>
-      </p:sp>
-      <p:sp>
-        <p:nvSpPr>
-          <p:cNvPr id="9" name="Shape 7"/>
-          <p:cNvSpPr/>
-          <p:nvPr/>
-        </p:nvSpPr>
-        <p:spPr>
-          <a:xfrm>
-            <a:off x="4727448" y="868680"/>
-            <a:ext cx="4160520" cy="1874520"/>
-          </a:xfrm>
-          <a:prstGeom prst="rect">
-            <a:avLst/>
-          </a:prstGeom>
-          <a:solidFill>
-            <a:srgbClr val="FFFFFF"/>
-          </a:solidFill>
-          <a:ln w="12700">
-            <a:solidFill>
-              <a:srgbClr val="D1E9FF"/>
-            </a:solidFill>
-            <a:prstDash val="solid"/>
-          </a:ln>
-          <a:effectLst>
-            <a:outerShdw blurRad="101600" dist="38100" dir="8100000" algn="bl" rotWithShape="0">
-              <a:srgbClr val="000000">
-                <a:alpha val="10000"/>
-              </a:srgbClr>
-            </a:outerShdw>
-          </a:effectLst>
-        </p:spPr>
-        <p:txBody>
-          <a:bodyPr/>
-          <a:lstStyle/>
-          <a:p>
-            <a:endParaRPr lang="en-IN"/>
-          </a:p>
-        </p:txBody>
-      </p:sp>
-      <p:sp>
-        <p:nvSpPr>
-          <p:cNvPr id="10" name="Shape 8"/>
-          <p:cNvSpPr/>
-          <p:nvPr/>
-        </p:nvSpPr>
-        <p:spPr>
-          <a:xfrm>
-            <a:off x="4910328" y="1051560"/>
-            <a:ext cx="566928" cy="566928"/>
-          </a:xfrm>
-          <a:prstGeom prst="ellipse">
-            <a:avLst/>
-          </a:prstGeom>
-          <a:solidFill>
-            <a:srgbClr val="0D5C8F"/>
-          </a:solidFill>
-          <a:ln w="12700">
-            <a:solidFill>
-              <a:srgbClr val="0D5C8F"/>
-            </a:solidFill>
-            <a:prstDash val="solid"/>
-          </a:ln>
-        </p:spPr>
-        <p:txBody>
-          <a:bodyPr/>
-          <a:lstStyle/>
-          <a:p>
-            <a:endParaRPr lang="en-IN"/>
-          </a:p>
-        </p:txBody>
-      </p:sp>
-      <p:sp>
-        <p:nvSpPr>
-          <p:cNvPr id="11" name="Text 9"/>
-          <p:cNvSpPr/>
-          <p:nvPr/>
-        </p:nvSpPr>
-        <p:spPr>
-          <a:xfrm>
-            <a:off x="4910328" y="1051560"/>
-            <a:ext cx="566928" cy="566928"/>
-          </a:xfrm>
-          <a:prstGeom prst="rect">
-            <a:avLst/>
-          </a:prstGeom>
-          <a:noFill/>
-          <a:ln/>
-        </p:spPr>
-        <p:txBody>
-          <a:bodyPr wrap="square" lIns="0" tIns="0" rIns="0" bIns="0" rtlCol="0" anchor="ctr"/>
-          <a:lstStyle/>
-          <a:p>
-            <a:pPr marL="0" indent="0" algn="ctr">
-              <a:buNone/>
-            </a:pPr>
-            <a:r>
-              <a:rPr lang="en-US" sz="1600" b="1" dirty="0">
-                <a:solidFill>
-                  <a:srgbClr val="FFFFFF"/>
-                </a:solidFill>
-                <a:latin typeface="Calibri" pitchFamily="34" charset="0"/>
-                <a:ea typeface="Calibri" pitchFamily="34" charset="-122"/>
-                <a:cs typeface="Calibri" pitchFamily="34" charset="-120"/>
-              </a:rPr>
-              <a:t>2</a:t>
-            </a:r>
-            <a:endParaRPr lang="en-US" sz="1600" dirty="0"/>
-          </a:p>
-        </p:txBody>
-      </p:sp>
-      <p:sp>
-        <p:nvSpPr>
-          <p:cNvPr id="12" name="Text 10"/>
-          <p:cNvSpPr/>
-          <p:nvPr/>
-        </p:nvSpPr>
-        <p:spPr>
-          <a:xfrm>
-            <a:off x="5614416" y="1088136"/>
-            <a:ext cx="3090672" cy="384048"/>
-          </a:xfrm>
-          <a:prstGeom prst="rect">
-            <a:avLst/>
-          </a:prstGeom>
-          <a:noFill/>
-          <a:ln/>
-        </p:spPr>
-        <p:txBody>
-          <a:bodyPr wrap="square" lIns="0" tIns="0" rIns="0" bIns="0" rtlCol="0" anchor="ctr"/>
-          <a:lstStyle/>
-          <a:p>
-            <a:pPr marL="0" indent="0">
-              <a:buNone/>
-            </a:pPr>
-            <a:r>
-              <a:rPr lang="en-US" sz="1400" b="1" dirty="0">
-                <a:solidFill>
-                  <a:srgbClr val="0A2342"/>
-                </a:solidFill>
-                <a:latin typeface="Calibri" pitchFamily="34" charset="0"/>
-                <a:ea typeface="Calibri" pitchFamily="34" charset="-122"/>
-                <a:cs typeface="Calibri" pitchFamily="34" charset="-120"/>
-              </a:rPr>
-              <a:t>Risk Identification</a:t>
-            </a:r>
-            <a:endParaRPr lang="en-US" sz="1400" dirty="0"/>
-          </a:p>
-        </p:txBody>
-      </p:sp>
-      <p:sp>
-        <p:nvSpPr>
-          <p:cNvPr id="13" name="Text 11"/>
-          <p:cNvSpPr/>
-          <p:nvPr/>
-        </p:nvSpPr>
-        <p:spPr>
-          <a:xfrm>
-            <a:off x="4910328" y="1709928"/>
-            <a:ext cx="3794760" cy="914400"/>
-          </a:xfrm>
-          <a:prstGeom prst="rect">
-            <a:avLst/>
-          </a:prstGeom>
-          <a:noFill/>
-          <a:ln/>
-        </p:spPr>
-        <p:txBody>
-          <a:bodyPr wrap="square" lIns="0" tIns="0" rIns="0" bIns="0" rtlCol="0" anchor="ctr"/>
-          <a:lstStyle/>
-          <a:p>
-            <a:pPr marL="0" indent="0">
-              <a:buNone/>
-            </a:pPr>
-            <a:r>
-              <a:rPr lang="en-US" sz="1150" dirty="0">
-                <a:solidFill>
-                  <a:srgbClr val="1E293B"/>
-                </a:solidFill>
-                <a:latin typeface="Calibri Light" pitchFamily="34" charset="0"/>
-                <a:ea typeface="Calibri Light" pitchFamily="34" charset="-122"/>
-                <a:cs typeface="Calibri Light" pitchFamily="34" charset="-120"/>
-              </a:rPr>
-              <a:t>Identify countries at risk of severe water scarcity using classification models</a:t>
-            </a:r>
-            <a:endParaRPr lang="en-US" sz="1150" dirty="0"/>
-          </a:p>
-        </p:txBody>
-      </p:sp>
-      <p:sp>
-        <p:nvSpPr>
-          <p:cNvPr id="14" name="Shape 12"/>
-          <p:cNvSpPr/>
-          <p:nvPr/>
-        </p:nvSpPr>
-        <p:spPr>
-          <a:xfrm>
-            <a:off x="320040" y="2971800"/>
-            <a:ext cx="4160520" cy="1874520"/>
-          </a:xfrm>
-          <a:prstGeom prst="rect">
-            <a:avLst/>
-          </a:prstGeom>
-          <a:solidFill>
-            <a:srgbClr val="FFFFFF"/>
-          </a:solidFill>
-          <a:ln w="12700">
-            <a:solidFill>
-              <a:srgbClr val="D1E9FF"/>
-            </a:solidFill>
-            <a:prstDash val="solid"/>
-          </a:ln>
-          <a:effectLst>
-            <a:outerShdw blurRad="101600" dist="38100" dir="8100000" algn="bl" rotWithShape="0">
-              <a:srgbClr val="000000">
-                <a:alpha val="10000"/>
-              </a:srgbClr>
-            </a:outerShdw>
-          </a:effectLst>
-        </p:spPr>
-        <p:txBody>
-          <a:bodyPr/>
-          <a:lstStyle/>
-          <a:p>
-            <a:endParaRPr lang="en-IN"/>
-          </a:p>
-        </p:txBody>
-      </p:sp>
-      <p:sp>
-        <p:nvSpPr>
-          <p:cNvPr id="15" name="Shape 13"/>
-          <p:cNvSpPr/>
-          <p:nvPr/>
-        </p:nvSpPr>
-        <p:spPr>
-          <a:xfrm>
-            <a:off x="502920" y="3154680"/>
-            <a:ext cx="566928" cy="566928"/>
-          </a:xfrm>
-          <a:prstGeom prst="ellipse">
-            <a:avLst/>
-          </a:prstGeom>
-          <a:solidFill>
-            <a:srgbClr val="0891B2"/>
-          </a:solidFill>
-          <a:ln w="12700">
-            <a:solidFill>
-              <a:srgbClr val="0891B2"/>
-            </a:solidFill>
-            <a:prstDash val="solid"/>
-          </a:ln>
-        </p:spPr>
-        <p:txBody>
-          <a:bodyPr/>
-          <a:lstStyle/>
-          <a:p>
-            <a:endParaRPr lang="en-IN"/>
-          </a:p>
-        </p:txBody>
-      </p:sp>
-      <p:sp>
-        <p:nvSpPr>
-          <p:cNvPr id="16" name="Text 14"/>
-          <p:cNvSpPr/>
-          <p:nvPr/>
-        </p:nvSpPr>
-        <p:spPr>
-          <a:xfrm>
-            <a:off x="502920" y="3154680"/>
-            <a:ext cx="566928" cy="566928"/>
-          </a:xfrm>
-          <a:prstGeom prst="rect">
-            <a:avLst/>
-          </a:prstGeom>
-          <a:noFill/>
-          <a:ln/>
-        </p:spPr>
-        <p:txBody>
-          <a:bodyPr wrap="square" lIns="0" tIns="0" rIns="0" bIns="0" rtlCol="0" anchor="ctr"/>
-          <a:lstStyle/>
-          <a:p>
-            <a:pPr marL="0" indent="0" algn="ctr">
-              <a:buNone/>
-            </a:pPr>
-            <a:r>
-              <a:rPr lang="en-US" sz="1600" b="1" dirty="0">
-                <a:solidFill>
-                  <a:srgbClr val="FFFFFF"/>
-                </a:solidFill>
-                <a:latin typeface="Calibri" pitchFamily="34" charset="0"/>
-                <a:ea typeface="Calibri" pitchFamily="34" charset="-122"/>
-                <a:cs typeface="Calibri" pitchFamily="34" charset="-120"/>
-              </a:rPr>
-              <a:t>3</a:t>
-            </a:r>
-            <a:endParaRPr lang="en-US" sz="1600" dirty="0"/>
-          </a:p>
-        </p:txBody>
-      </p:sp>
-      <p:sp>
-        <p:nvSpPr>
-          <p:cNvPr id="17" name="Text 15"/>
-          <p:cNvSpPr/>
-          <p:nvPr/>
-        </p:nvSpPr>
-        <p:spPr>
-          <a:xfrm>
-            <a:off x="1207008" y="3191256"/>
-            <a:ext cx="3090672" cy="384048"/>
-          </a:xfrm>
-          <a:prstGeom prst="rect">
-            <a:avLst/>
-          </a:prstGeom>
-          <a:noFill/>
-          <a:ln/>
-        </p:spPr>
-        <p:txBody>
-          <a:bodyPr wrap="square" lIns="0" tIns="0" rIns="0" bIns="0" rtlCol="0" anchor="ctr"/>
-          <a:lstStyle/>
-          <a:p>
-            <a:pPr marL="0" indent="0">
-              <a:buNone/>
-            </a:pPr>
-            <a:r>
-              <a:rPr lang="en-US" sz="1400" b="1" dirty="0">
-                <a:solidFill>
-                  <a:srgbClr val="0A2342"/>
-                </a:solidFill>
-                <a:latin typeface="Calibri" pitchFamily="34" charset="0"/>
-                <a:ea typeface="Calibri" pitchFamily="34" charset="-122"/>
-                <a:cs typeface="Calibri" pitchFamily="34" charset="-120"/>
-              </a:rPr>
-              <a:t>Country Clustering</a:t>
-            </a:r>
-            <a:endParaRPr lang="en-US" sz="1400" dirty="0"/>
-          </a:p>
-        </p:txBody>
-      </p:sp>
-      <p:sp>
-        <p:nvSpPr>
-          <p:cNvPr id="18" name="Text 16"/>
-          <p:cNvSpPr/>
-          <p:nvPr/>
-        </p:nvSpPr>
-        <p:spPr>
-          <a:xfrm>
-            <a:off x="502920" y="3813048"/>
-            <a:ext cx="3794760" cy="914400"/>
-          </a:xfrm>
-          <a:prstGeom prst="rect">
-            <a:avLst/>
-          </a:prstGeom>
-          <a:noFill/>
-          <a:ln/>
-        </p:spPr>
-        <p:txBody>
-          <a:bodyPr wrap="square" lIns="0" tIns="0" rIns="0" bIns="0" rtlCol="0" anchor="ctr"/>
-          <a:lstStyle/>
-          <a:p>
-            <a:pPr marL="0" indent="0">
-              <a:buNone/>
-            </a:pPr>
-            <a:r>
-              <a:rPr lang="en-US" sz="1150" dirty="0">
-                <a:solidFill>
-                  <a:srgbClr val="1E293B"/>
-                </a:solidFill>
-                <a:latin typeface="Calibri Light" pitchFamily="34" charset="0"/>
-                <a:ea typeface="Calibri Light" pitchFamily="34" charset="-122"/>
-                <a:cs typeface="Calibri Light" pitchFamily="34" charset="-120"/>
-              </a:rPr>
-              <a:t>Cluster countries based on usage patterns using K-Means or DBSCAN</a:t>
-            </a:r>
-            <a:endParaRPr lang="en-US" sz="1150" dirty="0"/>
-          </a:p>
-        </p:txBody>
-      </p:sp>
-      <p:sp>
-        <p:nvSpPr>
-          <p:cNvPr id="19" name="Shape 17"/>
-          <p:cNvSpPr/>
-          <p:nvPr/>
-        </p:nvSpPr>
-        <p:spPr>
-          <a:xfrm>
-            <a:off x="4727448" y="2971800"/>
-            <a:ext cx="4160520" cy="1874520"/>
-          </a:xfrm>
-          <a:prstGeom prst="rect">
-            <a:avLst/>
-          </a:prstGeom>
-          <a:solidFill>
-            <a:srgbClr val="FFFFFF"/>
-          </a:solidFill>
-          <a:ln w="12700">
-            <a:solidFill>
-              <a:srgbClr val="D1E9FF"/>
-            </a:solidFill>
-            <a:prstDash val="solid"/>
-          </a:ln>
-          <a:effectLst>
-            <a:outerShdw blurRad="101600" dist="38100" dir="8100000" algn="bl" rotWithShape="0">
-              <a:srgbClr val="000000">
-                <a:alpha val="10000"/>
-              </a:srgbClr>
-            </a:outerShdw>
-          </a:effectLst>
-        </p:spPr>
-        <p:txBody>
-          <a:bodyPr/>
-          <a:lstStyle/>
-          <a:p>
-            <a:endParaRPr lang="en-IN"/>
-          </a:p>
-        </p:txBody>
-      </p:sp>
-      <p:sp>
-        <p:nvSpPr>
-          <p:cNvPr id="20" name="Shape 18"/>
-          <p:cNvSpPr/>
-          <p:nvPr/>
-        </p:nvSpPr>
-        <p:spPr>
-          <a:xfrm>
-            <a:off x="4910328" y="3154680"/>
-            <a:ext cx="566928" cy="566928"/>
-          </a:xfrm>
-          <a:prstGeom prst="ellipse">
-            <a:avLst/>
-          </a:prstGeom>
-          <a:solidFill>
-            <a:srgbClr val="0E7490"/>
-          </a:solidFill>
-          <a:ln w="12700">
-            <a:solidFill>
-              <a:srgbClr val="0E7490"/>
-            </a:solidFill>
-            <a:prstDash val="solid"/>
-          </a:ln>
-        </p:spPr>
-        <p:txBody>
-          <a:bodyPr/>
-          <a:lstStyle/>
-          <a:p>
-            <a:endParaRPr lang="en-IN"/>
-          </a:p>
-        </p:txBody>
-      </p:sp>
-      <p:sp>
-        <p:nvSpPr>
-          <p:cNvPr id="21" name="Text 19"/>
-          <p:cNvSpPr/>
-          <p:nvPr/>
-        </p:nvSpPr>
-        <p:spPr>
-          <a:xfrm>
-            <a:off x="4910328" y="3154680"/>
-            <a:ext cx="566928" cy="566928"/>
-          </a:xfrm>
-          <a:prstGeom prst="rect">
-            <a:avLst/>
-          </a:prstGeom>
-          <a:noFill/>
-          <a:ln/>
-        </p:spPr>
-        <p:txBody>
-          <a:bodyPr wrap="square" lIns="0" tIns="0" rIns="0" bIns="0" rtlCol="0" anchor="ctr"/>
-          <a:lstStyle/>
-          <a:p>
-            <a:pPr marL="0" indent="0" algn="ctr">
-              <a:buNone/>
-            </a:pPr>
-            <a:r>
-              <a:rPr lang="en-US" sz="1600" b="1" dirty="0">
-                <a:solidFill>
-                  <a:srgbClr val="FFFFFF"/>
-                </a:solidFill>
-                <a:latin typeface="Calibri" pitchFamily="34" charset="0"/>
-                <a:ea typeface="Calibri" pitchFamily="34" charset="-122"/>
-                <a:cs typeface="Calibri" pitchFamily="34" charset="-120"/>
-              </a:rPr>
-              <a:t>4</a:t>
-            </a:r>
-            <a:endParaRPr lang="en-US" sz="1600" dirty="0"/>
-          </a:p>
-        </p:txBody>
-      </p:sp>
-      <p:sp>
-        <p:nvSpPr>
-          <p:cNvPr id="22" name="Text 20"/>
-          <p:cNvSpPr/>
-          <p:nvPr/>
-        </p:nvSpPr>
-        <p:spPr>
-          <a:xfrm>
-            <a:off x="5614416" y="3191256"/>
-            <a:ext cx="3090672" cy="384048"/>
-          </a:xfrm>
-          <a:prstGeom prst="rect">
-            <a:avLst/>
-          </a:prstGeom>
-          <a:noFill/>
-          <a:ln/>
-        </p:spPr>
-        <p:txBody>
-          <a:bodyPr wrap="square" lIns="0" tIns="0" rIns="0" bIns="0" rtlCol="0" anchor="ctr"/>
-          <a:lstStyle/>
-          <a:p>
-            <a:pPr marL="0" indent="0">
-              <a:buNone/>
-            </a:pPr>
-            <a:r>
-              <a:rPr lang="en-US" sz="1400" b="1" dirty="0">
-                <a:solidFill>
-                  <a:srgbClr val="0A2342"/>
-                </a:solidFill>
-                <a:latin typeface="Calibri" pitchFamily="34" charset="0"/>
-                <a:ea typeface="Calibri" pitchFamily="34" charset="-122"/>
-                <a:cs typeface="Calibri" pitchFamily="34" charset="-120"/>
-              </a:rPr>
-              <a:t>Sustainability Trends</a:t>
-            </a:r>
-            <a:endParaRPr lang="en-US" sz="1400" dirty="0"/>
-          </a:p>
-        </p:txBody>
-      </p:sp>
-      <p:sp>
-        <p:nvSpPr>
-          <p:cNvPr id="23" name="Text 21"/>
-          <p:cNvSpPr/>
-          <p:nvPr/>
-        </p:nvSpPr>
-        <p:spPr>
-          <a:xfrm>
-            <a:off x="4910328" y="3813048"/>
-            <a:ext cx="3794760" cy="914400"/>
-          </a:xfrm>
-          <a:prstGeom prst="rect">
-            <a:avLst/>
-          </a:prstGeom>
-          <a:noFill/>
-          <a:ln/>
-        </p:spPr>
-        <p:txBody>
-          <a:bodyPr wrap="square" lIns="0" tIns="0" rIns="0" bIns="0" rtlCol="0" anchor="ctr"/>
-          <a:lstStyle/>
-          <a:p>
-            <a:pPr marL="0" indent="0">
-              <a:buNone/>
-            </a:pPr>
-            <a:r>
-              <a:rPr lang="en-US" sz="1150" dirty="0">
-                <a:solidFill>
-                  <a:srgbClr val="1E293B"/>
-                </a:solidFill>
-                <a:latin typeface="Calibri Light" pitchFamily="34" charset="0"/>
-                <a:ea typeface="Calibri Light" pitchFamily="34" charset="-122"/>
-                <a:cs typeface="Calibri Light" pitchFamily="34" charset="-120"/>
-              </a:rPr>
-              <a:t>Study long-term sustainability trends and policy impact on water usage</a:t>
-            </a:r>
-            <a:endParaRPr lang="en-US" sz="1150" dirty="0"/>
           </a:p>
         </p:txBody>
       </p:sp>
